--- a/mon/ngu_van/slide/lop12/Slide_NGUVAN12_Bai1_KhaNangLonLaoCuaTieuThuyet_T1-11.pptx
+++ b/mon/ngu_van/slide/lop12/Slide_NGUVAN12_Bai1_KhaNangLonLaoCuaTieuThuyet_T1-11.pptx
@@ -43,6 +43,8 @@
     <p:sldId id="291" r:id="rId43"/>
     <p:sldId id="292" r:id="rId44"/>
     <p:sldId id="293" r:id="rId45"/>
+    <p:sldId id="294" r:id="rId46"/>
+    <p:sldId id="295" r:id="rId47"/>
   </p:sldIdLst>
   <p:sldSz cx="12191695" cy="6858000" type="screen4x3"/>
   <p:notesSz cx="6858000" cy="9144000"/>
@@ -609,7 +611,7 @@
           <a:lstStyle/>
           <a:p>
             <a:r>
-              <a:t>Slide LỜI GIẢI – GV chốt sau khi HS trình bày. </a:t>
+              <a:t>Slide ĐỀ BÀI – cho HS suy nghĩ, thảo luận (không chiếu lời giải). </a:t>
             </a:r>
           </a:p>
         </p:txBody>
@@ -679,7 +681,7 @@
           <a:lstStyle/>
           <a:p>
             <a:r>
-              <a:t>Slide ĐỀ BÀI – cho HS suy nghĩ, thảo luận (không chiếu lời giải). </a:t>
+              <a:t>Slide LỜI GIẢI – GV chốt sau khi HS trình bày. </a:t>
             </a:r>
           </a:p>
         </p:txBody>
@@ -749,7 +751,7 @@
           <a:lstStyle/>
           <a:p>
             <a:r>
-              <a:t>Slide LỜI GIẢI – GV chốt sau khi HS trình bày. </a:t>
+              <a:t>Slide ĐỀ BÀI – cho HS suy nghĩ, thảo luận (không chiếu lời giải). </a:t>
             </a:r>
           </a:p>
         </p:txBody>
@@ -819,7 +821,7 @@
           <a:lstStyle/>
           <a:p>
             <a:r>
-              <a:t>Slide ĐỀ BÀI – cho HS suy nghĩ, thảo luận (không chiếu lời giải). </a:t>
+              <a:t>Slide LỜI GIẢI – GV chốt sau khi HS trình bày. </a:t>
             </a:r>
           </a:p>
         </p:txBody>
@@ -889,7 +891,7 @@
           <a:lstStyle/>
           <a:p>
             <a:r>
-              <a:t>Slide LỜI GIẢI – GV chốt sau khi HS trình bày. </a:t>
+              <a:t>Slide ĐỀ BÀI – cho HS suy nghĩ, thảo luận (không chiếu lời giải). </a:t>
             </a:r>
           </a:p>
         </p:txBody>
@@ -959,7 +961,7 @@
           <a:lstStyle/>
           <a:p>
             <a:r>
-              <a:t>Câu hỏi Trước khi đọc SGK tr.19.</a:t>
+              <a:t>Slide LỜI GIẢI – GV chốt sau khi HS trình bày. </a:t>
             </a:r>
           </a:p>
         </p:txBody>
@@ -1029,7 +1031,7 @@
           <a:lstStyle/>
           <a:p>
             <a:r>
-              <a:t>Slide ĐỀ BÀI – cho HS suy nghĩ, thảo luận (không chiếu lời giải). </a:t>
+              <a:t>Câu hỏi Trước khi đọc SGK tr.19.</a:t>
             </a:r>
           </a:p>
         </p:txBody>
@@ -1099,7 +1101,7 @@
           <a:lstStyle/>
           <a:p>
             <a:r>
-              <a:t>Slide LỜI GIẢI – GV chốt sau khi HS trình bày. </a:t>
+              <a:t>Bấm vào đường link hoặc quét mã QR để mở video (cần Internet). </a:t>
             </a:r>
           </a:p>
         </p:txBody>
@@ -2079,7 +2081,147 @@
           <a:lstStyle/>
           <a:p>
             <a:r>
+              <a:t>Bấm vào đường link hoặc quét mã QR để mở video (cần Internet). </a:t>
+            </a:r>
+          </a:p>
+        </p:txBody>
+      </p:sp>
+      <p:sp>
+        <p:nvSpPr>
+          <p:cNvPr id="4" name="Slide Number Placeholder 3"/>
+          <p:cNvSpPr>
+            <a:spLocks noGrp="1"/>
+          </p:cNvSpPr>
+          <p:nvPr>
+            <p:ph type="sldNum" idx="5" sz="quarter"/>
+          </p:nvPr>
+        </p:nvSpPr>
+        <p:spPr/>
+      </p:sp>
+    </p:spTree>
+  </p:cSld>
+  <p:clrMapOvr>
+    <a:masterClrMapping/>
+  </p:clrMapOvr>
+</p:notes>
+</file>
+
+<file path=ppt/notesSlides/notesSlide30.xml><?xml version="1.0" encoding="utf-8"?>
+<p:notes xmlns:a="http://schemas.openxmlformats.org/drawingml/2006/main" xmlns:p="http://schemas.openxmlformats.org/presentationml/2006/main" xmlns:r="http://schemas.openxmlformats.org/officeDocument/2006/relationships">
+  <p:cSld>
+    <p:spTree>
+      <p:nvGrpSpPr>
+        <p:cNvPr id="1" name=""/>
+        <p:cNvGrpSpPr/>
+        <p:nvPr/>
+      </p:nvGrpSpPr>
+      <p:grpSpPr>
+        <a:xfrm>
+          <a:off x="0" y="0"/>
+          <a:ext cx="0" cy="0"/>
+          <a:chOff x="0" y="0"/>
+          <a:chExt cx="0" cy="0"/>
+        </a:xfrm>
+      </p:grpSpPr>
+      <p:sp>
+        <p:nvSpPr>
+          <p:cNvPr id="2" name="Slide Image Placeholder 1"/>
+          <p:cNvSpPr>
+            <a:spLocks noGrp="1"/>
+          </p:cNvSpPr>
+          <p:nvPr>
+            <p:ph type="sldImg" idx="2"/>
+          </p:nvPr>
+        </p:nvSpPr>
+        <p:spPr/>
+      </p:sp>
+      <p:sp>
+        <p:nvSpPr>
+          <p:cNvPr id="3" name="Notes Placeholder 2"/>
+          <p:cNvSpPr>
+            <a:spLocks noGrp="1"/>
+          </p:cNvSpPr>
+          <p:nvPr>
+            <p:ph type="body" idx="3" sz="quarter"/>
+          </p:nvPr>
+        </p:nvSpPr>
+        <p:spPr/>
+        <p:txBody>
+          <a:bodyPr/>
+          <a:lstStyle/>
+          <a:p>
+            <a:r>
               <a:t>Slide ĐỀ BÀI – cho HS suy nghĩ, thảo luận (không chiếu lời giải). </a:t>
+            </a:r>
+          </a:p>
+        </p:txBody>
+      </p:sp>
+      <p:sp>
+        <p:nvSpPr>
+          <p:cNvPr id="4" name="Slide Number Placeholder 3"/>
+          <p:cNvSpPr>
+            <a:spLocks noGrp="1"/>
+          </p:cNvSpPr>
+          <p:nvPr>
+            <p:ph type="sldNum" idx="5" sz="quarter"/>
+          </p:nvPr>
+        </p:nvSpPr>
+        <p:spPr/>
+      </p:sp>
+    </p:spTree>
+  </p:cSld>
+  <p:clrMapOvr>
+    <a:masterClrMapping/>
+  </p:clrMapOvr>
+</p:notes>
+</file>
+
+<file path=ppt/notesSlides/notesSlide31.xml><?xml version="1.0" encoding="utf-8"?>
+<p:notes xmlns:a="http://schemas.openxmlformats.org/drawingml/2006/main" xmlns:p="http://schemas.openxmlformats.org/presentationml/2006/main" xmlns:r="http://schemas.openxmlformats.org/officeDocument/2006/relationships">
+  <p:cSld>
+    <p:spTree>
+      <p:nvGrpSpPr>
+        <p:cNvPr id="1" name=""/>
+        <p:cNvGrpSpPr/>
+        <p:nvPr/>
+      </p:nvGrpSpPr>
+      <p:grpSpPr>
+        <a:xfrm>
+          <a:off x="0" y="0"/>
+          <a:ext cx="0" cy="0"/>
+          <a:chOff x="0" y="0"/>
+          <a:chExt cx="0" cy="0"/>
+        </a:xfrm>
+      </p:grpSpPr>
+      <p:sp>
+        <p:nvSpPr>
+          <p:cNvPr id="2" name="Slide Image Placeholder 1"/>
+          <p:cNvSpPr>
+            <a:spLocks noGrp="1"/>
+          </p:cNvSpPr>
+          <p:nvPr>
+            <p:ph type="sldImg" idx="2"/>
+          </p:nvPr>
+        </p:nvSpPr>
+        <p:spPr/>
+      </p:sp>
+      <p:sp>
+        <p:nvSpPr>
+          <p:cNvPr id="3" name="Notes Placeholder 2"/>
+          <p:cNvSpPr>
+            <a:spLocks noGrp="1"/>
+          </p:cNvSpPr>
+          <p:nvPr>
+            <p:ph type="body" idx="3" sz="quarter"/>
+          </p:nvPr>
+        </p:nvSpPr>
+        <p:spPr/>
+        <p:txBody>
+          <a:bodyPr/>
+          <a:lstStyle/>
+          <a:p>
+            <a:r>
+              <a:t>Slide LỜI GIẢI – GV chốt sau khi HS trình bày. </a:t>
             </a:r>
           </a:p>
         </p:txBody>
@@ -2149,7 +2291,7 @@
           <a:lstStyle/>
           <a:p>
             <a:r>
-              <a:t>Slide LỜI GIẢI – GV chốt sau khi HS trình bày. </a:t>
+              <a:t>Slide ĐỀ BÀI – cho HS suy nghĩ, thảo luận (không chiếu lời giải). </a:t>
             </a:r>
           </a:p>
         </p:txBody>
@@ -2219,7 +2361,7 @@
           <a:lstStyle/>
           <a:p>
             <a:r>
-              <a:t>Slide ĐỀ BÀI – cho HS suy nghĩ, thảo luận (không chiếu lời giải). </a:t>
+              <a:t>Slide LỜI GIẢI – GV chốt sau khi HS trình bày. </a:t>
             </a:r>
           </a:p>
         </p:txBody>
@@ -2289,7 +2431,7 @@
           <a:lstStyle/>
           <a:p>
             <a:r>
-              <a:t>Slide LỜI GIẢI – GV chốt sau khi HS trình bày. </a:t>
+              <a:t>Slide ĐỀ BÀI – cho HS suy nghĩ, thảo luận (không chiếu lời giải). </a:t>
             </a:r>
           </a:p>
         </p:txBody>
@@ -2359,7 +2501,7 @@
           <a:lstStyle/>
           <a:p>
             <a:r>
-              <a:t>Slide ĐỀ BÀI – cho HS suy nghĩ, thảo luận (không chiếu lời giải). </a:t>
+              <a:t>Slide LỜI GIẢI – GV chốt sau khi HS trình bày. </a:t>
             </a:r>
           </a:p>
         </p:txBody>
@@ -2429,7 +2571,7 @@
           <a:lstStyle/>
           <a:p>
             <a:r>
-              <a:t>Slide LỜI GIẢI – GV chốt sau khi HS trình bày. </a:t>
+              <a:t>Slide ĐỀ BÀI – cho HS suy nghĩ, thảo luận (không chiếu lời giải). </a:t>
             </a:r>
           </a:p>
         </p:txBody>
@@ -2499,7 +2641,7 @@
           <a:lstStyle/>
           <a:p>
             <a:r>
-              <a:t>Slide ĐỀ BÀI – cho HS suy nghĩ, thảo luận (không chiếu lời giải). </a:t>
+              <a:t>Slide LỜI GIẢI – GV chốt sau khi HS trình bày. </a:t>
             </a:r>
           </a:p>
         </p:txBody>
@@ -5729,14 +5871,14 @@
         </p:nvSpPr>
         <p:spPr>
           <a:xfrm>
-            <a:off x="10253167" y="457200"/>
-            <a:ext cx="1389888" cy="457200"/>
+            <a:off x="9942271" y="457200"/>
+            <a:ext cx="1700784" cy="457200"/>
           </a:xfrm>
           <a:prstGeom prst="roundRect">
             <a:avLst/>
           </a:prstGeom>
           <a:solidFill>
-            <a:srgbClr val="1E40AF"/>
+            <a:srgbClr val="991B1B"/>
           </a:solidFill>
           <a:ln>
             <a:noFill/>
@@ -5769,7 +5911,7 @@
                 </a:solidFill>
                 <a:latin typeface="Arial"/>
               </a:rPr>
-              <a:t>ĐỀ BÀI</a:t>
+              <a:t>LỜI GIẢI</a:t>
             </a:r>
           </a:p>
         </p:txBody>
@@ -5783,7 +5925,7 @@
         <p:spPr>
           <a:xfrm>
             <a:off x="731520" y="274320"/>
-            <a:ext cx="9582912" cy="868680"/>
+            <a:ext cx="9272016" cy="868680"/>
           </a:xfrm>
           <a:prstGeom prst="rect">
             <a:avLst/>
@@ -5803,7 +5945,7 @@
                 </a:solidFill>
                 <a:latin typeface="Arial"/>
               </a:rPr>
-              <a:t>TÌNH HUỐNG THEN CHỐT</a:t>
+              <a:t>NGÔI KỂ VÀ ĐIỂM NHÌN</a:t>
             </a:r>
           </a:p>
         </p:txBody>
@@ -5896,7 +6038,7 @@
         <p:spPr>
           <a:xfrm>
             <a:off x="731520" y="1463040"/>
-            <a:ext cx="10789920" cy="3566160"/>
+            <a:ext cx="10789920" cy="3474720"/>
           </a:xfrm>
           <a:prstGeom prst="rect">
             <a:avLst/>
@@ -5909,19 +6051,66 @@
           </a:bodyPr>
           <a:lstStyle/>
           <a:p>
-            <a:pPr algn="l">
+            <a:pPr algn="l" marL="365760" indent="-365760">
               <a:spcAft>
                 <a:spcPts val="800"/>
               </a:spcAft>
+              <a:buClr>
+                <a:srgbClr val="1E40AF"/>
+              </a:buClr>
+              <a:buFont typeface="Arial"/>
+              <a:buChar char="•"/>
             </a:pPr>
             <a:r>
-              <a:rPr sz="2600" b="1">
+              <a:rPr sz="2300">
                 <a:solidFill>
                   <a:srgbClr val="1E293B"/>
                 </a:solidFill>
                 <a:latin typeface="Calibri"/>
               </a:rPr>
-              <a:t>Tình huống nào đóng vai trò quan trọng nhất trong việc tạo nên kịch tính và bước ngoặt của đoạn trích? Phân tích tính chất của tình huống.</a:t>
+              <a:t>Ngôi thứ ba, điểm nhìn toàn tri.</a:t>
+            </a:r>
+          </a:p>
+          <a:p>
+            <a:pPr algn="l" marL="365760" indent="-365760">
+              <a:spcAft>
+                <a:spcPts val="800"/>
+              </a:spcAft>
+              <a:buClr>
+                <a:srgbClr val="1E40AF"/>
+              </a:buClr>
+              <a:buFont typeface="Arial"/>
+              <a:buChar char="•"/>
+            </a:pPr>
+            <a:r>
+              <a:rPr sz="2300">
+                <a:solidFill>
+                  <a:srgbClr val="1E293B"/>
+                </a:solidFill>
+                <a:latin typeface="Calibri"/>
+              </a:rPr>
+              <a:t>Giọng giễu nhại: lời lẽ trang trọng cho sự việc lố bịch.</a:t>
+            </a:r>
+          </a:p>
+          <a:p>
+            <a:pPr algn="l" marL="365760" indent="-365760">
+              <a:spcAft>
+                <a:spcPts val="800"/>
+              </a:spcAft>
+              <a:buClr>
+                <a:srgbClr val="1E40AF"/>
+              </a:buClr>
+              <a:buFont typeface="Arial"/>
+              <a:buChar char="•"/>
+            </a:pPr>
+            <a:r>
+              <a:rPr sz="2300">
+                <a:solidFill>
+                  <a:srgbClr val="1E293B"/>
+                </a:solidFill>
+                <a:latin typeface="Calibri"/>
+              </a:rPr>
+              <a:t>Soi thấu cả quan chức, vua Xiêm, đám đông.</a:t>
             </a:r>
           </a:p>
         </p:txBody>
@@ -5934,8 +6123,8 @@
         </p:nvSpPr>
         <p:spPr>
           <a:xfrm>
-            <a:off x="731520" y="5120640"/>
-            <a:ext cx="10789920" cy="693420"/>
+            <a:off x="731520" y="5074920"/>
+            <a:ext cx="10789920" cy="731520"/>
           </a:xfrm>
           <a:prstGeom prst="roundRect">
             <a:avLst>
@@ -5943,11 +6132,11 @@
             </a:avLst>
           </a:prstGeom>
           <a:solidFill>
-            <a:srgbClr val="EFF4FF"/>
+            <a:srgbClr val="FEF2F2"/>
           </a:solidFill>
           <a:ln w="19050">
             <a:solidFill>
-              <a:srgbClr val="1E40AF"/>
+              <a:srgbClr val="991B1B"/>
             </a:solidFill>
           </a:ln>
           <a:effectLst/>
@@ -5982,8 +6171,8 @@
         </p:nvSpPr>
         <p:spPr>
           <a:xfrm>
-            <a:off x="914400" y="5120640"/>
-            <a:ext cx="10424160" cy="693420"/>
+            <a:off x="914400" y="5074920"/>
+            <a:ext cx="10424160" cy="731520"/>
           </a:xfrm>
           <a:prstGeom prst="rect">
             <a:avLst/>
@@ -6002,13 +6191,13 @@
               </a:spcAft>
             </a:pPr>
             <a:r>
-              <a:rPr sz="2200" b="1">
-                <a:solidFill>
-                  <a:srgbClr val="1E40AF"/>
+              <a:rPr sz="2400" b="1">
+                <a:solidFill>
+                  <a:srgbClr val="991B1B"/>
                 </a:solidFill>
                 <a:latin typeface="Calibri"/>
               </a:rPr>
-              <a:t>💡 Vì sao quán quân lại được lệnh phải thua?</a:t>
+              <a:t>Phơi bày bản chất nhố nhăng của xã hội thượng lưu.</a:t>
             </a:r>
           </a:p>
         </p:txBody>
@@ -6091,14 +6280,14 @@
         </p:nvSpPr>
         <p:spPr>
           <a:xfrm>
-            <a:off x="9942271" y="457200"/>
-            <a:ext cx="1700784" cy="457200"/>
+            <a:off x="10253167" y="457200"/>
+            <a:ext cx="1389888" cy="457200"/>
           </a:xfrm>
           <a:prstGeom prst="roundRect">
             <a:avLst/>
           </a:prstGeom>
           <a:solidFill>
-            <a:srgbClr val="991B1B"/>
+            <a:srgbClr val="1E40AF"/>
           </a:solidFill>
           <a:ln>
             <a:noFill/>
@@ -6131,7 +6320,7 @@
                 </a:solidFill>
                 <a:latin typeface="Arial"/>
               </a:rPr>
-              <a:t>LỜI GIẢI</a:t>
+              <a:t>ĐỀ BÀI</a:t>
             </a:r>
           </a:p>
         </p:txBody>
@@ -6145,7 +6334,7 @@
         <p:spPr>
           <a:xfrm>
             <a:off x="731520" y="274320"/>
-            <a:ext cx="9272016" cy="868680"/>
+            <a:ext cx="9582912" cy="868680"/>
           </a:xfrm>
           <a:prstGeom prst="rect">
             <a:avLst/>
@@ -6258,7 +6447,7 @@
         <p:spPr>
           <a:xfrm>
             <a:off x="731520" y="1463040"/>
-            <a:ext cx="10789920" cy="3474720"/>
+            <a:ext cx="10789920" cy="3566160"/>
           </a:xfrm>
           <a:prstGeom prst="rect">
             <a:avLst/>
@@ -6271,66 +6460,19 @@
           </a:bodyPr>
           <a:lstStyle/>
           <a:p>
-            <a:pPr algn="l" marL="365760" indent="-365760">
+            <a:pPr algn="l">
               <a:spcAft>
                 <a:spcPts val="800"/>
               </a:spcAft>
-              <a:buClr>
-                <a:srgbClr val="1E40AF"/>
-              </a:buClr>
-              <a:buFont typeface="Arial"/>
-              <a:buChar char="•"/>
             </a:pPr>
             <a:r>
-              <a:rPr sz="2300">
+              <a:rPr sz="2600" b="1">
                 <a:solidFill>
                   <a:srgbClr val="1E293B"/>
                 </a:solidFill>
                 <a:latin typeface="Calibri"/>
               </a:rPr>
-              <a:t>Xuân được lệnh phải thua vua Xiêm.</a:t>
-            </a:r>
-          </a:p>
-          <a:p>
-            <a:pPr algn="l" marL="365760" indent="-365760">
-              <a:spcAft>
-                <a:spcPts val="800"/>
-              </a:spcAft>
-              <a:buClr>
-                <a:srgbClr val="1E40AF"/>
-              </a:buClr>
-              <a:buFont typeface="Arial"/>
-              <a:buChar char="•"/>
-            </a:pPr>
-            <a:r>
-              <a:rPr sz="2300">
-                <a:solidFill>
-                  <a:srgbClr val="1E293B"/>
-                </a:solidFill>
-                <a:latin typeface="Calibri"/>
-              </a:rPr>
-              <a:t>Tính chất: nghịch lí, trớ trêu – thắng thì “chiến tranh”, thua thì “cứu quốc”.</a:t>
-            </a:r>
-          </a:p>
-          <a:p>
-            <a:pPr algn="l" marL="365760" indent="-365760">
-              <a:spcAft>
-                <a:spcPts val="800"/>
-              </a:spcAft>
-              <a:buClr>
-                <a:srgbClr val="1E40AF"/>
-              </a:buClr>
-              <a:buFont typeface="Arial"/>
-              <a:buChar char="•"/>
-            </a:pPr>
-            <a:r>
-              <a:rPr sz="2300">
-                <a:solidFill>
-                  <a:srgbClr val="1E293B"/>
-                </a:solidFill>
-                <a:latin typeface="Calibri"/>
-              </a:rPr>
-              <a:t>Lột trần sự hèn nhát của bộ máy cai trị.</a:t>
+              <a:t>Tình huống nào đóng vai trò quan trọng nhất trong việc tạo nên kịch tính và bước ngoặt của đoạn trích? Phân tích tính chất của tình huống.</a:t>
             </a:r>
           </a:p>
         </p:txBody>
@@ -6343,8 +6485,8 @@
         </p:nvSpPr>
         <p:spPr>
           <a:xfrm>
-            <a:off x="731520" y="5074920"/>
-            <a:ext cx="10789920" cy="731520"/>
+            <a:off x="731520" y="5120640"/>
+            <a:ext cx="10789920" cy="693420"/>
           </a:xfrm>
           <a:prstGeom prst="roundRect">
             <a:avLst>
@@ -6352,11 +6494,11 @@
             </a:avLst>
           </a:prstGeom>
           <a:solidFill>
-            <a:srgbClr val="FEF2F2"/>
+            <a:srgbClr val="EFF4FF"/>
           </a:solidFill>
           <a:ln w="19050">
             <a:solidFill>
-              <a:srgbClr val="991B1B"/>
+              <a:srgbClr val="1E40AF"/>
             </a:solidFill>
           </a:ln>
           <a:effectLst/>
@@ -6391,8 +6533,8 @@
         </p:nvSpPr>
         <p:spPr>
           <a:xfrm>
-            <a:off x="914400" y="5074920"/>
-            <a:ext cx="10424160" cy="731520"/>
+            <a:off x="914400" y="5120640"/>
+            <a:ext cx="10424160" cy="693420"/>
           </a:xfrm>
           <a:prstGeom prst="rect">
             <a:avLst/>
@@ -6411,13 +6553,13 @@
               </a:spcAft>
             </a:pPr>
             <a:r>
-              <a:rPr sz="2400" b="1">
-                <a:solidFill>
-                  <a:srgbClr val="991B1B"/>
+              <a:rPr sz="2200" b="1">
+                <a:solidFill>
+                  <a:srgbClr val="1E40AF"/>
                 </a:solidFill>
                 <a:latin typeface="Calibri"/>
               </a:rPr>
-              <a:t>Tình huống trào phúng tạo kịch tính và bước ngoặt.</a:t>
+              <a:t>💡 Vì sao quán quân lại được lệnh phải thua?</a:t>
             </a:r>
           </a:p>
         </p:txBody>
@@ -6500,14 +6642,14 @@
         </p:nvSpPr>
         <p:spPr>
           <a:xfrm>
-            <a:off x="10253167" y="457200"/>
-            <a:ext cx="1389888" cy="457200"/>
+            <a:off x="9942271" y="457200"/>
+            <a:ext cx="1700784" cy="457200"/>
           </a:xfrm>
           <a:prstGeom prst="roundRect">
             <a:avLst/>
           </a:prstGeom>
           <a:solidFill>
-            <a:srgbClr val="1E40AF"/>
+            <a:srgbClr val="991B1B"/>
           </a:solidFill>
           <a:ln>
             <a:noFill/>
@@ -6540,7 +6682,7 @@
                 </a:solidFill>
                 <a:latin typeface="Arial"/>
               </a:rPr>
-              <a:t>ĐỀ BÀI</a:t>
+              <a:t>LỜI GIẢI</a:t>
             </a:r>
           </a:p>
         </p:txBody>
@@ -6554,7 +6696,7 @@
         <p:spPr>
           <a:xfrm>
             <a:off x="731520" y="274320"/>
-            <a:ext cx="9582912" cy="868680"/>
+            <a:ext cx="9272016" cy="868680"/>
           </a:xfrm>
           <a:prstGeom prst="rect">
             <a:avLst/>
@@ -6574,7 +6716,7 @@
                 </a:solidFill>
                 <a:latin typeface="Arial"/>
               </a:rPr>
-              <a:t>CẢNH HÙNG BIỆN</a:t>
+              <a:t>TÌNH HUỐNG THEN CHỐT</a:t>
             </a:r>
           </a:p>
         </p:txBody>
@@ -6667,7 +6809,7 @@
         <p:spPr>
           <a:xfrm>
             <a:off x="731520" y="1463040"/>
-            <a:ext cx="10789920" cy="3566160"/>
+            <a:ext cx="10789920" cy="3474720"/>
           </a:xfrm>
           <a:prstGeom prst="rect">
             <a:avLst/>
@@ -6680,19 +6822,66 @@
           </a:bodyPr>
           <a:lstStyle/>
           <a:p>
-            <a:pPr algn="l">
+            <a:pPr algn="l" marL="365760" indent="-365760">
               <a:spcAft>
                 <a:spcPts val="800"/>
               </a:spcAft>
+              <a:buClr>
+                <a:srgbClr val="1E40AF"/>
+              </a:buClr>
+              <a:buFont typeface="Arial"/>
+              <a:buChar char="•"/>
             </a:pPr>
             <a:r>
-              <a:rPr sz="2600" b="1">
+              <a:rPr sz="2300">
                 <a:solidFill>
                   <a:srgbClr val="1E293B"/>
                 </a:solidFill>
                 <a:latin typeface="Calibri"/>
               </a:rPr>
-              <a:t>Phân tích nét đặc sắc của cảnh Xuân Tóc Đỏ hùng biện trước công chúng. Những ghi chú trong ngoặc đơn gợi liên tưởng đến thể loại nào?</a:t>
+              <a:t>Xuân được lệnh phải thua vua Xiêm.</a:t>
+            </a:r>
+          </a:p>
+          <a:p>
+            <a:pPr algn="l" marL="365760" indent="-365760">
+              <a:spcAft>
+                <a:spcPts val="800"/>
+              </a:spcAft>
+              <a:buClr>
+                <a:srgbClr val="1E40AF"/>
+              </a:buClr>
+              <a:buFont typeface="Arial"/>
+              <a:buChar char="•"/>
+            </a:pPr>
+            <a:r>
+              <a:rPr sz="2300">
+                <a:solidFill>
+                  <a:srgbClr val="1E293B"/>
+                </a:solidFill>
+                <a:latin typeface="Calibri"/>
+              </a:rPr>
+              <a:t>Tính chất: nghịch lí, trớ trêu – thắng thì “chiến tranh”, thua thì “cứu quốc”.</a:t>
+            </a:r>
+          </a:p>
+          <a:p>
+            <a:pPr algn="l" marL="365760" indent="-365760">
+              <a:spcAft>
+                <a:spcPts val="800"/>
+              </a:spcAft>
+              <a:buClr>
+                <a:srgbClr val="1E40AF"/>
+              </a:buClr>
+              <a:buFont typeface="Arial"/>
+              <a:buChar char="•"/>
+            </a:pPr>
+            <a:r>
+              <a:rPr sz="2300">
+                <a:solidFill>
+                  <a:srgbClr val="1E293B"/>
+                </a:solidFill>
+                <a:latin typeface="Calibri"/>
+              </a:rPr>
+              <a:t>Lột trần sự hèn nhát của bộ máy cai trị.</a:t>
             </a:r>
           </a:p>
         </p:txBody>
@@ -6705,8 +6894,8 @@
         </p:nvSpPr>
         <p:spPr>
           <a:xfrm>
-            <a:off x="731520" y="5120640"/>
-            <a:ext cx="10789920" cy="693420"/>
+            <a:off x="731520" y="5074920"/>
+            <a:ext cx="10789920" cy="731520"/>
           </a:xfrm>
           <a:prstGeom prst="roundRect">
             <a:avLst>
@@ -6714,11 +6903,11 @@
             </a:avLst>
           </a:prstGeom>
           <a:solidFill>
-            <a:srgbClr val="EFF4FF"/>
+            <a:srgbClr val="FEF2F2"/>
           </a:solidFill>
           <a:ln w="19050">
             <a:solidFill>
-              <a:srgbClr val="1E40AF"/>
+              <a:srgbClr val="991B1B"/>
             </a:solidFill>
           </a:ln>
           <a:effectLst/>
@@ -6753,8 +6942,8 @@
         </p:nvSpPr>
         <p:spPr>
           <a:xfrm>
-            <a:off x="914400" y="5120640"/>
-            <a:ext cx="10424160" cy="693420"/>
+            <a:off x="914400" y="5074920"/>
+            <a:ext cx="10424160" cy="731520"/>
           </a:xfrm>
           <a:prstGeom prst="rect">
             <a:avLst/>
@@ -6773,13 +6962,13 @@
               </a:spcAft>
             </a:pPr>
             <a:r>
-              <a:rPr sz="2200" b="1">
-                <a:solidFill>
-                  <a:srgbClr val="1E40AF"/>
+              <a:rPr sz="2400" b="1">
+                <a:solidFill>
+                  <a:srgbClr val="991B1B"/>
                 </a:solidFill>
                 <a:latin typeface="Calibri"/>
               </a:rPr>
-              <a:t>💡 Chú ý cách xưng hô “ta – mi”.</a:t>
+              <a:t>Tình huống trào phúng tạo kịch tính và bước ngoặt.</a:t>
             </a:r>
           </a:p>
         </p:txBody>
@@ -6862,14 +7051,14 @@
         </p:nvSpPr>
         <p:spPr>
           <a:xfrm>
-            <a:off x="9942271" y="457200"/>
-            <a:ext cx="1700784" cy="457200"/>
+            <a:off x="10253167" y="457200"/>
+            <a:ext cx="1389888" cy="457200"/>
           </a:xfrm>
           <a:prstGeom prst="roundRect">
             <a:avLst/>
           </a:prstGeom>
           <a:solidFill>
-            <a:srgbClr val="991B1B"/>
+            <a:srgbClr val="1E40AF"/>
           </a:solidFill>
           <a:ln>
             <a:noFill/>
@@ -6902,7 +7091,7 @@
                 </a:solidFill>
                 <a:latin typeface="Arial"/>
               </a:rPr>
-              <a:t>LỜI GIẢI</a:t>
+              <a:t>ĐỀ BÀI</a:t>
             </a:r>
           </a:p>
         </p:txBody>
@@ -6916,7 +7105,7 @@
         <p:spPr>
           <a:xfrm>
             <a:off x="731520" y="274320"/>
-            <a:ext cx="9272016" cy="868680"/>
+            <a:ext cx="9582912" cy="868680"/>
           </a:xfrm>
           <a:prstGeom prst="rect">
             <a:avLst/>
@@ -7029,7 +7218,7 @@
         <p:spPr>
           <a:xfrm>
             <a:off x="731520" y="1463040"/>
-            <a:ext cx="10789920" cy="3474720"/>
+            <a:ext cx="10789920" cy="3566160"/>
           </a:xfrm>
           <a:prstGeom prst="rect">
             <a:avLst/>
@@ -7042,66 +7231,19 @@
           </a:bodyPr>
           <a:lstStyle/>
           <a:p>
-            <a:pPr algn="l" marL="365760" indent="-365760">
+            <a:pPr algn="l">
               <a:spcAft>
                 <a:spcPts val="800"/>
               </a:spcAft>
-              <a:buClr>
-                <a:srgbClr val="1E40AF"/>
-              </a:buClr>
-              <a:buFont typeface="Arial"/>
-              <a:buChar char="•"/>
             </a:pPr>
             <a:r>
-              <a:rPr sz="2300">
+              <a:rPr sz="2600" b="1">
                 <a:solidFill>
                   <a:srgbClr val="1E293B"/>
                 </a:solidFill>
                 <a:latin typeface="Calibri"/>
               </a:rPr>
-              <a:t>Giọng trịch thượng, lời lẽ rỗng tuếch mà được hoan hô.</a:t>
-            </a:r>
-          </a:p>
-          <a:p>
-            <a:pPr algn="l" marL="365760" indent="-365760">
-              <a:spcAft>
-                <a:spcPts val="800"/>
-              </a:spcAft>
-              <a:buClr>
-                <a:srgbClr val="1E40AF"/>
-              </a:buClr>
-              <a:buFont typeface="Arial"/>
-              <a:buChar char="•"/>
-            </a:pPr>
-            <a:r>
-              <a:rPr sz="2300">
-                <a:solidFill>
-                  <a:srgbClr val="1E293B"/>
-                </a:solidFill>
-                <a:latin typeface="Calibri"/>
-              </a:rPr>
-              <a:t>Đám đông như bị thôi miên.</a:t>
-            </a:r>
-          </a:p>
-          <a:p>
-            <a:pPr algn="l" marL="365760" indent="-365760">
-              <a:spcAft>
-                <a:spcPts val="800"/>
-              </a:spcAft>
-              <a:buClr>
-                <a:srgbClr val="1E40AF"/>
-              </a:buClr>
-              <a:buFont typeface="Arial"/>
-              <a:buChar char="•"/>
-            </a:pPr>
-            <a:r>
-              <a:rPr sz="2300">
-                <a:solidFill>
-                  <a:srgbClr val="1E293B"/>
-                </a:solidFill>
-                <a:latin typeface="Calibri"/>
-              </a:rPr>
-              <a:t>Ghi chú trong ngoặc đơn → gợi kịch bản sân khấu (hài kịch).</a:t>
+              <a:t>Phân tích nét đặc sắc của cảnh Xuân Tóc Đỏ hùng biện trước công chúng. Những ghi chú trong ngoặc đơn gợi liên tưởng đến thể loại nào?</a:t>
             </a:r>
           </a:p>
         </p:txBody>
@@ -7114,8 +7256,8 @@
         </p:nvSpPr>
         <p:spPr>
           <a:xfrm>
-            <a:off x="731520" y="5074920"/>
-            <a:ext cx="10789920" cy="731520"/>
+            <a:off x="731520" y="5120640"/>
+            <a:ext cx="10789920" cy="693420"/>
           </a:xfrm>
           <a:prstGeom prst="roundRect">
             <a:avLst>
@@ -7123,11 +7265,11 @@
             </a:avLst>
           </a:prstGeom>
           <a:solidFill>
-            <a:srgbClr val="FEF2F2"/>
+            <a:srgbClr val="EFF4FF"/>
           </a:solidFill>
           <a:ln w="19050">
             <a:solidFill>
-              <a:srgbClr val="991B1B"/>
+              <a:srgbClr val="1E40AF"/>
             </a:solidFill>
           </a:ln>
           <a:effectLst/>
@@ -7162,8 +7304,8 @@
         </p:nvSpPr>
         <p:spPr>
           <a:xfrm>
-            <a:off x="914400" y="5074920"/>
-            <a:ext cx="10424160" cy="731520"/>
+            <a:off x="914400" y="5120640"/>
+            <a:ext cx="10424160" cy="693420"/>
           </a:xfrm>
           <a:prstGeom prst="rect">
             <a:avLst/>
@@ -7182,13 +7324,13 @@
               </a:spcAft>
             </a:pPr>
             <a:r>
-              <a:rPr sz="2400" b="1">
-                <a:solidFill>
-                  <a:srgbClr val="991B1B"/>
+              <a:rPr sz="2200" b="1">
+                <a:solidFill>
+                  <a:srgbClr val="1E40AF"/>
                 </a:solidFill>
                 <a:latin typeface="Calibri"/>
               </a:rPr>
-              <a:t>Kẻ vô học thành “vĩ nhân” – tiếng cười phê phán.</a:t>
+              <a:t>💡 Chú ý cách xưng hô “ta – mi”.</a:t>
             </a:r>
           </a:p>
         </p:txBody>
@@ -7271,14 +7413,14 @@
         </p:nvSpPr>
         <p:spPr>
           <a:xfrm>
-            <a:off x="10253167" y="457200"/>
-            <a:ext cx="1389888" cy="457200"/>
+            <a:off x="9942271" y="457200"/>
+            <a:ext cx="1700784" cy="457200"/>
           </a:xfrm>
           <a:prstGeom prst="roundRect">
             <a:avLst/>
           </a:prstGeom>
           <a:solidFill>
-            <a:srgbClr val="1E40AF"/>
+            <a:srgbClr val="991B1B"/>
           </a:solidFill>
           <a:ln>
             <a:noFill/>
@@ -7311,7 +7453,7 @@
                 </a:solidFill>
                 <a:latin typeface="Arial"/>
               </a:rPr>
-              <a:t>ĐỀ BÀI</a:t>
+              <a:t>LỜI GIẢI</a:t>
             </a:r>
           </a:p>
         </p:txBody>
@@ -7325,7 +7467,7 @@
         <p:spPr>
           <a:xfrm>
             <a:off x="731520" y="274320"/>
-            <a:ext cx="9582912" cy="868680"/>
+            <a:ext cx="9272016" cy="868680"/>
           </a:xfrm>
           <a:prstGeom prst="rect">
             <a:avLst/>
@@ -7345,7 +7487,7 @@
                 </a:solidFill>
                 <a:latin typeface="Arial"/>
               </a:rPr>
-              <a:t>NÓI MỈA VÀ NGHỊCH NGỮ</a:t>
+              <a:t>CẢNH HÙNG BIỆN</a:t>
             </a:r>
           </a:p>
         </p:txBody>
@@ -7438,7 +7580,7 @@
         <p:spPr>
           <a:xfrm>
             <a:off x="731520" y="1463040"/>
-            <a:ext cx="10789920" cy="3566160"/>
+            <a:ext cx="10789920" cy="3474720"/>
           </a:xfrm>
           <a:prstGeom prst="rect">
             <a:avLst/>
@@ -7451,19 +7593,66 @@
           </a:bodyPr>
           <a:lstStyle/>
           <a:p>
-            <a:pPr algn="l">
+            <a:pPr algn="l" marL="365760" indent="-365760">
               <a:spcAft>
                 <a:spcPts val="800"/>
               </a:spcAft>
+              <a:buClr>
+                <a:srgbClr val="1E40AF"/>
+              </a:buClr>
+              <a:buFont typeface="Arial"/>
+              <a:buChar char="•"/>
             </a:pPr>
             <a:r>
-              <a:rPr sz="2600" b="1">
+              <a:rPr sz="2300">
                 <a:solidFill>
                   <a:srgbClr val="1E293B"/>
                 </a:solidFill>
                 <a:latin typeface="Calibri"/>
               </a:rPr>
-              <a:t>Tìm những câu văn có sử dụng biện pháp tu từ nói mỉa và nghịch ngữ trong văn bản.</a:t>
+              <a:t>Giọng trịch thượng, lời lẽ rỗng tuếch mà được hoan hô.</a:t>
+            </a:r>
+          </a:p>
+          <a:p>
+            <a:pPr algn="l" marL="365760" indent="-365760">
+              <a:spcAft>
+                <a:spcPts val="800"/>
+              </a:spcAft>
+              <a:buClr>
+                <a:srgbClr val="1E40AF"/>
+              </a:buClr>
+              <a:buFont typeface="Arial"/>
+              <a:buChar char="•"/>
+            </a:pPr>
+            <a:r>
+              <a:rPr sz="2300">
+                <a:solidFill>
+                  <a:srgbClr val="1E293B"/>
+                </a:solidFill>
+                <a:latin typeface="Calibri"/>
+              </a:rPr>
+              <a:t>Đám đông như bị thôi miên.</a:t>
+            </a:r>
+          </a:p>
+          <a:p>
+            <a:pPr algn="l" marL="365760" indent="-365760">
+              <a:spcAft>
+                <a:spcPts val="800"/>
+              </a:spcAft>
+              <a:buClr>
+                <a:srgbClr val="1E40AF"/>
+              </a:buClr>
+              <a:buFont typeface="Arial"/>
+              <a:buChar char="•"/>
+            </a:pPr>
+            <a:r>
+              <a:rPr sz="2300">
+                <a:solidFill>
+                  <a:srgbClr val="1E293B"/>
+                </a:solidFill>
+                <a:latin typeface="Calibri"/>
+              </a:rPr>
+              <a:t>Ghi chú trong ngoặc đơn → gợi kịch bản sân khấu (hài kịch).</a:t>
             </a:r>
           </a:p>
         </p:txBody>
@@ -7476,8 +7665,8 @@
         </p:nvSpPr>
         <p:spPr>
           <a:xfrm>
-            <a:off x="731520" y="5120640"/>
-            <a:ext cx="10789920" cy="693420"/>
+            <a:off x="731520" y="5074920"/>
+            <a:ext cx="10789920" cy="731520"/>
           </a:xfrm>
           <a:prstGeom prst="roundRect">
             <a:avLst>
@@ -7485,11 +7674,11 @@
             </a:avLst>
           </a:prstGeom>
           <a:solidFill>
-            <a:srgbClr val="EFF4FF"/>
+            <a:srgbClr val="FEF2F2"/>
           </a:solidFill>
           <a:ln w="19050">
             <a:solidFill>
-              <a:srgbClr val="1E40AF"/>
+              <a:srgbClr val="991B1B"/>
             </a:solidFill>
           </a:ln>
           <a:effectLst/>
@@ -7524,8 +7713,8 @@
         </p:nvSpPr>
         <p:spPr>
           <a:xfrm>
-            <a:off x="914400" y="5120640"/>
-            <a:ext cx="10424160" cy="693420"/>
+            <a:off x="914400" y="5074920"/>
+            <a:ext cx="10424160" cy="731520"/>
           </a:xfrm>
           <a:prstGeom prst="rect">
             <a:avLst/>
@@ -7544,13 +7733,13 @@
               </a:spcAft>
             </a:pPr>
             <a:r>
-              <a:rPr sz="2200" b="1">
-                <a:solidFill>
-                  <a:srgbClr val="1E40AF"/>
+              <a:rPr sz="2400" b="1">
+                <a:solidFill>
+                  <a:srgbClr val="991B1B"/>
                 </a:solidFill>
                 <a:latin typeface="Calibri"/>
               </a:rPr>
-              <a:t>💡 Tìm các cụm từ đặt cạnh nhau mà nghĩa đối chọi.</a:t>
+              <a:t>Kẻ vô học thành “vĩ nhân” – tiếng cười phê phán.</a:t>
             </a:r>
           </a:p>
         </p:txBody>
@@ -7633,14 +7822,14 @@
         </p:nvSpPr>
         <p:spPr>
           <a:xfrm>
-            <a:off x="9942271" y="457200"/>
-            <a:ext cx="1700784" cy="457200"/>
+            <a:off x="10253167" y="457200"/>
+            <a:ext cx="1389888" cy="457200"/>
           </a:xfrm>
           <a:prstGeom prst="roundRect">
             <a:avLst/>
           </a:prstGeom>
           <a:solidFill>
-            <a:srgbClr val="991B1B"/>
+            <a:srgbClr val="1E40AF"/>
           </a:solidFill>
           <a:ln>
             <a:noFill/>
@@ -7673,7 +7862,7 @@
                 </a:solidFill>
                 <a:latin typeface="Arial"/>
               </a:rPr>
-              <a:t>LỜI GIẢI</a:t>
+              <a:t>ĐỀ BÀI</a:t>
             </a:r>
           </a:p>
         </p:txBody>
@@ -7687,7 +7876,7 @@
         <p:spPr>
           <a:xfrm>
             <a:off x="731520" y="274320"/>
-            <a:ext cx="9272016" cy="868680"/>
+            <a:ext cx="9582912" cy="868680"/>
           </a:xfrm>
           <a:prstGeom prst="rect">
             <a:avLst/>
@@ -7800,7 +7989,7 @@
         <p:spPr>
           <a:xfrm>
             <a:off x="731520" y="1463040"/>
-            <a:ext cx="10789920" cy="3474720"/>
+            <a:ext cx="10789920" cy="3566160"/>
           </a:xfrm>
           <a:prstGeom prst="rect">
             <a:avLst/>
@@ -7813,66 +8002,19 @@
           </a:bodyPr>
           <a:lstStyle/>
           <a:p>
-            <a:pPr algn="l" marL="365760" indent="-365760">
+            <a:pPr algn="l">
               <a:spcAft>
                 <a:spcPts val="800"/>
               </a:spcAft>
-              <a:buClr>
-                <a:srgbClr val="1E40AF"/>
-              </a:buClr>
-              <a:buFont typeface="Arial"/>
-              <a:buChar char="•"/>
             </a:pPr>
             <a:r>
-              <a:rPr sz="2300">
+              <a:rPr sz="2600" b="1">
                 <a:solidFill>
                   <a:srgbClr val="1E293B"/>
                 </a:solidFill>
                 <a:latin typeface="Calibri"/>
               </a:rPr>
-              <a:t>“chết một cách rất thể thao” – nghịch ngữ.</a:t>
-            </a:r>
-          </a:p>
-          <a:p>
-            <a:pPr algn="l" marL="365760" indent="-365760">
-              <a:spcAft>
-                <a:spcPts val="800"/>
-              </a:spcAft>
-              <a:buClr>
-                <a:srgbClr val="1E40AF"/>
-              </a:buClr>
-              <a:buFont typeface="Arial"/>
-              <a:buChar char="•"/>
-            </a:pPr>
-            <a:r>
-              <a:rPr sz="2300">
-                <a:solidFill>
-                  <a:srgbClr val="1E293B"/>
-                </a:solidFill>
-                <a:latin typeface="Calibri"/>
-              </a:rPr>
-              <a:t>“…lộ ra mặt rồng tất cả sự thịnh nộ của vị thiên tử…” – nói mỉa.</a:t>
-            </a:r>
-          </a:p>
-          <a:p>
-            <a:pPr algn="l" marL="365760" indent="-365760">
-              <a:spcAft>
-                <a:spcPts val="800"/>
-              </a:spcAft>
-              <a:buClr>
-                <a:srgbClr val="1E40AF"/>
-              </a:buClr>
-              <a:buFont typeface="Arial"/>
-              <a:buChar char="•"/>
-            </a:pPr>
-            <a:r>
-              <a:rPr sz="2300">
-                <a:solidFill>
-                  <a:srgbClr val="1E293B"/>
-                </a:solidFill>
-                <a:latin typeface="Calibri"/>
-              </a:rPr>
-              <a:t>“anh hùng cứu quốc”, “vĩ nhân” gán cho Xuân – nói mỉa.</a:t>
+              <a:t>Tìm những câu văn có sử dụng biện pháp tu từ nói mỉa và nghịch ngữ trong văn bản.</a:t>
             </a:r>
           </a:p>
         </p:txBody>
@@ -7885,8 +8027,8 @@
         </p:nvSpPr>
         <p:spPr>
           <a:xfrm>
-            <a:off x="731520" y="5074920"/>
-            <a:ext cx="10789920" cy="731520"/>
+            <a:off x="731520" y="5120640"/>
+            <a:ext cx="10789920" cy="693420"/>
           </a:xfrm>
           <a:prstGeom prst="roundRect">
             <a:avLst>
@@ -7894,11 +8036,11 @@
             </a:avLst>
           </a:prstGeom>
           <a:solidFill>
-            <a:srgbClr val="FEF2F2"/>
+            <a:srgbClr val="EFF4FF"/>
           </a:solidFill>
           <a:ln w="19050">
             <a:solidFill>
-              <a:srgbClr val="991B1B"/>
+              <a:srgbClr val="1E40AF"/>
             </a:solidFill>
           </a:ln>
           <a:effectLst/>
@@ -7933,8 +8075,8 @@
         </p:nvSpPr>
         <p:spPr>
           <a:xfrm>
-            <a:off x="914400" y="5074920"/>
-            <a:ext cx="10424160" cy="731520"/>
+            <a:off x="914400" y="5120640"/>
+            <a:ext cx="10424160" cy="693420"/>
           </a:xfrm>
           <a:prstGeom prst="rect">
             <a:avLst/>
@@ -7953,13 +8095,13 @@
               </a:spcAft>
             </a:pPr>
             <a:r>
-              <a:rPr sz="2400" b="1">
-                <a:solidFill>
-                  <a:srgbClr val="991B1B"/>
+              <a:rPr sz="2200" b="1">
+                <a:solidFill>
+                  <a:srgbClr val="1E40AF"/>
                 </a:solidFill>
                 <a:latin typeface="Calibri"/>
               </a:rPr>
-              <a:t>Nói mỉa, nghịch ngữ là vũ khí trào phúng sắc bén.</a:t>
+              <a:t>💡 Tìm các cụm từ đặt cạnh nhau mà nghĩa đối chọi.</a:t>
             </a:r>
           </a:p>
         </p:txBody>
@@ -8042,14 +8184,14 @@
         </p:nvSpPr>
         <p:spPr>
           <a:xfrm>
-            <a:off x="10253167" y="457200"/>
-            <a:ext cx="1389888" cy="457200"/>
+            <a:off x="9942271" y="457200"/>
+            <a:ext cx="1700784" cy="457200"/>
           </a:xfrm>
           <a:prstGeom prst="roundRect">
             <a:avLst/>
           </a:prstGeom>
           <a:solidFill>
-            <a:srgbClr val="1E40AF"/>
+            <a:srgbClr val="991B1B"/>
           </a:solidFill>
           <a:ln>
             <a:noFill/>
@@ -8082,7 +8224,7 @@
                 </a:solidFill>
                 <a:latin typeface="Arial"/>
               </a:rPr>
-              <a:t>ĐỀ BÀI</a:t>
+              <a:t>LỜI GIẢI</a:t>
             </a:r>
           </a:p>
         </p:txBody>
@@ -8096,7 +8238,7 @@
         <p:spPr>
           <a:xfrm>
             <a:off x="731520" y="274320"/>
-            <a:ext cx="9582912" cy="868680"/>
+            <a:ext cx="9272016" cy="868680"/>
           </a:xfrm>
           <a:prstGeom prst="rect">
             <a:avLst/>
@@ -8116,7 +8258,7 @@
                 </a:solidFill>
                 <a:latin typeface="Arial"/>
               </a:rPr>
-              <a:t>PHONG CÁCH HIỆN THỰC</a:t>
+              <a:t>NÓI MỈA VÀ NGHỊCH NGỮ</a:t>
             </a:r>
           </a:p>
         </p:txBody>
@@ -8209,7 +8351,7 @@
         <p:spPr>
           <a:xfrm>
             <a:off x="731520" y="1463040"/>
-            <a:ext cx="10789920" cy="3566160"/>
+            <a:ext cx="10789920" cy="3474720"/>
           </a:xfrm>
           <a:prstGeom prst="rect">
             <a:avLst/>
@@ -8222,19 +8364,66 @@
           </a:bodyPr>
           <a:lstStyle/>
           <a:p>
-            <a:pPr algn="l">
+            <a:pPr algn="l" marL="365760" indent="-365760">
               <a:spcAft>
                 <a:spcPts val="800"/>
               </a:spcAft>
+              <a:buClr>
+                <a:srgbClr val="1E40AF"/>
+              </a:buClr>
+              <a:buFont typeface="Arial"/>
+              <a:buChar char="•"/>
             </a:pPr>
             <a:r>
-              <a:rPr sz="2600" b="1">
+              <a:rPr sz="2300">
                 <a:solidFill>
                   <a:srgbClr val="1E293B"/>
                 </a:solidFill>
                 <a:latin typeface="Calibri"/>
               </a:rPr>
-              <a:t>Đoạn trích cho thấy điều gì về phong cách hiện thực của Vũ Trọng Phụng? Nêu thủ pháp tăng khả năng bao quát hiện thực.</a:t>
+              <a:t>“chết một cách rất thể thao” – nghịch ngữ.</a:t>
+            </a:r>
+          </a:p>
+          <a:p>
+            <a:pPr algn="l" marL="365760" indent="-365760">
+              <a:spcAft>
+                <a:spcPts val="800"/>
+              </a:spcAft>
+              <a:buClr>
+                <a:srgbClr val="1E40AF"/>
+              </a:buClr>
+              <a:buFont typeface="Arial"/>
+              <a:buChar char="•"/>
+            </a:pPr>
+            <a:r>
+              <a:rPr sz="2300">
+                <a:solidFill>
+                  <a:srgbClr val="1E293B"/>
+                </a:solidFill>
+                <a:latin typeface="Calibri"/>
+              </a:rPr>
+              <a:t>“…lộ ra mặt rồng tất cả sự thịnh nộ của vị thiên tử…” – nói mỉa.</a:t>
+            </a:r>
+          </a:p>
+          <a:p>
+            <a:pPr algn="l" marL="365760" indent="-365760">
+              <a:spcAft>
+                <a:spcPts val="800"/>
+              </a:spcAft>
+              <a:buClr>
+                <a:srgbClr val="1E40AF"/>
+              </a:buClr>
+              <a:buFont typeface="Arial"/>
+              <a:buChar char="•"/>
+            </a:pPr>
+            <a:r>
+              <a:rPr sz="2300">
+                <a:solidFill>
+                  <a:srgbClr val="1E293B"/>
+                </a:solidFill>
+                <a:latin typeface="Calibri"/>
+              </a:rPr>
+              <a:t>“anh hùng cứu quốc”, “vĩ nhân” gán cho Xuân – nói mỉa.</a:t>
             </a:r>
           </a:p>
         </p:txBody>
@@ -8247,8 +8436,8 @@
         </p:nvSpPr>
         <p:spPr>
           <a:xfrm>
-            <a:off x="731520" y="5120640"/>
-            <a:ext cx="10789920" cy="693420"/>
+            <a:off x="731520" y="5074920"/>
+            <a:ext cx="10789920" cy="731520"/>
           </a:xfrm>
           <a:prstGeom prst="roundRect">
             <a:avLst>
@@ -8256,11 +8445,11 @@
             </a:avLst>
           </a:prstGeom>
           <a:solidFill>
-            <a:srgbClr val="EFF4FF"/>
+            <a:srgbClr val="FEF2F2"/>
           </a:solidFill>
           <a:ln w="19050">
             <a:solidFill>
-              <a:srgbClr val="1E40AF"/>
+              <a:srgbClr val="991B1B"/>
             </a:solidFill>
           </a:ln>
           <a:effectLst/>
@@ -8295,8 +8484,8 @@
         </p:nvSpPr>
         <p:spPr>
           <a:xfrm>
-            <a:off x="914400" y="5120640"/>
-            <a:ext cx="10424160" cy="693420"/>
+            <a:off x="914400" y="5074920"/>
+            <a:ext cx="10424160" cy="731520"/>
           </a:xfrm>
           <a:prstGeom prst="rect">
             <a:avLst/>
@@ -8315,13 +8504,13 @@
               </a:spcAft>
             </a:pPr>
             <a:r>
-              <a:rPr sz="2200" b="1">
-                <a:solidFill>
-                  <a:srgbClr val="1E40AF"/>
+              <a:rPr sz="2400" b="1">
+                <a:solidFill>
+                  <a:srgbClr val="991B1B"/>
                 </a:solidFill>
                 <a:latin typeface="Calibri"/>
               </a:rPr>
-              <a:t>💡 Nhân vật thuộc những tầng lớp nào?</a:t>
+              <a:t>Nói mỉa, nghịch ngữ là vũ khí trào phúng sắc bén.</a:t>
             </a:r>
           </a:p>
         </p:txBody>
@@ -8404,6 +8593,368 @@
         </p:nvSpPr>
         <p:spPr>
           <a:xfrm>
+            <a:off x="10253167" y="457200"/>
+            <a:ext cx="1389888" cy="457200"/>
+          </a:xfrm>
+          <a:prstGeom prst="roundRect">
+            <a:avLst/>
+          </a:prstGeom>
+          <a:solidFill>
+            <a:srgbClr val="1E40AF"/>
+          </a:solidFill>
+          <a:ln>
+            <a:noFill/>
+          </a:ln>
+          <a:effectLst/>
+        </p:spPr>
+        <p:style>
+          <a:lnRef idx="1">
+            <a:schemeClr val="accent1"/>
+          </a:lnRef>
+          <a:fillRef idx="3">
+            <a:schemeClr val="accent1"/>
+          </a:fillRef>
+          <a:effectRef idx="2">
+            <a:schemeClr val="accent1"/>
+          </a:effectRef>
+          <a:fontRef idx="minor">
+            <a:schemeClr val="lt1"/>
+          </a:fontRef>
+        </p:style>
+        <p:txBody>
+          <a:bodyPr rtlCol="0" anchor="ctr" wrap="none" tIns="0" bIns="0"/>
+          <a:lstStyle/>
+          <a:p>
+            <a:pPr algn="ctr"/>
+            <a:r>
+              <a:rPr sz="1400" b="1">
+                <a:solidFill>
+                  <a:srgbClr val="FFFFFF"/>
+                </a:solidFill>
+                <a:latin typeface="Arial"/>
+              </a:rPr>
+              <a:t>ĐỀ BÀI</a:t>
+            </a:r>
+          </a:p>
+        </p:txBody>
+      </p:sp>
+      <p:sp>
+        <p:nvSpPr>
+          <p:cNvPr id="4" name="TextBox 3"/>
+          <p:cNvSpPr txBox="1"/>
+          <p:nvPr/>
+        </p:nvSpPr>
+        <p:spPr>
+          <a:xfrm>
+            <a:off x="731520" y="274320"/>
+            <a:ext cx="9582912" cy="868680"/>
+          </a:xfrm>
+          <a:prstGeom prst="rect">
+            <a:avLst/>
+          </a:prstGeom>
+          <a:noFill/>
+        </p:spPr>
+        <p:txBody>
+          <a:bodyPr wrap="square" anchor="ctr">
+            <a:spAutoFit/>
+          </a:bodyPr>
+          <a:lstStyle/>
+          <a:p>
+            <a:r>
+              <a:rPr sz="3600" b="1">
+                <a:solidFill>
+                  <a:srgbClr val="1E40AF"/>
+                </a:solidFill>
+                <a:latin typeface="Arial"/>
+              </a:rPr>
+              <a:t>PHONG CÁCH HIỆN THỰC</a:t>
+            </a:r>
+          </a:p>
+        </p:txBody>
+      </p:sp>
+      <p:sp>
+        <p:nvSpPr>
+          <p:cNvPr id="5" name="Rectangle 4"/>
+          <p:cNvSpPr/>
+          <p:nvPr/>
+        </p:nvSpPr>
+        <p:spPr>
+          <a:xfrm>
+            <a:off x="457200" y="1207008"/>
+            <a:ext cx="11274552" cy="22000"/>
+          </a:xfrm>
+          <a:prstGeom prst="rect">
+            <a:avLst/>
+          </a:prstGeom>
+          <a:solidFill>
+            <a:srgbClr val="E2E8F0"/>
+          </a:solidFill>
+          <a:ln>
+            <a:noFill/>
+          </a:ln>
+          <a:effectLst/>
+        </p:spPr>
+        <p:style>
+          <a:lnRef idx="1">
+            <a:schemeClr val="accent1"/>
+          </a:lnRef>
+          <a:fillRef idx="3">
+            <a:schemeClr val="accent1"/>
+          </a:fillRef>
+          <a:effectRef idx="2">
+            <a:schemeClr val="accent1"/>
+          </a:effectRef>
+          <a:fontRef idx="minor">
+            <a:schemeClr val="lt1"/>
+          </a:fontRef>
+        </p:style>
+        <p:txBody>
+          <a:bodyPr rtlCol="0" anchor="ctr"/>
+          <a:lstStyle/>
+          <a:p>
+            <a:pPr algn="ctr"/>
+          </a:p>
+        </p:txBody>
+      </p:sp>
+      <p:sp>
+        <p:nvSpPr>
+          <p:cNvPr id="6" name="TextBox 5"/>
+          <p:cNvSpPr txBox="1"/>
+          <p:nvPr/>
+        </p:nvSpPr>
+        <p:spPr>
+          <a:xfrm>
+            <a:off x="457200" y="6355080"/>
+            <a:ext cx="11274552" cy="365760"/>
+          </a:xfrm>
+          <a:prstGeom prst="rect">
+            <a:avLst/>
+          </a:prstGeom>
+          <a:noFill/>
+        </p:spPr>
+        <p:txBody>
+          <a:bodyPr wrap="none">
+            <a:spAutoFit/>
+          </a:bodyPr>
+          <a:lstStyle/>
+          <a:p>
+            <a:pPr algn="r"/>
+            <a:r>
+              <a:rPr sz="1200">
+                <a:solidFill>
+                  <a:srgbClr val="64748B"/>
+                </a:solidFill>
+                <a:latin typeface="Calibri"/>
+              </a:rPr>
+              <a:t>Ngữ văn 12 · Bài 1: Khả Năng Lớn Lao Của Tiểu Thuyết          17</a:t>
+            </a:r>
+          </a:p>
+        </p:txBody>
+      </p:sp>
+      <p:sp>
+        <p:nvSpPr>
+          <p:cNvPr id="7" name="TextBox 6"/>
+          <p:cNvSpPr txBox="1"/>
+          <p:nvPr/>
+        </p:nvSpPr>
+        <p:spPr>
+          <a:xfrm>
+            <a:off x="731520" y="1463040"/>
+            <a:ext cx="10789920" cy="3566160"/>
+          </a:xfrm>
+          <a:prstGeom prst="rect">
+            <a:avLst/>
+          </a:prstGeom>
+          <a:noFill/>
+        </p:spPr>
+        <p:txBody>
+          <a:bodyPr wrap="square" anchor="t" lIns="45720" rIns="45720">
+            <a:spAutoFit/>
+          </a:bodyPr>
+          <a:lstStyle/>
+          <a:p>
+            <a:pPr algn="l">
+              <a:spcAft>
+                <a:spcPts val="800"/>
+              </a:spcAft>
+            </a:pPr>
+            <a:r>
+              <a:rPr sz="2600" b="1">
+                <a:solidFill>
+                  <a:srgbClr val="1E293B"/>
+                </a:solidFill>
+                <a:latin typeface="Calibri"/>
+              </a:rPr>
+              <a:t>Đoạn trích cho thấy điều gì về phong cách hiện thực của Vũ Trọng Phụng? Nêu thủ pháp tăng khả năng bao quát hiện thực.</a:t>
+            </a:r>
+          </a:p>
+        </p:txBody>
+      </p:sp>
+      <p:sp>
+        <p:nvSpPr>
+          <p:cNvPr id="8" name="Rounded Rectangle 7"/>
+          <p:cNvSpPr/>
+          <p:nvPr/>
+        </p:nvSpPr>
+        <p:spPr>
+          <a:xfrm>
+            <a:off x="731520" y="5120640"/>
+            <a:ext cx="10789920" cy="693420"/>
+          </a:xfrm>
+          <a:prstGeom prst="roundRect">
+            <a:avLst>
+              <a:gd name="adj" fmla="val 8000"/>
+            </a:avLst>
+          </a:prstGeom>
+          <a:solidFill>
+            <a:srgbClr val="EFF4FF"/>
+          </a:solidFill>
+          <a:ln w="19050">
+            <a:solidFill>
+              <a:srgbClr val="1E40AF"/>
+            </a:solidFill>
+          </a:ln>
+          <a:effectLst/>
+        </p:spPr>
+        <p:style>
+          <a:lnRef idx="1">
+            <a:schemeClr val="accent1"/>
+          </a:lnRef>
+          <a:fillRef idx="3">
+            <a:schemeClr val="accent1"/>
+          </a:fillRef>
+          <a:effectRef idx="2">
+            <a:schemeClr val="accent1"/>
+          </a:effectRef>
+          <a:fontRef idx="minor">
+            <a:schemeClr val="lt1"/>
+          </a:fontRef>
+        </p:style>
+        <p:txBody>
+          <a:bodyPr rtlCol="0" anchor="ctr"/>
+          <a:lstStyle/>
+          <a:p>
+            <a:pPr algn="ctr"/>
+          </a:p>
+        </p:txBody>
+      </p:sp>
+      <p:sp>
+        <p:nvSpPr>
+          <p:cNvPr id="9" name="TextBox 8"/>
+          <p:cNvSpPr txBox="1"/>
+          <p:nvPr/>
+        </p:nvSpPr>
+        <p:spPr>
+          <a:xfrm>
+            <a:off x="914400" y="5120640"/>
+            <a:ext cx="10424160" cy="693420"/>
+          </a:xfrm>
+          <a:prstGeom prst="rect">
+            <a:avLst/>
+          </a:prstGeom>
+          <a:noFill/>
+        </p:spPr>
+        <p:txBody>
+          <a:bodyPr wrap="square" anchor="ctr" lIns="45720" rIns="45720">
+            <a:spAutoFit/>
+          </a:bodyPr>
+          <a:lstStyle/>
+          <a:p>
+            <a:pPr algn="l">
+              <a:spcAft>
+                <a:spcPts val="400"/>
+              </a:spcAft>
+            </a:pPr>
+            <a:r>
+              <a:rPr sz="2200" b="1">
+                <a:solidFill>
+                  <a:srgbClr val="1E40AF"/>
+                </a:solidFill>
+                <a:latin typeface="Calibri"/>
+              </a:rPr>
+              <a:t>💡 Nhân vật thuộc những tầng lớp nào?</a:t>
+            </a:r>
+          </a:p>
+        </p:txBody>
+      </p:sp>
+    </p:spTree>
+  </p:cSld>
+  <p:clrMapOvr>
+    <a:masterClrMapping/>
+  </p:clrMapOvr>
+</p:sld>
+</file>
+
+<file path=ppt/slides/slide18.xml><?xml version="1.0" encoding="utf-8"?>
+<p:sld xmlns:a="http://schemas.openxmlformats.org/drawingml/2006/main" xmlns:p="http://schemas.openxmlformats.org/presentationml/2006/main" xmlns:r="http://schemas.openxmlformats.org/officeDocument/2006/relationships">
+  <p:cSld>
+    <p:bg>
+      <p:bgPr>
+        <a:solidFill>
+          <a:srgbClr val="FFFFFF"/>
+        </a:solidFill>
+        <a:effectLst/>
+      </p:bgPr>
+    </p:bg>
+    <p:spTree>
+      <p:nvGrpSpPr>
+        <p:cNvPr id="1" name=""/>
+        <p:cNvGrpSpPr/>
+        <p:nvPr/>
+      </p:nvGrpSpPr>
+      <p:grpSpPr/>
+      <p:sp>
+        <p:nvSpPr>
+          <p:cNvPr id="2" name="Rectangle 1"/>
+          <p:cNvSpPr/>
+          <p:nvPr/>
+        </p:nvSpPr>
+        <p:spPr>
+          <a:xfrm>
+            <a:off x="457200" y="384048"/>
+            <a:ext cx="109728" cy="658368"/>
+          </a:xfrm>
+          <a:prstGeom prst="rect">
+            <a:avLst/>
+          </a:prstGeom>
+          <a:solidFill>
+            <a:srgbClr val="1E40AF"/>
+          </a:solidFill>
+          <a:ln>
+            <a:noFill/>
+          </a:ln>
+          <a:effectLst/>
+        </p:spPr>
+        <p:style>
+          <a:lnRef idx="1">
+            <a:schemeClr val="accent1"/>
+          </a:lnRef>
+          <a:fillRef idx="3">
+            <a:schemeClr val="accent1"/>
+          </a:fillRef>
+          <a:effectRef idx="2">
+            <a:schemeClr val="accent1"/>
+          </a:effectRef>
+          <a:fontRef idx="minor">
+            <a:schemeClr val="lt1"/>
+          </a:fontRef>
+        </p:style>
+        <p:txBody>
+          <a:bodyPr rtlCol="0" anchor="ctr"/>
+          <a:lstStyle/>
+          <a:p>
+            <a:pPr algn="ctr"/>
+          </a:p>
+        </p:txBody>
+      </p:sp>
+      <p:sp>
+        <p:nvSpPr>
+          <p:cNvPr id="3" name="Rounded Rectangle 2"/>
+          <p:cNvSpPr/>
+          <p:nvPr/>
+        </p:nvSpPr>
+        <p:spPr>
+          <a:xfrm>
             <a:off x="9942271" y="457200"/>
             <a:ext cx="1700784" cy="457200"/>
           </a:xfrm>
@@ -8557,7 +9108,7 @@
                 </a:solidFill>
                 <a:latin typeface="Calibri"/>
               </a:rPr>
-              <a:t>Ngữ văn 12 · Bài 1: Khả Năng Lớn Lao Của Tiểu Thuyết          17</a:t>
+              <a:t>Ngữ văn 12 · Bài 1: Khả Năng Lớn Lao Của Tiểu Thuyết          18</a:t>
             </a:r>
           </a:p>
         </p:txBody>
@@ -8743,7 +9294,7 @@
 </p:sld>
 </file>
 
-<file path=ppt/slides/slide18.xml><?xml version="1.0" encoding="utf-8"?>
+<file path=ppt/slides/slide19.xml><?xml version="1.0" encoding="utf-8"?>
 <p:sld xmlns:a="http://schemas.openxmlformats.org/drawingml/2006/main" xmlns:p="http://schemas.openxmlformats.org/presentationml/2006/main" xmlns:r="http://schemas.openxmlformats.org/officeDocument/2006/relationships">
   <p:cSld>
     <p:bg>
@@ -8840,297 +9391,6 @@
                 <a:latin typeface="Calibri"/>
               </a:rPr>
               <a:t>TIẾT 4 – 6: MÙA LÁ RỤNG TRONG VƯỜN (Ma Văn Kháng)</a:t>
-            </a:r>
-          </a:p>
-        </p:txBody>
-      </p:sp>
-    </p:spTree>
-  </p:cSld>
-  <p:clrMapOvr>
-    <a:masterClrMapping/>
-  </p:clrMapOvr>
-</p:sld>
-</file>
-
-<file path=ppt/slides/slide19.xml><?xml version="1.0" encoding="utf-8"?>
-<p:sld xmlns:a="http://schemas.openxmlformats.org/drawingml/2006/main" xmlns:p="http://schemas.openxmlformats.org/presentationml/2006/main" xmlns:r="http://schemas.openxmlformats.org/officeDocument/2006/relationships">
-  <p:cSld>
-    <p:bg>
-      <p:bgPr>
-        <a:solidFill>
-          <a:srgbClr val="FFFFFF"/>
-        </a:solidFill>
-        <a:effectLst/>
-      </p:bgPr>
-    </p:bg>
-    <p:spTree>
-      <p:nvGrpSpPr>
-        <p:cNvPr id="1" name=""/>
-        <p:cNvGrpSpPr/>
-        <p:nvPr/>
-      </p:nvGrpSpPr>
-      <p:grpSpPr/>
-      <p:sp>
-        <p:nvSpPr>
-          <p:cNvPr id="2" name="Rectangle 1"/>
-          <p:cNvSpPr/>
-          <p:nvPr/>
-        </p:nvSpPr>
-        <p:spPr>
-          <a:xfrm>
-            <a:off x="457200" y="384048"/>
-            <a:ext cx="109728" cy="658368"/>
-          </a:xfrm>
-          <a:prstGeom prst="rect">
-            <a:avLst/>
-          </a:prstGeom>
-          <a:solidFill>
-            <a:srgbClr val="1E40AF"/>
-          </a:solidFill>
-          <a:ln>
-            <a:noFill/>
-          </a:ln>
-          <a:effectLst/>
-        </p:spPr>
-        <p:style>
-          <a:lnRef idx="1">
-            <a:schemeClr val="accent1"/>
-          </a:lnRef>
-          <a:fillRef idx="3">
-            <a:schemeClr val="accent1"/>
-          </a:fillRef>
-          <a:effectRef idx="2">
-            <a:schemeClr val="accent1"/>
-          </a:effectRef>
-          <a:fontRef idx="minor">
-            <a:schemeClr val="lt1"/>
-          </a:fontRef>
-        </p:style>
-        <p:txBody>
-          <a:bodyPr rtlCol="0" anchor="ctr"/>
-          <a:lstStyle/>
-          <a:p>
-            <a:pPr algn="ctr"/>
-          </a:p>
-        </p:txBody>
-      </p:sp>
-      <p:sp>
-        <p:nvSpPr>
-          <p:cNvPr id="3" name="Rounded Rectangle 2"/>
-          <p:cNvSpPr/>
-          <p:nvPr/>
-        </p:nvSpPr>
-        <p:spPr>
-          <a:xfrm>
-            <a:off x="9786823" y="457200"/>
-            <a:ext cx="1856232" cy="457200"/>
-          </a:xfrm>
-          <a:prstGeom prst="roundRect">
-            <a:avLst/>
-          </a:prstGeom>
-          <a:solidFill>
-            <a:srgbClr val="1E40AF"/>
-          </a:solidFill>
-          <a:ln>
-            <a:noFill/>
-          </a:ln>
-          <a:effectLst/>
-        </p:spPr>
-        <p:style>
-          <a:lnRef idx="1">
-            <a:schemeClr val="accent1"/>
-          </a:lnRef>
-          <a:fillRef idx="3">
-            <a:schemeClr val="accent1"/>
-          </a:fillRef>
-          <a:effectRef idx="2">
-            <a:schemeClr val="accent1"/>
-          </a:effectRef>
-          <a:fontRef idx="minor">
-            <a:schemeClr val="lt1"/>
-          </a:fontRef>
-        </p:style>
-        <p:txBody>
-          <a:bodyPr rtlCol="0" anchor="ctr" wrap="none" tIns="0" bIns="0"/>
-          <a:lstStyle/>
-          <a:p>
-            <a:pPr algn="ctr"/>
-            <a:r>
-              <a:rPr sz="1400" b="1">
-                <a:solidFill>
-                  <a:srgbClr val="FFFFFF"/>
-                </a:solidFill>
-                <a:latin typeface="Arial"/>
-              </a:rPr>
-              <a:t>KHỞI ĐỘNG</a:t>
-            </a:r>
-          </a:p>
-        </p:txBody>
-      </p:sp>
-      <p:sp>
-        <p:nvSpPr>
-          <p:cNvPr id="4" name="TextBox 3"/>
-          <p:cNvSpPr txBox="1"/>
-          <p:nvPr/>
-        </p:nvSpPr>
-        <p:spPr>
-          <a:xfrm>
-            <a:off x="731520" y="274320"/>
-            <a:ext cx="9116568" cy="868680"/>
-          </a:xfrm>
-          <a:prstGeom prst="rect">
-            <a:avLst/>
-          </a:prstGeom>
-          <a:noFill/>
-        </p:spPr>
-        <p:txBody>
-          <a:bodyPr wrap="square" anchor="ctr">
-            <a:spAutoFit/>
-          </a:bodyPr>
-          <a:lstStyle/>
-          <a:p>
-            <a:r>
-              <a:rPr sz="3600" b="1">
-                <a:solidFill>
-                  <a:srgbClr val="1E40AF"/>
-                </a:solidFill>
-                <a:latin typeface="Arial"/>
-              </a:rPr>
-              <a:t>TRƯỚC KHI ĐỌC</a:t>
-            </a:r>
-          </a:p>
-        </p:txBody>
-      </p:sp>
-      <p:sp>
-        <p:nvSpPr>
-          <p:cNvPr id="5" name="Rectangle 4"/>
-          <p:cNvSpPr/>
-          <p:nvPr/>
-        </p:nvSpPr>
-        <p:spPr>
-          <a:xfrm>
-            <a:off x="457200" y="1207008"/>
-            <a:ext cx="11274552" cy="22000"/>
-          </a:xfrm>
-          <a:prstGeom prst="rect">
-            <a:avLst/>
-          </a:prstGeom>
-          <a:solidFill>
-            <a:srgbClr val="E2E8F0"/>
-          </a:solidFill>
-          <a:ln>
-            <a:noFill/>
-          </a:ln>
-          <a:effectLst/>
-        </p:spPr>
-        <p:style>
-          <a:lnRef idx="1">
-            <a:schemeClr val="accent1"/>
-          </a:lnRef>
-          <a:fillRef idx="3">
-            <a:schemeClr val="accent1"/>
-          </a:fillRef>
-          <a:effectRef idx="2">
-            <a:schemeClr val="accent1"/>
-          </a:effectRef>
-          <a:fontRef idx="minor">
-            <a:schemeClr val="lt1"/>
-          </a:fontRef>
-        </p:style>
-        <p:txBody>
-          <a:bodyPr rtlCol="0" anchor="ctr"/>
-          <a:lstStyle/>
-          <a:p>
-            <a:pPr algn="ctr"/>
-          </a:p>
-        </p:txBody>
-      </p:sp>
-      <p:sp>
-        <p:nvSpPr>
-          <p:cNvPr id="6" name="TextBox 5"/>
-          <p:cNvSpPr txBox="1"/>
-          <p:nvPr/>
-        </p:nvSpPr>
-        <p:spPr>
-          <a:xfrm>
-            <a:off x="457200" y="6355080"/>
-            <a:ext cx="11274552" cy="365760"/>
-          </a:xfrm>
-          <a:prstGeom prst="rect">
-            <a:avLst/>
-          </a:prstGeom>
-          <a:noFill/>
-        </p:spPr>
-        <p:txBody>
-          <a:bodyPr wrap="none">
-            <a:spAutoFit/>
-          </a:bodyPr>
-          <a:lstStyle/>
-          <a:p>
-            <a:pPr algn="r"/>
-            <a:r>
-              <a:rPr sz="1200">
-                <a:solidFill>
-                  <a:srgbClr val="64748B"/>
-                </a:solidFill>
-                <a:latin typeface="Calibri"/>
-              </a:rPr>
-              <a:t>Ngữ văn 12 · Bài 1: Khả Năng Lớn Lao Của Tiểu Thuyết          19</a:t>
-            </a:r>
-          </a:p>
-        </p:txBody>
-      </p:sp>
-      <p:sp>
-        <p:nvSpPr>
-          <p:cNvPr id="7" name="TextBox 6"/>
-          <p:cNvSpPr txBox="1"/>
-          <p:nvPr/>
-        </p:nvSpPr>
-        <p:spPr>
-          <a:xfrm>
-            <a:off x="731520" y="1463040"/>
-            <a:ext cx="10789920" cy="4572000"/>
-          </a:xfrm>
-          <a:prstGeom prst="rect">
-            <a:avLst/>
-          </a:prstGeom>
-          <a:noFill/>
-        </p:spPr>
-        <p:txBody>
-          <a:bodyPr wrap="square" anchor="t" lIns="45720" rIns="45720">
-            <a:spAutoFit/>
-          </a:bodyPr>
-          <a:lstStyle/>
-          <a:p>
-            <a:pPr algn="l">
-              <a:spcAft>
-                <a:spcPts val="800"/>
-              </a:spcAft>
-            </a:pPr>
-            <a:r>
-              <a:rPr sz="2600" b="1">
-                <a:solidFill>
-                  <a:srgbClr val="1E293B"/>
-                </a:solidFill>
-                <a:latin typeface="Calibri"/>
-              </a:rPr>
-              <a:t>Mối quan hệ gắn kết giữa các thành viên trong gia đình thường bộc lộ rõ nhất ở thời điểm, tình huống nào? Vì sao?</a:t>
-            </a:r>
-          </a:p>
-          <a:p>
-            <a:pPr algn="l">
-              <a:spcAft>
-                <a:spcPts val="800"/>
-              </a:spcAft>
-            </a:pPr>
-            <a:r>
-              <a:rPr sz="2600" b="1">
-                <a:solidFill>
-                  <a:srgbClr val="1E293B"/>
-                </a:solidFill>
-                <a:latin typeface="Calibri"/>
-              </a:rPr>
-              <a:t>Chia sẻ ấn tượng về một tác phẩm viết về đề tài gia đình.</a:t>
             </a:r>
           </a:p>
         </p:txBody>
@@ -9598,8 +9858,8 @@
         </p:nvSpPr>
         <p:spPr>
           <a:xfrm>
-            <a:off x="10253167" y="457200"/>
-            <a:ext cx="1389888" cy="457200"/>
+            <a:off x="9786823" y="457200"/>
+            <a:ext cx="1856232" cy="457200"/>
           </a:xfrm>
           <a:prstGeom prst="roundRect">
             <a:avLst/>
@@ -9638,7 +9898,7 @@
                 </a:solidFill>
                 <a:latin typeface="Arial"/>
               </a:rPr>
-              <a:t>ĐỀ BÀI</a:t>
+              <a:t>KHỞI ĐỘNG</a:t>
             </a:r>
           </a:p>
         </p:txBody>
@@ -9652,7 +9912,7 @@
         <p:spPr>
           <a:xfrm>
             <a:off x="731520" y="274320"/>
-            <a:ext cx="9582912" cy="868680"/>
+            <a:ext cx="9116568" cy="868680"/>
           </a:xfrm>
           <a:prstGeom prst="rect">
             <a:avLst/>
@@ -9672,7 +9932,7 @@
                 </a:solidFill>
                 <a:latin typeface="Arial"/>
               </a:rPr>
-              <a:t>SỰ VIỆC VÀ NHAN ĐỀ</a:t>
+              <a:t>TRƯỚC KHI ĐỌC</a:t>
             </a:r>
           </a:p>
         </p:txBody>
@@ -9765,7 +10025,7 @@
         <p:spPr>
           <a:xfrm>
             <a:off x="731520" y="1463040"/>
-            <a:ext cx="10789920" cy="3566160"/>
+            <a:ext cx="10789920" cy="4572000"/>
           </a:xfrm>
           <a:prstGeom prst="rect">
             <a:avLst/>
@@ -9790,94 +10050,23 @@
                 </a:solidFill>
                 <a:latin typeface="Calibri"/>
               </a:rPr>
-              <a:t>Tóm lược các sự việc chính được kể trong đoạn trích. Nếu đặt cho đoạn trích một nhan đề riêng, bạn đề xuất gì? Vì sao?</a:t>
-            </a:r>
-          </a:p>
-        </p:txBody>
-      </p:sp>
-      <p:sp>
-        <p:nvSpPr>
-          <p:cNvPr id="8" name="Rounded Rectangle 7"/>
-          <p:cNvSpPr/>
-          <p:nvPr/>
-        </p:nvSpPr>
-        <p:spPr>
-          <a:xfrm>
-            <a:off x="731520" y="5120640"/>
-            <a:ext cx="10789920" cy="693420"/>
-          </a:xfrm>
-          <a:prstGeom prst="roundRect">
-            <a:avLst>
-              <a:gd name="adj" fmla="val 8000"/>
-            </a:avLst>
-          </a:prstGeom>
-          <a:solidFill>
-            <a:srgbClr val="EFF4FF"/>
-          </a:solidFill>
-          <a:ln w="19050">
-            <a:solidFill>
-              <a:srgbClr val="1E40AF"/>
-            </a:solidFill>
-          </a:ln>
-          <a:effectLst/>
-        </p:spPr>
-        <p:style>
-          <a:lnRef idx="1">
-            <a:schemeClr val="accent1"/>
-          </a:lnRef>
-          <a:fillRef idx="3">
-            <a:schemeClr val="accent1"/>
-          </a:fillRef>
-          <a:effectRef idx="2">
-            <a:schemeClr val="accent1"/>
-          </a:effectRef>
-          <a:fontRef idx="minor">
-            <a:schemeClr val="lt1"/>
-          </a:fontRef>
-        </p:style>
-        <p:txBody>
-          <a:bodyPr rtlCol="0" anchor="ctr"/>
-          <a:lstStyle/>
-          <a:p>
-            <a:pPr algn="ctr"/>
-          </a:p>
-        </p:txBody>
-      </p:sp>
-      <p:sp>
-        <p:nvSpPr>
-          <p:cNvPr id="9" name="TextBox 8"/>
-          <p:cNvSpPr txBox="1"/>
-          <p:nvPr/>
-        </p:nvSpPr>
-        <p:spPr>
-          <a:xfrm>
-            <a:off x="914400" y="5120640"/>
-            <a:ext cx="10424160" cy="693420"/>
-          </a:xfrm>
-          <a:prstGeom prst="rect">
-            <a:avLst/>
-          </a:prstGeom>
-          <a:noFill/>
-        </p:spPr>
-        <p:txBody>
-          <a:bodyPr wrap="square" anchor="ctr" lIns="45720" rIns="45720">
-            <a:spAutoFit/>
-          </a:bodyPr>
-          <a:lstStyle/>
+              <a:t>Mối quan hệ gắn kết giữa các thành viên trong gia đình thường bộc lộ rõ nhất ở thời điểm, tình huống nào? Vì sao?</a:t>
+            </a:r>
+          </a:p>
           <a:p>
             <a:pPr algn="l">
               <a:spcAft>
-                <a:spcPts val="400"/>
+                <a:spcPts val="800"/>
               </a:spcAft>
             </a:pPr>
             <a:r>
-              <a:rPr sz="2200" b="1">
-                <a:solidFill>
-                  <a:srgbClr val="1E40AF"/>
+              <a:rPr sz="2600" b="1">
+                <a:solidFill>
+                  <a:srgbClr val="1E293B"/>
                 </a:solidFill>
                 <a:latin typeface="Calibri"/>
               </a:rPr>
-              <a:t>💡 Sự việc xảy ra vào thời điểm đặc biệt nào?</a:t>
+              <a:t>Chia sẻ ấn tượng về một tác phẩm viết về đề tài gia đình.</a:t>
             </a:r>
           </a:p>
         </p:txBody>
@@ -9960,8 +10149,8 @@
         </p:nvSpPr>
         <p:spPr>
           <a:xfrm>
-            <a:off x="9942271" y="457200"/>
-            <a:ext cx="1700784" cy="457200"/>
+            <a:off x="10408615" y="457200"/>
+            <a:ext cx="1234440" cy="457200"/>
           </a:xfrm>
           <a:prstGeom prst="roundRect">
             <a:avLst/>
@@ -10000,7 +10189,7 @@
                 </a:solidFill>
                 <a:latin typeface="Arial"/>
               </a:rPr>
-              <a:t>LỜI GIẢI</a:t>
+              <a:t>VIDEO</a:t>
             </a:r>
           </a:p>
         </p:txBody>
@@ -10014,7 +10203,7 @@
         <p:spPr>
           <a:xfrm>
             <a:off x="731520" y="274320"/>
-            <a:ext cx="9272016" cy="868680"/>
+            <a:ext cx="9738360" cy="868680"/>
           </a:xfrm>
           <a:prstGeom prst="rect">
             <a:avLst/>
@@ -10034,7 +10223,7 @@
                 </a:solidFill>
                 <a:latin typeface="Arial"/>
               </a:rPr>
-              <a:t>SỰ VIỆC VÀ NHAN ĐỀ</a:t>
+              <a:t>VIDEO THAM KHẢO</a:t>
             </a:r>
           </a:p>
         </p:txBody>
@@ -10118,16 +10307,40 @@
           </a:p>
         </p:txBody>
       </p:sp>
-      <p:sp>
-        <p:nvSpPr>
-          <p:cNvPr id="7" name="TextBox 6"/>
+      <p:pic>
+        <p:nvPicPr>
+          <p:cNvPr id="7" name="Picture 6" descr="QR_video_D1lNT4WIta0.png"/>
+          <p:cNvPicPr>
+            <a:picLocks noChangeAspect="1"/>
+          </p:cNvPicPr>
+          <p:nvPr/>
+        </p:nvPicPr>
+        <p:blipFill>
+          <a:blip r:embed="rId2"/>
+          <a:stretch>
+            <a:fillRect/>
+          </a:stretch>
+        </p:blipFill>
+        <p:spPr>
+          <a:xfrm>
+            <a:off x="8412480" y="1554480"/>
+            <a:ext cx="3108960" cy="3108960"/>
+          </a:xfrm>
+          <a:prstGeom prst="rect">
+            <a:avLst/>
+          </a:prstGeom>
+        </p:spPr>
+      </p:pic>
+      <p:sp>
+        <p:nvSpPr>
+          <p:cNvPr id="8" name="TextBox 7"/>
           <p:cNvSpPr txBox="1"/>
           <p:nvPr/>
         </p:nvSpPr>
         <p:spPr>
           <a:xfrm>
-            <a:off x="731520" y="1463040"/>
-            <a:ext cx="10789920" cy="3474720"/>
+            <a:off x="731520" y="1554480"/>
+            <a:ext cx="7498079" cy="4206240"/>
           </a:xfrm>
           <a:prstGeom prst="rect">
             <a:avLst/>
@@ -10139,6 +10352,38 @@
             <a:spAutoFit/>
           </a:bodyPr>
           <a:lstStyle/>
+          <a:p>
+            <a:pPr algn="l">
+              <a:spcAft>
+                <a:spcPts val="800"/>
+              </a:spcAft>
+            </a:pPr>
+            <a:r>
+              <a:rPr sz="2600" b="1">
+                <a:solidFill>
+                  <a:srgbClr val="1E293B"/>
+                </a:solidFill>
+                <a:latin typeface="Calibri"/>
+              </a:rPr>
+              <a:t>🎬 Phóng sự: Ma Văn Kháng và tiểu thuyết Mùa lá rụng trong vườn</a:t>
+            </a:r>
+          </a:p>
+          <a:p>
+            <a:pPr algn="l">
+              <a:spcAft>
+                <a:spcPts val="800"/>
+              </a:spcAft>
+            </a:pPr>
+            <a:r>
+              <a:rPr sz="2000">
+                <a:solidFill>
+                  <a:srgbClr val="64748B"/>
+                </a:solidFill>
+                <a:latin typeface="Calibri"/>
+              </a:rPr>
+              <a:t>Kênh: Báo Nhân Dân</a:t>
+            </a:r>
+          </a:p>
           <a:p>
             <a:pPr algn="l" marL="365760" indent="-365760">
               <a:spcAft>
@@ -10151,142 +10396,30 @@
               <a:buChar char="•"/>
             </a:pPr>
             <a:r>
-              <a:rPr sz="2300">
+              <a:rPr sz="2000">
                 <a:solidFill>
                   <a:srgbClr val="1E293B"/>
                 </a:solidFill>
                 <a:latin typeface="Calibri"/>
               </a:rPr>
-              <a:t>Chị Hoài từ quê lên đúng chiều ba mươi Tết.</a:t>
-            </a:r>
-          </a:p>
-          <a:p>
-            <a:pPr algn="l" marL="365760" indent="-365760">
+              <a:t>Tìm hiểu chung về tác giả, tác phẩm Mùa lá rụng trong vườn</a:t>
+            </a:r>
+          </a:p>
+          <a:p>
+            <a:pPr algn="l">
               <a:spcAft>
                 <a:spcPts val="800"/>
               </a:spcAft>
-              <a:buClr>
-                <a:srgbClr val="1E40AF"/>
-              </a:buClr>
-              <a:buFont typeface="Arial"/>
-              <a:buChar char="•"/>
             </a:pPr>
             <a:r>
-              <a:rPr sz="2300">
-                <a:solidFill>
-                  <a:srgbClr val="1E293B"/>
+              <a:rPr sz="1600">
+                <a:solidFill>
+                  <a:srgbClr val="64748B"/>
                 </a:solidFill>
                 <a:latin typeface="Calibri"/>
-              </a:rPr>
-              <a:t>Mọi người đón chị xúc động; ông Bằng gặp lại chị.</a:t>
-            </a:r>
-          </a:p>
-          <a:p>
-            <a:pPr algn="l" marL="365760" indent="-365760">
-              <a:spcAft>
-                <a:spcPts val="800"/>
-              </a:spcAft>
-              <a:buClr>
-                <a:srgbClr val="1E40AF"/>
-              </a:buClr>
-              <a:buFont typeface="Arial"/>
-              <a:buChar char="•"/>
-            </a:pPr>
-            <a:r>
-              <a:rPr sz="2300">
-                <a:solidFill>
-                  <a:srgbClr val="1E293B"/>
-                </a:solidFill>
-                <a:latin typeface="Calibri"/>
-              </a:rPr>
-              <a:t>Cả nhà quây quần bên mâm cỗ Tết.</a:t>
-            </a:r>
-          </a:p>
-        </p:txBody>
-      </p:sp>
-      <p:sp>
-        <p:nvSpPr>
-          <p:cNvPr id="8" name="Rounded Rectangle 7"/>
-          <p:cNvSpPr/>
-          <p:nvPr/>
-        </p:nvSpPr>
-        <p:spPr>
-          <a:xfrm>
-            <a:off x="731520" y="5074920"/>
-            <a:ext cx="10789920" cy="731520"/>
-          </a:xfrm>
-          <a:prstGeom prst="roundRect">
-            <a:avLst>
-              <a:gd name="adj" fmla="val 8000"/>
-            </a:avLst>
-          </a:prstGeom>
-          <a:solidFill>
-            <a:srgbClr val="FEF2F2"/>
-          </a:solidFill>
-          <a:ln w="19050">
-            <a:solidFill>
-              <a:srgbClr val="991B1B"/>
-            </a:solidFill>
-          </a:ln>
-          <a:effectLst/>
-        </p:spPr>
-        <p:style>
-          <a:lnRef idx="1">
-            <a:schemeClr val="accent1"/>
-          </a:lnRef>
-          <a:fillRef idx="3">
-            <a:schemeClr val="accent1"/>
-          </a:fillRef>
-          <a:effectRef idx="2">
-            <a:schemeClr val="accent1"/>
-          </a:effectRef>
-          <a:fontRef idx="minor">
-            <a:schemeClr val="lt1"/>
-          </a:fontRef>
-        </p:style>
-        <p:txBody>
-          <a:bodyPr rtlCol="0" anchor="ctr"/>
-          <a:lstStyle/>
-          <a:p>
-            <a:pPr algn="ctr"/>
-          </a:p>
-        </p:txBody>
-      </p:sp>
-      <p:sp>
-        <p:nvSpPr>
-          <p:cNvPr id="9" name="TextBox 8"/>
-          <p:cNvSpPr txBox="1"/>
-          <p:nvPr/>
-        </p:nvSpPr>
-        <p:spPr>
-          <a:xfrm>
-            <a:off x="914400" y="5074920"/>
-            <a:ext cx="10424160" cy="731520"/>
-          </a:xfrm>
-          <a:prstGeom prst="rect">
-            <a:avLst/>
-          </a:prstGeom>
-          <a:noFill/>
-        </p:spPr>
-        <p:txBody>
-          <a:bodyPr wrap="square" anchor="ctr" lIns="45720" rIns="45720">
-            <a:spAutoFit/>
-          </a:bodyPr>
-          <a:lstStyle/>
-          <a:p>
-            <a:pPr algn="l">
-              <a:spcAft>
-                <a:spcPts val="400"/>
-              </a:spcAft>
-            </a:pPr>
-            <a:r>
-              <a:rPr sz="2400" b="1">
-                <a:solidFill>
-                  <a:srgbClr val="991B1B"/>
-                </a:solidFill>
-                <a:latin typeface="Calibri"/>
-              </a:rPr>
-              <a:t>Gợi ý nhan đề: “Chiều ba mươi Tết”, “Người dâu cũ”.</a:t>
+                <a:hlinkClick r:id="rId3"/>
+              </a:rPr>
+              <a:t>https://www.youtube.com/watch?v=D1lNT4WIta0</a:t>
             </a:r>
           </a:p>
         </p:txBody>
@@ -10443,7 +10576,7 @@
                 </a:solidFill>
                 <a:latin typeface="Arial"/>
               </a:rPr>
-              <a:t>NHÂN VẬT CHỊ HOÀI</a:t>
+              <a:t>SỰ VIỆC VÀ NHAN ĐỀ</a:t>
             </a:r>
           </a:p>
         </p:txBody>
@@ -10561,7 +10694,7 @@
                 </a:solidFill>
                 <a:latin typeface="Calibri"/>
               </a:rPr>
-              <a:t>Trình bày ấn tượng của bạn về nhân vật chị Hoài. Nhận xét cách tác giả khắc hoạ nhân vật này.</a:t>
+              <a:t>Tóm lược các sự việc chính được kể trong đoạn trích. Nếu đặt cho đoạn trích một nhan đề riêng, bạn đề xuất gì? Vì sao?</a:t>
             </a:r>
           </a:p>
         </p:txBody>
@@ -10648,7 +10781,7 @@
                 </a:solidFill>
                 <a:latin typeface="Calibri"/>
               </a:rPr>
-              <a:t>💡 Tìm chi tiết ngoại hình, lời nói, hành động.</a:t>
+              <a:t>💡 Sự việc xảy ra vào thời điểm đặc biệt nào?</a:t>
             </a:r>
           </a:p>
         </p:txBody>
@@ -10805,7 +10938,7 @@
                 </a:solidFill>
                 <a:latin typeface="Arial"/>
               </a:rPr>
-              <a:t>NHÂN VẬT CHỊ HOÀI</a:t>
+              <a:t>SỰ VIỆC VÀ NHAN ĐỀ</a:t>
             </a:r>
           </a:p>
         </p:txBody>
@@ -10928,7 +11061,7 @@
                 </a:solidFill>
                 <a:latin typeface="Calibri"/>
               </a:rPr>
-              <a:t>Đẹp người, đẹp nết, hồn hậu, chu đáo.</a:t>
+              <a:t>Chị Hoài từ quê lên đúng chiều ba mươi Tết.</a:t>
             </a:r>
           </a:p>
           <a:p>
@@ -10949,7 +11082,7 @@
                 </a:solidFill>
                 <a:latin typeface="Calibri"/>
               </a:rPr>
-              <a:t>Quà quê, lời hỏi han từng người – nặng tình nghĩa.</a:t>
+              <a:t>Mọi người đón chị xúc động; ông Bằng gặp lại chị.</a:t>
             </a:r>
           </a:p>
           <a:p>
@@ -10970,7 +11103,7 @@
                 </a:solidFill>
                 <a:latin typeface="Calibri"/>
               </a:rPr>
-              <a:t>Khắc hoạ qua ngoại hình, lời thoại, hành động và cảm nhận của người khác.</a:t>
+              <a:t>Cả nhà quây quần bên mâm cỗ Tết.</a:t>
             </a:r>
           </a:p>
         </p:txBody>
@@ -11057,7 +11190,7 @@
                 </a:solidFill>
                 <a:latin typeface="Calibri"/>
               </a:rPr>
-              <a:t>Chị Hoài – hiện thân của vẻ đẹp tình nghĩa truyền thống.</a:t>
+              <a:t>Gợi ý nhan đề: “Chiều ba mươi Tết”, “Người dâu cũ”.</a:t>
             </a:r>
           </a:p>
         </p:txBody>
@@ -11214,7 +11347,7 @@
                 </a:solidFill>
                 <a:latin typeface="Arial"/>
               </a:rPr>
-              <a:t>NHÂN VẬT ÔNG BẰNG</a:t>
+              <a:t>NHÂN VẬT CHỊ HOÀI</a:t>
             </a:r>
           </a:p>
         </p:txBody>
@@ -11332,7 +11465,7 @@
                 </a:solidFill>
                 <a:latin typeface="Calibri"/>
               </a:rPr>
-              <a:t>Tìm hiểu các thủ pháp tác giả vận dụng để giới thiệu, thể hiện nhân vật ông Bằng.</a:t>
+              <a:t>Trình bày ấn tượng của bạn về nhân vật chị Hoài. Nhận xét cách tác giả khắc hoạ nhân vật này.</a:t>
             </a:r>
           </a:p>
         </p:txBody>
@@ -11419,7 +11552,7 @@
                 </a:solidFill>
                 <a:latin typeface="Calibri"/>
               </a:rPr>
-              <a:t>💡 Ông Bằng xuất hiện trực tiếp lúc nào?</a:t>
+              <a:t>💡 Tìm chi tiết ngoại hình, lời nói, hành động.</a:t>
             </a:r>
           </a:p>
         </p:txBody>
@@ -11576,7 +11709,7 @@
                 </a:solidFill>
                 <a:latin typeface="Arial"/>
               </a:rPr>
-              <a:t>NHÂN VẬT ÔNG BẰNG</a:t>
+              <a:t>NHÂN VẬT CHỊ HOÀI</a:t>
             </a:r>
           </a:p>
         </p:txBody>
@@ -11699,7 +11832,7 @@
                 </a:solidFill>
                 <a:latin typeface="Calibri"/>
               </a:rPr>
-              <a:t>Giới thiệu gián tiếp trước qua lời kể, sự chờ đợi.</a:t>
+              <a:t>Đẹp người, đẹp nết, hồn hậu, chu đáo.</a:t>
             </a:r>
           </a:p>
           <a:p>
@@ -11720,7 +11853,7 @@
                 </a:solidFill>
                 <a:latin typeface="Calibri"/>
               </a:rPr>
-              <a:t>Miêu tả ngoại hình, cử chỉ: “mắt chớp liên hồi, môi lật bật”.</a:t>
+              <a:t>Quà quê, lời hỏi han từng người – nặng tình nghĩa.</a:t>
             </a:r>
           </a:p>
           <a:p>
@@ -11741,7 +11874,7 @@
                 </a:solidFill>
                 <a:latin typeface="Calibri"/>
               </a:rPr>
-              <a:t>Bộc lộ xúc động sâu sắc của người cha.</a:t>
+              <a:t>Khắc hoạ qua ngoại hình, lời thoại, hành động và cảm nhận của người khác.</a:t>
             </a:r>
           </a:p>
         </p:txBody>
@@ -11828,7 +11961,7 @@
                 </a:solidFill>
                 <a:latin typeface="Calibri"/>
               </a:rPr>
-              <a:t>Nhân vật được khắc hoạ bằng nhiều thủ pháp đan xen.</a:t>
+              <a:t>Chị Hoài – hiện thân của vẻ đẹp tình nghĩa truyền thống.</a:t>
             </a:r>
           </a:p>
         </p:txBody>
@@ -11985,7 +12118,7 @@
                 </a:solidFill>
                 <a:latin typeface="Arial"/>
               </a:rPr>
-              <a:t>VĂN HOÁ GIA ĐÌNH – NHAN ĐỀ</a:t>
+              <a:t>NHÂN VẬT ÔNG BẰNG</a:t>
             </a:r>
           </a:p>
         </p:txBody>
@@ -12103,7 +12236,7 @@
                 </a:solidFill>
                 <a:latin typeface="Calibri"/>
               </a:rPr>
-              <a:t>Sự đồng cảm giữa người kể chuyện và nhân vật về giá trị văn hoá gia đình thể hiện qua dấu hiệu nào? Ý nghĩa ẩn dụ của nhan đề?</a:t>
+              <a:t>Tìm hiểu các thủ pháp tác giả vận dụng để giới thiệu, thể hiện nhân vật ông Bằng.</a:t>
             </a:r>
           </a:p>
         </p:txBody>
@@ -12190,7 +12323,7 @@
                 </a:solidFill>
                 <a:latin typeface="Calibri"/>
               </a:rPr>
-              <a:t>💡 Chú ý mâm cỗ Tết và lễ cúng tất niên.</a:t>
+              <a:t>💡 Ông Bằng xuất hiện trực tiếp lúc nào?</a:t>
             </a:r>
           </a:p>
         </p:txBody>
@@ -12347,7 +12480,7 @@
                 </a:solidFill>
                 <a:latin typeface="Arial"/>
               </a:rPr>
-              <a:t>VĂN HOÁ GIA ĐÌNH – NHAN ĐỀ</a:t>
+              <a:t>NHÂN VẬT ÔNG BẰNG</a:t>
             </a:r>
           </a:p>
         </p:txBody>
@@ -12470,7 +12603,7 @@
                 </a:solidFill>
                 <a:latin typeface="Calibri"/>
               </a:rPr>
-              <a:t>Miêu tả tỉ mỉ mâm cỗ, nghi lễ cúng tất niên.</a:t>
+              <a:t>Giới thiệu gián tiếp trước qua lời kể, sự chờ đợi.</a:t>
             </a:r>
           </a:p>
           <a:p>
@@ -12491,7 +12624,7 @@
                 </a:solidFill>
                 <a:latin typeface="Calibri"/>
               </a:rPr>
-              <a:t>Trân trọng tình nghĩa với người dâu cũ.</a:t>
+              <a:t>Miêu tả ngoại hình, cử chỉ: “mắt chớp liên hồi, môi lật bật”.</a:t>
             </a:r>
           </a:p>
           <a:p>
@@ -12512,7 +12645,7 @@
                 </a:solidFill>
                 <a:latin typeface="Calibri"/>
               </a:rPr>
-              <a:t>“Mùa lá rụng”: quy luật đổi thay – thử thách các giá trị truyền thống.</a:t>
+              <a:t>Bộc lộ xúc động sâu sắc của người cha.</a:t>
             </a:r>
           </a:p>
         </p:txBody>
@@ -12599,7 +12732,7 @@
                 </a:solidFill>
                 <a:latin typeface="Calibri"/>
               </a:rPr>
-              <a:t>Trân trọng, gìn giữ giá trị văn hoá gia đình Việt Nam.</a:t>
+              <a:t>Nhân vật được khắc hoạ bằng nhiều thủ pháp đan xen.</a:t>
             </a:r>
           </a:p>
         </p:txBody>
@@ -12618,7 +12751,7 @@
     <p:bg>
       <p:bgPr>
         <a:solidFill>
-          <a:srgbClr val="F8F9FA"/>
+          <a:srgbClr val="FFFFFF"/>
         </a:solidFill>
         <a:effectLst/>
       </p:bgPr>
@@ -12638,14 +12771,14 @@
         </p:nvSpPr>
         <p:spPr>
           <a:xfrm>
-            <a:off x="548640" y="2926080"/>
-            <a:ext cx="164592" cy="1005840"/>
+            <a:off x="457200" y="384048"/>
+            <a:ext cx="109728" cy="658368"/>
           </a:xfrm>
           <a:prstGeom prst="rect">
             <a:avLst/>
           </a:prstGeom>
           <a:solidFill>
-            <a:srgbClr val="991B1B"/>
+            <a:srgbClr val="1E40AF"/>
           </a:solidFill>
           <a:ln>
             <a:noFill/>
@@ -12676,14 +12809,67 @@
       </p:sp>
       <p:sp>
         <p:nvSpPr>
-          <p:cNvPr id="3" name="TextBox 2"/>
+          <p:cNvPr id="3" name="Rounded Rectangle 2"/>
+          <p:cNvSpPr/>
+          <p:nvPr/>
+        </p:nvSpPr>
+        <p:spPr>
+          <a:xfrm>
+            <a:off x="10253167" y="457200"/>
+            <a:ext cx="1389888" cy="457200"/>
+          </a:xfrm>
+          <a:prstGeom prst="roundRect">
+            <a:avLst/>
+          </a:prstGeom>
+          <a:solidFill>
+            <a:srgbClr val="1E40AF"/>
+          </a:solidFill>
+          <a:ln>
+            <a:noFill/>
+          </a:ln>
+          <a:effectLst/>
+        </p:spPr>
+        <p:style>
+          <a:lnRef idx="1">
+            <a:schemeClr val="accent1"/>
+          </a:lnRef>
+          <a:fillRef idx="3">
+            <a:schemeClr val="accent1"/>
+          </a:fillRef>
+          <a:effectRef idx="2">
+            <a:schemeClr val="accent1"/>
+          </a:effectRef>
+          <a:fontRef idx="minor">
+            <a:schemeClr val="lt1"/>
+          </a:fontRef>
+        </p:style>
+        <p:txBody>
+          <a:bodyPr rtlCol="0" anchor="ctr" wrap="none" tIns="0" bIns="0"/>
+          <a:lstStyle/>
+          <a:p>
+            <a:pPr algn="ctr"/>
+            <a:r>
+              <a:rPr sz="1400" b="1">
+                <a:solidFill>
+                  <a:srgbClr val="FFFFFF"/>
+                </a:solidFill>
+                <a:latin typeface="Arial"/>
+              </a:rPr>
+              <a:t>ĐỀ BÀI</a:t>
+            </a:r>
+          </a:p>
+        </p:txBody>
+      </p:sp>
+      <p:sp>
+        <p:nvSpPr>
+          <p:cNvPr id="4" name="TextBox 3"/>
           <p:cNvSpPr txBox="1"/>
           <p:nvPr/>
         </p:nvSpPr>
         <p:spPr>
           <a:xfrm>
-            <a:off x="914400" y="2743200"/>
-            <a:ext cx="10515600" cy="1371600"/>
+            <a:off x="731520" y="274320"/>
+            <a:ext cx="9582912" cy="868680"/>
           </a:xfrm>
           <a:prstGeom prst="rect">
             <a:avLst/>
@@ -12691,7 +12877,120 @@
           <a:noFill/>
         </p:spPr>
         <p:txBody>
-          <a:bodyPr wrap="square" anchor="ctr" lIns="45720" rIns="45720">
+          <a:bodyPr wrap="square" anchor="ctr">
+            <a:spAutoFit/>
+          </a:bodyPr>
+          <a:lstStyle/>
+          <a:p>
+            <a:r>
+              <a:rPr sz="3600" b="1">
+                <a:solidFill>
+                  <a:srgbClr val="1E40AF"/>
+                </a:solidFill>
+                <a:latin typeface="Arial"/>
+              </a:rPr>
+              <a:t>VĂN HOÁ GIA ĐÌNH – NHAN ĐỀ</a:t>
+            </a:r>
+          </a:p>
+        </p:txBody>
+      </p:sp>
+      <p:sp>
+        <p:nvSpPr>
+          <p:cNvPr id="5" name="Rectangle 4"/>
+          <p:cNvSpPr/>
+          <p:nvPr/>
+        </p:nvSpPr>
+        <p:spPr>
+          <a:xfrm>
+            <a:off x="457200" y="1207008"/>
+            <a:ext cx="11274552" cy="22000"/>
+          </a:xfrm>
+          <a:prstGeom prst="rect">
+            <a:avLst/>
+          </a:prstGeom>
+          <a:solidFill>
+            <a:srgbClr val="E2E8F0"/>
+          </a:solidFill>
+          <a:ln>
+            <a:noFill/>
+          </a:ln>
+          <a:effectLst/>
+        </p:spPr>
+        <p:style>
+          <a:lnRef idx="1">
+            <a:schemeClr val="accent1"/>
+          </a:lnRef>
+          <a:fillRef idx="3">
+            <a:schemeClr val="accent1"/>
+          </a:fillRef>
+          <a:effectRef idx="2">
+            <a:schemeClr val="accent1"/>
+          </a:effectRef>
+          <a:fontRef idx="minor">
+            <a:schemeClr val="lt1"/>
+          </a:fontRef>
+        </p:style>
+        <p:txBody>
+          <a:bodyPr rtlCol="0" anchor="ctr"/>
+          <a:lstStyle/>
+          <a:p>
+            <a:pPr algn="ctr"/>
+          </a:p>
+        </p:txBody>
+      </p:sp>
+      <p:sp>
+        <p:nvSpPr>
+          <p:cNvPr id="6" name="TextBox 5"/>
+          <p:cNvSpPr txBox="1"/>
+          <p:nvPr/>
+        </p:nvSpPr>
+        <p:spPr>
+          <a:xfrm>
+            <a:off x="457200" y="6355080"/>
+            <a:ext cx="11274552" cy="365760"/>
+          </a:xfrm>
+          <a:prstGeom prst="rect">
+            <a:avLst/>
+          </a:prstGeom>
+          <a:noFill/>
+        </p:spPr>
+        <p:txBody>
+          <a:bodyPr wrap="none">
+            <a:spAutoFit/>
+          </a:bodyPr>
+          <a:lstStyle/>
+          <a:p>
+            <a:pPr algn="r"/>
+            <a:r>
+              <a:rPr sz="1200">
+                <a:solidFill>
+                  <a:srgbClr val="64748B"/>
+                </a:solidFill>
+                <a:latin typeface="Calibri"/>
+              </a:rPr>
+              <a:t>Ngữ văn 12 · Bài 1: Khả Năng Lớn Lao Của Tiểu Thuyết          28</a:t>
+            </a:r>
+          </a:p>
+        </p:txBody>
+      </p:sp>
+      <p:sp>
+        <p:nvSpPr>
+          <p:cNvPr id="7" name="TextBox 6"/>
+          <p:cNvSpPr txBox="1"/>
+          <p:nvPr/>
+        </p:nvSpPr>
+        <p:spPr>
+          <a:xfrm>
+            <a:off x="731520" y="1463040"/>
+            <a:ext cx="10789920" cy="3566160"/>
+          </a:xfrm>
+          <a:prstGeom prst="rect">
+            <a:avLst/>
+          </a:prstGeom>
+          <a:noFill/>
+        </p:spPr>
+        <p:txBody>
+          <a:bodyPr wrap="square" anchor="t" lIns="45720" rIns="45720">
             <a:spAutoFit/>
           </a:bodyPr>
           <a:lstStyle/>
@@ -12702,13 +13001,100 @@
               </a:spcAft>
             </a:pPr>
             <a:r>
-              <a:rPr sz="3600" b="1">
+              <a:rPr sz="2600" b="1">
+                <a:solidFill>
+                  <a:srgbClr val="1E293B"/>
+                </a:solidFill>
+                <a:latin typeface="Calibri"/>
+              </a:rPr>
+              <a:t>Sự đồng cảm giữa người kể chuyện và nhân vật về giá trị văn hoá gia đình thể hiện qua dấu hiệu nào? Ý nghĩa ẩn dụ của nhan đề?</a:t>
+            </a:r>
+          </a:p>
+        </p:txBody>
+      </p:sp>
+      <p:sp>
+        <p:nvSpPr>
+          <p:cNvPr id="8" name="Rounded Rectangle 7"/>
+          <p:cNvSpPr/>
+          <p:nvPr/>
+        </p:nvSpPr>
+        <p:spPr>
+          <a:xfrm>
+            <a:off x="731520" y="5120640"/>
+            <a:ext cx="10789920" cy="693420"/>
+          </a:xfrm>
+          <a:prstGeom prst="roundRect">
+            <a:avLst>
+              <a:gd name="adj" fmla="val 8000"/>
+            </a:avLst>
+          </a:prstGeom>
+          <a:solidFill>
+            <a:srgbClr val="EFF4FF"/>
+          </a:solidFill>
+          <a:ln w="19050">
+            <a:solidFill>
+              <a:srgbClr val="1E40AF"/>
+            </a:solidFill>
+          </a:ln>
+          <a:effectLst/>
+        </p:spPr>
+        <p:style>
+          <a:lnRef idx="1">
+            <a:schemeClr val="accent1"/>
+          </a:lnRef>
+          <a:fillRef idx="3">
+            <a:schemeClr val="accent1"/>
+          </a:fillRef>
+          <a:effectRef idx="2">
+            <a:schemeClr val="accent1"/>
+          </a:effectRef>
+          <a:fontRef idx="minor">
+            <a:schemeClr val="lt1"/>
+          </a:fontRef>
+        </p:style>
+        <p:txBody>
+          <a:bodyPr rtlCol="0" anchor="ctr"/>
+          <a:lstStyle/>
+          <a:p>
+            <a:pPr algn="ctr"/>
+          </a:p>
+        </p:txBody>
+      </p:sp>
+      <p:sp>
+        <p:nvSpPr>
+          <p:cNvPr id="9" name="TextBox 8"/>
+          <p:cNvSpPr txBox="1"/>
+          <p:nvPr/>
+        </p:nvSpPr>
+        <p:spPr>
+          <a:xfrm>
+            <a:off x="914400" y="5120640"/>
+            <a:ext cx="10424160" cy="693420"/>
+          </a:xfrm>
+          <a:prstGeom prst="rect">
+            <a:avLst/>
+          </a:prstGeom>
+          <a:noFill/>
+        </p:spPr>
+        <p:txBody>
+          <a:bodyPr wrap="square" anchor="ctr" lIns="45720" rIns="45720">
+            <a:spAutoFit/>
+          </a:bodyPr>
+          <a:lstStyle/>
+          <a:p>
+            <a:pPr algn="l">
+              <a:spcAft>
+                <a:spcPts val="400"/>
+              </a:spcAft>
+            </a:pPr>
+            <a:r>
+              <a:rPr sz="2200" b="1">
                 <a:solidFill>
                   <a:srgbClr val="1E40AF"/>
                 </a:solidFill>
                 <a:latin typeface="Calibri"/>
               </a:rPr>
-              <a:t>TIẾT 7: THỰC HÀNH TIẾNG VIỆT</a:t>
+              <a:t>💡 Chú ý mâm cỗ Tết và lễ cúng tất niên.</a:t>
             </a:r>
           </a:p>
         </p:txBody>
@@ -12791,14 +13177,14 @@
         </p:nvSpPr>
         <p:spPr>
           <a:xfrm>
-            <a:off x="10253167" y="457200"/>
-            <a:ext cx="1389888" cy="457200"/>
+            <a:off x="9942271" y="457200"/>
+            <a:ext cx="1700784" cy="457200"/>
           </a:xfrm>
           <a:prstGeom prst="roundRect">
             <a:avLst/>
           </a:prstGeom>
           <a:solidFill>
-            <a:srgbClr val="1E40AF"/>
+            <a:srgbClr val="991B1B"/>
           </a:solidFill>
           <a:ln>
             <a:noFill/>
@@ -12831,7 +13217,7 @@
                 </a:solidFill>
                 <a:latin typeface="Arial"/>
               </a:rPr>
-              <a:t>ĐỀ BÀI</a:t>
+              <a:t>LỜI GIẢI</a:t>
             </a:r>
           </a:p>
         </p:txBody>
@@ -12845,7 +13231,7 @@
         <p:spPr>
           <a:xfrm>
             <a:off x="731520" y="274320"/>
-            <a:ext cx="9582912" cy="868680"/>
+            <a:ext cx="9272016" cy="868680"/>
           </a:xfrm>
           <a:prstGeom prst="rect">
             <a:avLst/>
@@ -12865,7 +13251,7 @@
                 </a:solidFill>
                 <a:latin typeface="Arial"/>
               </a:rPr>
-              <a:t>NHẬN BIẾT NÓI MỈA</a:t>
+              <a:t>VĂN HOÁ GIA ĐÌNH – NHAN ĐỀ</a:t>
             </a:r>
           </a:p>
         </p:txBody>
@@ -12958,7 +13344,7 @@
         <p:spPr>
           <a:xfrm>
             <a:off x="731520" y="1463040"/>
-            <a:ext cx="10789920" cy="3566160"/>
+            <a:ext cx="10789920" cy="3474720"/>
           </a:xfrm>
           <a:prstGeom prst="rect">
             <a:avLst/>
@@ -12971,19 +13357,66 @@
           </a:bodyPr>
           <a:lstStyle/>
           <a:p>
-            <a:pPr algn="l">
+            <a:pPr algn="l" marL="365760" indent="-365760">
               <a:spcAft>
                 <a:spcPts val="800"/>
               </a:spcAft>
+              <a:buClr>
+                <a:srgbClr val="1E40AF"/>
+              </a:buClr>
+              <a:buFont typeface="Arial"/>
+              <a:buChar char="•"/>
             </a:pPr>
             <a:r>
-              <a:rPr sz="2600" b="1">
+              <a:rPr sz="2300">
                 <a:solidFill>
                   <a:srgbClr val="1E293B"/>
                 </a:solidFill>
                 <a:latin typeface="Calibri"/>
               </a:rPr>
-              <a:t>Xác định nói mỉa và phân tích hiệu quả: “Công chúng luôn luôn vỗ tay hoan hô Xuân, còn trên khán đài, đức vua Xiêm đã lộ ra mặt rồng tất cả sự thịnh nộ…” (Số đỏ).</a:t>
+              <a:t>Miêu tả tỉ mỉ mâm cỗ, nghi lễ cúng tất niên.</a:t>
+            </a:r>
+          </a:p>
+          <a:p>
+            <a:pPr algn="l" marL="365760" indent="-365760">
+              <a:spcAft>
+                <a:spcPts val="800"/>
+              </a:spcAft>
+              <a:buClr>
+                <a:srgbClr val="1E40AF"/>
+              </a:buClr>
+              <a:buFont typeface="Arial"/>
+              <a:buChar char="•"/>
+            </a:pPr>
+            <a:r>
+              <a:rPr sz="2300">
+                <a:solidFill>
+                  <a:srgbClr val="1E293B"/>
+                </a:solidFill>
+                <a:latin typeface="Calibri"/>
+              </a:rPr>
+              <a:t>Trân trọng tình nghĩa với người dâu cũ.</a:t>
+            </a:r>
+          </a:p>
+          <a:p>
+            <a:pPr algn="l" marL="365760" indent="-365760">
+              <a:spcAft>
+                <a:spcPts val="800"/>
+              </a:spcAft>
+              <a:buClr>
+                <a:srgbClr val="1E40AF"/>
+              </a:buClr>
+              <a:buFont typeface="Arial"/>
+              <a:buChar char="•"/>
+            </a:pPr>
+            <a:r>
+              <a:rPr sz="2300">
+                <a:solidFill>
+                  <a:srgbClr val="1E293B"/>
+                </a:solidFill>
+                <a:latin typeface="Calibri"/>
+              </a:rPr>
+              <a:t>“Mùa lá rụng”: quy luật đổi thay – thử thách các giá trị truyền thống.</a:t>
             </a:r>
           </a:p>
         </p:txBody>
@@ -12996,8 +13429,8 @@
         </p:nvSpPr>
         <p:spPr>
           <a:xfrm>
-            <a:off x="731520" y="5120640"/>
-            <a:ext cx="10789920" cy="693420"/>
+            <a:off x="731520" y="5074920"/>
+            <a:ext cx="10789920" cy="731520"/>
           </a:xfrm>
           <a:prstGeom prst="roundRect">
             <a:avLst>
@@ -13005,11 +13438,11 @@
             </a:avLst>
           </a:prstGeom>
           <a:solidFill>
-            <a:srgbClr val="EFF4FF"/>
+            <a:srgbClr val="FEF2F2"/>
           </a:solidFill>
           <a:ln w="19050">
             <a:solidFill>
-              <a:srgbClr val="1E40AF"/>
+              <a:srgbClr val="991B1B"/>
             </a:solidFill>
           </a:ln>
           <a:effectLst/>
@@ -13044,8 +13477,8 @@
         </p:nvSpPr>
         <p:spPr>
           <a:xfrm>
-            <a:off x="914400" y="5120640"/>
-            <a:ext cx="10424160" cy="693420"/>
+            <a:off x="914400" y="5074920"/>
+            <a:ext cx="10424160" cy="731520"/>
           </a:xfrm>
           <a:prstGeom prst="rect">
             <a:avLst/>
@@ -13064,13 +13497,13 @@
               </a:spcAft>
             </a:pPr>
             <a:r>
-              <a:rPr sz="2200" b="1">
-                <a:solidFill>
-                  <a:srgbClr val="1E40AF"/>
+              <a:rPr sz="2400" b="1">
+                <a:solidFill>
+                  <a:srgbClr val="991B1B"/>
                 </a:solidFill>
                 <a:latin typeface="Calibri"/>
               </a:rPr>
-              <a:t>💡 Hiển ngôn trang trọng – hàm ngôn là gì?</a:t>
+              <a:t>Trân trọng, gìn giữ giá trị văn hoá gia đình Việt Nam.</a:t>
             </a:r>
           </a:p>
         </p:txBody>
@@ -13198,7 +13631,7 @@
     <p:bg>
       <p:bgPr>
         <a:solidFill>
-          <a:srgbClr val="FFFFFF"/>
+          <a:srgbClr val="F8F9FA"/>
         </a:solidFill>
         <a:effectLst/>
       </p:bgPr>
@@ -13218,54 +13651,10 @@
         </p:nvSpPr>
         <p:spPr>
           <a:xfrm>
-            <a:off x="457200" y="384048"/>
-            <a:ext cx="109728" cy="658368"/>
-          </a:xfrm>
-          <a:prstGeom prst="rect">
-            <a:avLst/>
-          </a:prstGeom>
-          <a:solidFill>
-            <a:srgbClr val="1E40AF"/>
-          </a:solidFill>
-          <a:ln>
-            <a:noFill/>
-          </a:ln>
-          <a:effectLst/>
-        </p:spPr>
-        <p:style>
-          <a:lnRef idx="1">
-            <a:schemeClr val="accent1"/>
-          </a:lnRef>
-          <a:fillRef idx="3">
-            <a:schemeClr val="accent1"/>
-          </a:fillRef>
-          <a:effectRef idx="2">
-            <a:schemeClr val="accent1"/>
-          </a:effectRef>
-          <a:fontRef idx="minor">
-            <a:schemeClr val="lt1"/>
-          </a:fontRef>
-        </p:style>
-        <p:txBody>
-          <a:bodyPr rtlCol="0" anchor="ctr"/>
-          <a:lstStyle/>
-          <a:p>
-            <a:pPr algn="ctr"/>
-          </a:p>
-        </p:txBody>
-      </p:sp>
-      <p:sp>
-        <p:nvSpPr>
-          <p:cNvPr id="3" name="Rounded Rectangle 2"/>
-          <p:cNvSpPr/>
-          <p:nvPr/>
-        </p:nvSpPr>
-        <p:spPr>
-          <a:xfrm>
-            <a:off x="9942271" y="457200"/>
-            <a:ext cx="1700784" cy="457200"/>
-          </a:xfrm>
-          <a:prstGeom prst="roundRect">
+            <a:off x="548640" y="2926080"/>
+            <a:ext cx="164592" cy="1005840"/>
+          </a:xfrm>
+          <a:prstGeom prst="rect">
             <a:avLst/>
           </a:prstGeom>
           <a:solidFill>
@@ -13291,32 +13680,23 @@
           </a:fontRef>
         </p:style>
         <p:txBody>
-          <a:bodyPr rtlCol="0" anchor="ctr" wrap="none" tIns="0" bIns="0"/>
+          <a:bodyPr rtlCol="0" anchor="ctr"/>
           <a:lstStyle/>
           <a:p>
             <a:pPr algn="ctr"/>
-            <a:r>
-              <a:rPr sz="1400" b="1">
-                <a:solidFill>
-                  <a:srgbClr val="FFFFFF"/>
-                </a:solidFill>
-                <a:latin typeface="Arial"/>
-              </a:rPr>
-              <a:t>LỜI GIẢI</a:t>
-            </a:r>
-          </a:p>
-        </p:txBody>
-      </p:sp>
-      <p:sp>
-        <p:nvSpPr>
-          <p:cNvPr id="4" name="TextBox 3"/>
+          </a:p>
+        </p:txBody>
+      </p:sp>
+      <p:sp>
+        <p:nvSpPr>
+          <p:cNvPr id="3" name="TextBox 2"/>
           <p:cNvSpPr txBox="1"/>
           <p:nvPr/>
         </p:nvSpPr>
         <p:spPr>
           <a:xfrm>
-            <a:off x="731520" y="274320"/>
-            <a:ext cx="9272016" cy="868680"/>
+            <a:off x="914400" y="2743200"/>
+            <a:ext cx="10515600" cy="1371600"/>
           </a:xfrm>
           <a:prstGeom prst="rect">
             <a:avLst/>
@@ -13324,271 +13704,24 @@
           <a:noFill/>
         </p:spPr>
         <p:txBody>
-          <a:bodyPr wrap="square" anchor="ctr">
+          <a:bodyPr wrap="square" anchor="ctr" lIns="45720" rIns="45720">
             <a:spAutoFit/>
           </a:bodyPr>
           <a:lstStyle/>
           <a:p>
-            <a:r>
-              <a:rPr sz="3600" b="1">
-                <a:solidFill>
-                  <a:srgbClr val="1E40AF"/>
-                </a:solidFill>
-                <a:latin typeface="Arial"/>
-              </a:rPr>
-              <a:t>NHẬN BIẾT NÓI MỈA</a:t>
-            </a:r>
-          </a:p>
-        </p:txBody>
-      </p:sp>
-      <p:sp>
-        <p:nvSpPr>
-          <p:cNvPr id="5" name="Rectangle 4"/>
-          <p:cNvSpPr/>
-          <p:nvPr/>
-        </p:nvSpPr>
-        <p:spPr>
-          <a:xfrm>
-            <a:off x="457200" y="1207008"/>
-            <a:ext cx="11274552" cy="22000"/>
-          </a:xfrm>
-          <a:prstGeom prst="rect">
-            <a:avLst/>
-          </a:prstGeom>
-          <a:solidFill>
-            <a:srgbClr val="E2E8F0"/>
-          </a:solidFill>
-          <a:ln>
-            <a:noFill/>
-          </a:ln>
-          <a:effectLst/>
-        </p:spPr>
-        <p:style>
-          <a:lnRef idx="1">
-            <a:schemeClr val="accent1"/>
-          </a:lnRef>
-          <a:fillRef idx="3">
-            <a:schemeClr val="accent1"/>
-          </a:fillRef>
-          <a:effectRef idx="2">
-            <a:schemeClr val="accent1"/>
-          </a:effectRef>
-          <a:fontRef idx="minor">
-            <a:schemeClr val="lt1"/>
-          </a:fontRef>
-        </p:style>
-        <p:txBody>
-          <a:bodyPr rtlCol="0" anchor="ctr"/>
-          <a:lstStyle/>
-          <a:p>
-            <a:pPr algn="ctr"/>
-          </a:p>
-        </p:txBody>
-      </p:sp>
-      <p:sp>
-        <p:nvSpPr>
-          <p:cNvPr id="6" name="TextBox 5"/>
-          <p:cNvSpPr txBox="1"/>
-          <p:nvPr/>
-        </p:nvSpPr>
-        <p:spPr>
-          <a:xfrm>
-            <a:off x="457200" y="6355080"/>
-            <a:ext cx="11274552" cy="365760"/>
-          </a:xfrm>
-          <a:prstGeom prst="rect">
-            <a:avLst/>
-          </a:prstGeom>
-          <a:noFill/>
-        </p:spPr>
-        <p:txBody>
-          <a:bodyPr wrap="none">
-            <a:spAutoFit/>
-          </a:bodyPr>
-          <a:lstStyle/>
-          <a:p>
-            <a:pPr algn="r"/>
-            <a:r>
-              <a:rPr sz="1200">
-                <a:solidFill>
-                  <a:srgbClr val="64748B"/>
-                </a:solidFill>
-                <a:latin typeface="Calibri"/>
-              </a:rPr>
-              <a:t>Ngữ văn 12 · Bài 1: Khả Năng Lớn Lao Của Tiểu Thuyết          30</a:t>
-            </a:r>
-          </a:p>
-        </p:txBody>
-      </p:sp>
-      <p:sp>
-        <p:nvSpPr>
-          <p:cNvPr id="7" name="TextBox 6"/>
-          <p:cNvSpPr txBox="1"/>
-          <p:nvPr/>
-        </p:nvSpPr>
-        <p:spPr>
-          <a:xfrm>
-            <a:off x="731520" y="1463040"/>
-            <a:ext cx="10789920" cy="3474720"/>
-          </a:xfrm>
-          <a:prstGeom prst="rect">
-            <a:avLst/>
-          </a:prstGeom>
-          <a:noFill/>
-        </p:spPr>
-        <p:txBody>
-          <a:bodyPr wrap="square" anchor="t" lIns="45720" rIns="45720">
-            <a:spAutoFit/>
-          </a:bodyPr>
-          <a:lstStyle/>
-          <a:p>
-            <a:pPr algn="l" marL="365760" indent="-365760">
+            <a:pPr algn="l">
               <a:spcAft>
                 <a:spcPts val="800"/>
               </a:spcAft>
-              <a:buClr>
-                <a:srgbClr val="1E40AF"/>
-              </a:buClr>
-              <a:buFont typeface="Arial"/>
-              <a:buChar char="•"/>
             </a:pPr>
             <a:r>
-              <a:rPr sz="2300">
-                <a:solidFill>
-                  <a:srgbClr val="1E293B"/>
+              <a:rPr sz="3600" b="1">
+                <a:solidFill>
+                  <a:srgbClr val="1E40AF"/>
                 </a:solidFill>
                 <a:latin typeface="Calibri"/>
               </a:rPr>
-              <a:t>Hiển ngôn: “mặt rồng”, “thiên tử thế thiên hành đạo” – trang trọng.</a:t>
-            </a:r>
-          </a:p>
-          <a:p>
-            <a:pPr algn="l" marL="365760" indent="-365760">
-              <a:spcAft>
-                <a:spcPts val="800"/>
-              </a:spcAft>
-              <a:buClr>
-                <a:srgbClr val="1E40AF"/>
-              </a:buClr>
-              <a:buFont typeface="Arial"/>
-              <a:buChar char="•"/>
-            </a:pPr>
-            <a:r>
-              <a:rPr sz="2300">
-                <a:solidFill>
-                  <a:srgbClr val="1E293B"/>
-                </a:solidFill>
-                <a:latin typeface="Calibri"/>
-              </a:rPr>
-              <a:t>Hàm ngôn: giễu cợt sự thịnh nộ vô lối của vua Xiêm.</a:t>
-            </a:r>
-          </a:p>
-          <a:p>
-            <a:pPr algn="l" marL="365760" indent="-365760">
-              <a:spcAft>
-                <a:spcPts val="800"/>
-              </a:spcAft>
-              <a:buClr>
-                <a:srgbClr val="1E40AF"/>
-              </a:buClr>
-              <a:buFont typeface="Arial"/>
-              <a:buChar char="•"/>
-            </a:pPr>
-            <a:r>
-              <a:rPr sz="2300">
-                <a:solidFill>
-                  <a:srgbClr val="1E293B"/>
-                </a:solidFill>
-                <a:latin typeface="Calibri"/>
-              </a:rPr>
-              <a:t>“cái nước có hàng triệu con voi” – tương phản, gây cười.</a:t>
-            </a:r>
-          </a:p>
-        </p:txBody>
-      </p:sp>
-      <p:sp>
-        <p:nvSpPr>
-          <p:cNvPr id="8" name="Rounded Rectangle 7"/>
-          <p:cNvSpPr/>
-          <p:nvPr/>
-        </p:nvSpPr>
-        <p:spPr>
-          <a:xfrm>
-            <a:off x="731520" y="5074920"/>
-            <a:ext cx="10789920" cy="731520"/>
-          </a:xfrm>
-          <a:prstGeom prst="roundRect">
-            <a:avLst>
-              <a:gd name="adj" fmla="val 8000"/>
-            </a:avLst>
-          </a:prstGeom>
-          <a:solidFill>
-            <a:srgbClr val="FEF2F2"/>
-          </a:solidFill>
-          <a:ln w="19050">
-            <a:solidFill>
-              <a:srgbClr val="991B1B"/>
-            </a:solidFill>
-          </a:ln>
-          <a:effectLst/>
-        </p:spPr>
-        <p:style>
-          <a:lnRef idx="1">
-            <a:schemeClr val="accent1"/>
-          </a:lnRef>
-          <a:fillRef idx="3">
-            <a:schemeClr val="accent1"/>
-          </a:fillRef>
-          <a:effectRef idx="2">
-            <a:schemeClr val="accent1"/>
-          </a:effectRef>
-          <a:fontRef idx="minor">
-            <a:schemeClr val="lt1"/>
-          </a:fontRef>
-        </p:style>
-        <p:txBody>
-          <a:bodyPr rtlCol="0" anchor="ctr"/>
-          <a:lstStyle/>
-          <a:p>
-            <a:pPr algn="ctr"/>
-          </a:p>
-        </p:txBody>
-      </p:sp>
-      <p:sp>
-        <p:nvSpPr>
-          <p:cNvPr id="9" name="TextBox 8"/>
-          <p:cNvSpPr txBox="1"/>
-          <p:nvPr/>
-        </p:nvSpPr>
-        <p:spPr>
-          <a:xfrm>
-            <a:off x="914400" y="5074920"/>
-            <a:ext cx="10424160" cy="731520"/>
-          </a:xfrm>
-          <a:prstGeom prst="rect">
-            <a:avLst/>
-          </a:prstGeom>
-          <a:noFill/>
-        </p:spPr>
-        <p:txBody>
-          <a:bodyPr wrap="square" anchor="ctr" lIns="45720" rIns="45720">
-            <a:spAutoFit/>
-          </a:bodyPr>
-          <a:lstStyle/>
-          <a:p>
-            <a:pPr algn="l">
-              <a:spcAft>
-                <a:spcPts val="400"/>
-              </a:spcAft>
-            </a:pPr>
-            <a:r>
-              <a:rPr sz="2400" b="1">
-                <a:solidFill>
-                  <a:srgbClr val="991B1B"/>
-                </a:solidFill>
-                <a:latin typeface="Calibri"/>
-              </a:rPr>
-              <a:t>Nói mỉa tạo tiếng cười châm biếm sâu cay.</a:t>
+              <a:t>TIẾT 7: THỰC HÀNH TIẾNG VIỆT</a:t>
             </a:r>
           </a:p>
         </p:txBody>
@@ -13745,7 +13878,7 @@
                 </a:solidFill>
                 <a:latin typeface="Arial"/>
               </a:rPr>
-              <a:t>HIỆU QUẢ NGHỊCH NGỮ</a:t>
+              <a:t>NHẬN BIẾT NÓI MỈA</a:t>
             </a:r>
           </a:p>
         </p:txBody>
@@ -13863,7 +13996,7 @@
                 </a:solidFill>
                 <a:latin typeface="Calibri"/>
               </a:rPr>
-              <a:t>Phân tích hiệu quả nghệ thuật của nghịch ngữ: “Đá ở đây từ ngàn năm vẫn mai phục hết trong lòng sông…” (Người lái đò Sông Đà).</a:t>
+              <a:t>Xác định nói mỉa và phân tích hiệu quả: “Công chúng luôn luôn vỗ tay hoan hô Xuân, còn trên khán đài, đức vua Xiêm đã lộ ra mặt rồng tất cả sự thịnh nộ…” (Số đỏ).</a:t>
             </a:r>
           </a:p>
         </p:txBody>
@@ -13950,7 +14083,7 @@
                 </a:solidFill>
                 <a:latin typeface="Calibri"/>
               </a:rPr>
-              <a:t>💡 “Mai phục” thường dùng cho đối tượng nào?</a:t>
+              <a:t>💡 Hiển ngôn trang trọng – hàm ngôn là gì?</a:t>
             </a:r>
           </a:p>
         </p:txBody>
@@ -14107,7 +14240,7 @@
                 </a:solidFill>
                 <a:latin typeface="Arial"/>
               </a:rPr>
-              <a:t>HIỆU QUẢ NGHỊCH NGỮ</a:t>
+              <a:t>NHẬN BIẾT NÓI MỈA</a:t>
             </a:r>
           </a:p>
         </p:txBody>
@@ -14230,7 +14363,7 @@
                 </a:solidFill>
                 <a:latin typeface="Calibri"/>
               </a:rPr>
-              <a:t>“Mai phục” – hành động của kẻ thù phục kích.</a:t>
+              <a:t>Hiển ngôn: “mặt rồng”, “thiên tử thế thiên hành đạo” – trang trọng.</a:t>
             </a:r>
           </a:p>
           <a:p>
@@ -14251,7 +14384,7 @@
                 </a:solidFill>
                 <a:latin typeface="Calibri"/>
               </a:rPr>
-              <a:t>Đá được nhân hoá thành “kẻ thù” nham hiểm.</a:t>
+              <a:t>Hàm ngôn: giễu cợt sự thịnh nộ vô lối của vua Xiêm.</a:t>
             </a:r>
           </a:p>
           <a:p>
@@ -14272,7 +14405,7 @@
                 </a:solidFill>
                 <a:latin typeface="Calibri"/>
               </a:rPr>
-              <a:t>Tô đậm sự hung bạo của sông Đà.</a:t>
+              <a:t>“cái nước có hàng triệu con voi” – tương phản, gây cười.</a:t>
             </a:r>
           </a:p>
         </p:txBody>
@@ -14359,7 +14492,7 @@
                 </a:solidFill>
                 <a:latin typeface="Calibri"/>
               </a:rPr>
-              <a:t>Nghịch ngữ làm nổi bật tính chất của đối tượng.</a:t>
+              <a:t>Nói mỉa tạo tiếng cười châm biếm sâu cay.</a:t>
             </a:r>
           </a:p>
         </p:txBody>
@@ -14378,7 +14511,7 @@
     <p:bg>
       <p:bgPr>
         <a:solidFill>
-          <a:srgbClr val="F8F9FA"/>
+          <a:srgbClr val="FFFFFF"/>
         </a:solidFill>
         <a:effectLst/>
       </p:bgPr>
@@ -14398,14 +14531,14 @@
         </p:nvSpPr>
         <p:spPr>
           <a:xfrm>
-            <a:off x="548640" y="2926080"/>
-            <a:ext cx="164592" cy="1005840"/>
+            <a:off x="457200" y="384048"/>
+            <a:ext cx="109728" cy="658368"/>
           </a:xfrm>
           <a:prstGeom prst="rect">
             <a:avLst/>
           </a:prstGeom>
           <a:solidFill>
-            <a:srgbClr val="991B1B"/>
+            <a:srgbClr val="1E40AF"/>
           </a:solidFill>
           <a:ln>
             <a:noFill/>
@@ -14436,14 +14569,67 @@
       </p:sp>
       <p:sp>
         <p:nvSpPr>
-          <p:cNvPr id="3" name="TextBox 2"/>
+          <p:cNvPr id="3" name="Rounded Rectangle 2"/>
+          <p:cNvSpPr/>
+          <p:nvPr/>
+        </p:nvSpPr>
+        <p:spPr>
+          <a:xfrm>
+            <a:off x="10253167" y="457200"/>
+            <a:ext cx="1389888" cy="457200"/>
+          </a:xfrm>
+          <a:prstGeom prst="roundRect">
+            <a:avLst/>
+          </a:prstGeom>
+          <a:solidFill>
+            <a:srgbClr val="1E40AF"/>
+          </a:solidFill>
+          <a:ln>
+            <a:noFill/>
+          </a:ln>
+          <a:effectLst/>
+        </p:spPr>
+        <p:style>
+          <a:lnRef idx="1">
+            <a:schemeClr val="accent1"/>
+          </a:lnRef>
+          <a:fillRef idx="3">
+            <a:schemeClr val="accent1"/>
+          </a:fillRef>
+          <a:effectRef idx="2">
+            <a:schemeClr val="accent1"/>
+          </a:effectRef>
+          <a:fontRef idx="minor">
+            <a:schemeClr val="lt1"/>
+          </a:fontRef>
+        </p:style>
+        <p:txBody>
+          <a:bodyPr rtlCol="0" anchor="ctr" wrap="none" tIns="0" bIns="0"/>
+          <a:lstStyle/>
+          <a:p>
+            <a:pPr algn="ctr"/>
+            <a:r>
+              <a:rPr sz="1400" b="1">
+                <a:solidFill>
+                  <a:srgbClr val="FFFFFF"/>
+                </a:solidFill>
+                <a:latin typeface="Arial"/>
+              </a:rPr>
+              <a:t>ĐỀ BÀI</a:t>
+            </a:r>
+          </a:p>
+        </p:txBody>
+      </p:sp>
+      <p:sp>
+        <p:nvSpPr>
+          <p:cNvPr id="4" name="TextBox 3"/>
           <p:cNvSpPr txBox="1"/>
           <p:nvPr/>
         </p:nvSpPr>
         <p:spPr>
           <a:xfrm>
-            <a:off x="914400" y="2743200"/>
-            <a:ext cx="10515600" cy="1371600"/>
+            <a:off x="731520" y="274320"/>
+            <a:ext cx="9582912" cy="868680"/>
           </a:xfrm>
           <a:prstGeom prst="rect">
             <a:avLst/>
@@ -14451,7 +14637,120 @@
           <a:noFill/>
         </p:spPr>
         <p:txBody>
-          <a:bodyPr wrap="square" anchor="ctr" lIns="45720" rIns="45720">
+          <a:bodyPr wrap="square" anchor="ctr">
+            <a:spAutoFit/>
+          </a:bodyPr>
+          <a:lstStyle/>
+          <a:p>
+            <a:r>
+              <a:rPr sz="3600" b="1">
+                <a:solidFill>
+                  <a:srgbClr val="1E40AF"/>
+                </a:solidFill>
+                <a:latin typeface="Arial"/>
+              </a:rPr>
+              <a:t>HIỆU QUẢ NGHỊCH NGỮ</a:t>
+            </a:r>
+          </a:p>
+        </p:txBody>
+      </p:sp>
+      <p:sp>
+        <p:nvSpPr>
+          <p:cNvPr id="5" name="Rectangle 4"/>
+          <p:cNvSpPr/>
+          <p:nvPr/>
+        </p:nvSpPr>
+        <p:spPr>
+          <a:xfrm>
+            <a:off x="457200" y="1207008"/>
+            <a:ext cx="11274552" cy="22000"/>
+          </a:xfrm>
+          <a:prstGeom prst="rect">
+            <a:avLst/>
+          </a:prstGeom>
+          <a:solidFill>
+            <a:srgbClr val="E2E8F0"/>
+          </a:solidFill>
+          <a:ln>
+            <a:noFill/>
+          </a:ln>
+          <a:effectLst/>
+        </p:spPr>
+        <p:style>
+          <a:lnRef idx="1">
+            <a:schemeClr val="accent1"/>
+          </a:lnRef>
+          <a:fillRef idx="3">
+            <a:schemeClr val="accent1"/>
+          </a:fillRef>
+          <a:effectRef idx="2">
+            <a:schemeClr val="accent1"/>
+          </a:effectRef>
+          <a:fontRef idx="minor">
+            <a:schemeClr val="lt1"/>
+          </a:fontRef>
+        </p:style>
+        <p:txBody>
+          <a:bodyPr rtlCol="0" anchor="ctr"/>
+          <a:lstStyle/>
+          <a:p>
+            <a:pPr algn="ctr"/>
+          </a:p>
+        </p:txBody>
+      </p:sp>
+      <p:sp>
+        <p:nvSpPr>
+          <p:cNvPr id="6" name="TextBox 5"/>
+          <p:cNvSpPr txBox="1"/>
+          <p:nvPr/>
+        </p:nvSpPr>
+        <p:spPr>
+          <a:xfrm>
+            <a:off x="457200" y="6355080"/>
+            <a:ext cx="11274552" cy="365760"/>
+          </a:xfrm>
+          <a:prstGeom prst="rect">
+            <a:avLst/>
+          </a:prstGeom>
+          <a:noFill/>
+        </p:spPr>
+        <p:txBody>
+          <a:bodyPr wrap="none">
+            <a:spAutoFit/>
+          </a:bodyPr>
+          <a:lstStyle/>
+          <a:p>
+            <a:pPr algn="r"/>
+            <a:r>
+              <a:rPr sz="1200">
+                <a:solidFill>
+                  <a:srgbClr val="64748B"/>
+                </a:solidFill>
+                <a:latin typeface="Calibri"/>
+              </a:rPr>
+              <a:t>Ngữ văn 12 · Bài 1: Khả Năng Lớn Lao Của Tiểu Thuyết          33</a:t>
+            </a:r>
+          </a:p>
+        </p:txBody>
+      </p:sp>
+      <p:sp>
+        <p:nvSpPr>
+          <p:cNvPr id="7" name="TextBox 6"/>
+          <p:cNvSpPr txBox="1"/>
+          <p:nvPr/>
+        </p:nvSpPr>
+        <p:spPr>
+          <a:xfrm>
+            <a:off x="731520" y="1463040"/>
+            <a:ext cx="10789920" cy="3566160"/>
+          </a:xfrm>
+          <a:prstGeom prst="rect">
+            <a:avLst/>
+          </a:prstGeom>
+          <a:noFill/>
+        </p:spPr>
+        <p:txBody>
+          <a:bodyPr wrap="square" anchor="t" lIns="45720" rIns="45720">
             <a:spAutoFit/>
           </a:bodyPr>
           <a:lstStyle/>
@@ -14462,13 +14761,100 @@
               </a:spcAft>
             </a:pPr>
             <a:r>
-              <a:rPr sz="3600" b="1">
+              <a:rPr sz="2600" b="1">
+                <a:solidFill>
+                  <a:srgbClr val="1E293B"/>
+                </a:solidFill>
+                <a:latin typeface="Calibri"/>
+              </a:rPr>
+              <a:t>Phân tích hiệu quả nghệ thuật của nghịch ngữ: “Đá ở đây từ ngàn năm vẫn mai phục hết trong lòng sông…” (Người lái đò Sông Đà).</a:t>
+            </a:r>
+          </a:p>
+        </p:txBody>
+      </p:sp>
+      <p:sp>
+        <p:nvSpPr>
+          <p:cNvPr id="8" name="Rounded Rectangle 7"/>
+          <p:cNvSpPr/>
+          <p:nvPr/>
+        </p:nvSpPr>
+        <p:spPr>
+          <a:xfrm>
+            <a:off x="731520" y="5120640"/>
+            <a:ext cx="10789920" cy="693420"/>
+          </a:xfrm>
+          <a:prstGeom prst="roundRect">
+            <a:avLst>
+              <a:gd name="adj" fmla="val 8000"/>
+            </a:avLst>
+          </a:prstGeom>
+          <a:solidFill>
+            <a:srgbClr val="EFF4FF"/>
+          </a:solidFill>
+          <a:ln w="19050">
+            <a:solidFill>
+              <a:srgbClr val="1E40AF"/>
+            </a:solidFill>
+          </a:ln>
+          <a:effectLst/>
+        </p:spPr>
+        <p:style>
+          <a:lnRef idx="1">
+            <a:schemeClr val="accent1"/>
+          </a:lnRef>
+          <a:fillRef idx="3">
+            <a:schemeClr val="accent1"/>
+          </a:fillRef>
+          <a:effectRef idx="2">
+            <a:schemeClr val="accent1"/>
+          </a:effectRef>
+          <a:fontRef idx="minor">
+            <a:schemeClr val="lt1"/>
+          </a:fontRef>
+        </p:style>
+        <p:txBody>
+          <a:bodyPr rtlCol="0" anchor="ctr"/>
+          <a:lstStyle/>
+          <a:p>
+            <a:pPr algn="ctr"/>
+          </a:p>
+        </p:txBody>
+      </p:sp>
+      <p:sp>
+        <p:nvSpPr>
+          <p:cNvPr id="9" name="TextBox 8"/>
+          <p:cNvSpPr txBox="1"/>
+          <p:nvPr/>
+        </p:nvSpPr>
+        <p:spPr>
+          <a:xfrm>
+            <a:off x="914400" y="5120640"/>
+            <a:ext cx="10424160" cy="693420"/>
+          </a:xfrm>
+          <a:prstGeom prst="rect">
+            <a:avLst/>
+          </a:prstGeom>
+          <a:noFill/>
+        </p:spPr>
+        <p:txBody>
+          <a:bodyPr wrap="square" anchor="ctr" lIns="45720" rIns="45720">
+            <a:spAutoFit/>
+          </a:bodyPr>
+          <a:lstStyle/>
+          <a:p>
+            <a:pPr algn="l">
+              <a:spcAft>
+                <a:spcPts val="400"/>
+              </a:spcAft>
+            </a:pPr>
+            <a:r>
+              <a:rPr sz="2200" b="1">
                 <a:solidFill>
                   <a:srgbClr val="1E40AF"/>
                 </a:solidFill>
                 <a:latin typeface="Calibri"/>
               </a:rPr>
-              <a:t>TIẾT 8 – 11: VIẾT – NÓI VÀ NGHE</a:t>
+              <a:t>💡 “Mai phục” thường dùng cho đối tượng nào?</a:t>
             </a:r>
           </a:p>
         </p:txBody>
@@ -14551,14 +14937,14 @@
         </p:nvSpPr>
         <p:spPr>
           <a:xfrm>
-            <a:off x="10097719" y="457200"/>
-            <a:ext cx="1545336" cy="457200"/>
+            <a:off x="9942271" y="457200"/>
+            <a:ext cx="1700784" cy="457200"/>
           </a:xfrm>
           <a:prstGeom prst="roundRect">
             <a:avLst/>
           </a:prstGeom>
           <a:solidFill>
-            <a:srgbClr val="166534"/>
+            <a:srgbClr val="991B1B"/>
           </a:solidFill>
           <a:ln>
             <a:noFill/>
@@ -14591,7 +14977,7 @@
                 </a:solidFill>
                 <a:latin typeface="Arial"/>
               </a:rPr>
-              <a:t>GHI NHỚ</a:t>
+              <a:t>LỜI GIẢI</a:t>
             </a:r>
           </a:p>
         </p:txBody>
@@ -14605,7 +14991,7 @@
         <p:spPr>
           <a:xfrm>
             <a:off x="731520" y="274320"/>
-            <a:ext cx="9427464" cy="868680"/>
+            <a:ext cx="9272016" cy="868680"/>
           </a:xfrm>
           <a:prstGeom prst="rect">
             <a:avLst/>
@@ -14625,7 +15011,7 @@
                 </a:solidFill>
                 <a:latin typeface="Arial"/>
               </a:rPr>
-              <a:t>YÊU CẦU BÀI VĂN SO SÁNH, ĐÁNH GIÁ</a:t>
+              <a:t>HIỆU QUẢ NGHỊCH NGỮ</a:t>
             </a:r>
           </a:p>
         </p:txBody>
@@ -14718,7 +15104,7 @@
         <p:spPr>
           <a:xfrm>
             <a:off x="731520" y="1463040"/>
-            <a:ext cx="10789920" cy="4754880"/>
+            <a:ext cx="10789920" cy="3474720"/>
           </a:xfrm>
           <a:prstGeom prst="rect">
             <a:avLst/>
@@ -14742,13 +15128,13 @@
               <a:buChar char="•"/>
             </a:pPr>
             <a:r>
-              <a:rPr sz="2400">
+              <a:rPr sz="2300">
                 <a:solidFill>
                   <a:srgbClr val="1E293B"/>
                 </a:solidFill>
                 <a:latin typeface="Calibri"/>
               </a:rPr>
-              <a:t>Nêu mục đích và cơ sở so sánh.</a:t>
+              <a:t>“Mai phục” – hành động của kẻ thù phục kích.</a:t>
             </a:r>
           </a:p>
           <a:p>
@@ -14763,13 +15149,13 @@
               <a:buChar char="•"/>
             </a:pPr>
             <a:r>
-              <a:rPr sz="2400">
+              <a:rPr sz="2300">
                 <a:solidFill>
                   <a:srgbClr val="1E293B"/>
                 </a:solidFill>
                 <a:latin typeface="Calibri"/>
               </a:rPr>
-              <a:t>Thông tin khái quát về hai tác phẩm.</a:t>
+              <a:t>Đá được nhân hoá thành “kẻ thù” nham hiểm.</a:t>
             </a:r>
           </a:p>
           <a:p>
@@ -14784,34 +15170,100 @@
               <a:buChar char="•"/>
             </a:pPr>
             <a:r>
-              <a:rPr sz="2400">
+              <a:rPr sz="2300">
                 <a:solidFill>
                   <a:srgbClr val="1E293B"/>
                 </a:solidFill>
                 <a:latin typeface="Calibri"/>
               </a:rPr>
-              <a:t>Điểm tương đồng và khác biệt trên một số phương diện.</a:t>
-            </a:r>
-          </a:p>
-          <a:p>
-            <a:pPr algn="l" marL="365760" indent="-365760">
+              <a:t>Tô đậm sự hung bạo của sông Đà.</a:t>
+            </a:r>
+          </a:p>
+        </p:txBody>
+      </p:sp>
+      <p:sp>
+        <p:nvSpPr>
+          <p:cNvPr id="8" name="Rounded Rectangle 7"/>
+          <p:cNvSpPr/>
+          <p:nvPr/>
+        </p:nvSpPr>
+        <p:spPr>
+          <a:xfrm>
+            <a:off x="731520" y="5074920"/>
+            <a:ext cx="10789920" cy="731520"/>
+          </a:xfrm>
+          <a:prstGeom prst="roundRect">
+            <a:avLst>
+              <a:gd name="adj" fmla="val 8000"/>
+            </a:avLst>
+          </a:prstGeom>
+          <a:solidFill>
+            <a:srgbClr val="FEF2F2"/>
+          </a:solidFill>
+          <a:ln w="19050">
+            <a:solidFill>
+              <a:srgbClr val="991B1B"/>
+            </a:solidFill>
+          </a:ln>
+          <a:effectLst/>
+        </p:spPr>
+        <p:style>
+          <a:lnRef idx="1">
+            <a:schemeClr val="accent1"/>
+          </a:lnRef>
+          <a:fillRef idx="3">
+            <a:schemeClr val="accent1"/>
+          </a:fillRef>
+          <a:effectRef idx="2">
+            <a:schemeClr val="accent1"/>
+          </a:effectRef>
+          <a:fontRef idx="minor">
+            <a:schemeClr val="lt1"/>
+          </a:fontRef>
+        </p:style>
+        <p:txBody>
+          <a:bodyPr rtlCol="0" anchor="ctr"/>
+          <a:lstStyle/>
+          <a:p>
+            <a:pPr algn="ctr"/>
+          </a:p>
+        </p:txBody>
+      </p:sp>
+      <p:sp>
+        <p:nvSpPr>
+          <p:cNvPr id="9" name="TextBox 8"/>
+          <p:cNvSpPr txBox="1"/>
+          <p:nvPr/>
+        </p:nvSpPr>
+        <p:spPr>
+          <a:xfrm>
+            <a:off x="914400" y="5074920"/>
+            <a:ext cx="10424160" cy="731520"/>
+          </a:xfrm>
+          <a:prstGeom prst="rect">
+            <a:avLst/>
+          </a:prstGeom>
+          <a:noFill/>
+        </p:spPr>
+        <p:txBody>
+          <a:bodyPr wrap="square" anchor="ctr" lIns="45720" rIns="45720">
+            <a:spAutoFit/>
+          </a:bodyPr>
+          <a:lstStyle/>
+          <a:p>
+            <a:pPr algn="l">
               <a:spcAft>
-                <a:spcPts val="800"/>
+                <a:spcPts val="400"/>
               </a:spcAft>
-              <a:buClr>
-                <a:srgbClr val="1E40AF"/>
-              </a:buClr>
-              <a:buFont typeface="Arial"/>
-              <a:buChar char="•"/>
             </a:pPr>
             <a:r>
-              <a:rPr sz="2400">
-                <a:solidFill>
-                  <a:srgbClr val="1E293B"/>
+              <a:rPr sz="2400" b="1">
+                <a:solidFill>
+                  <a:srgbClr val="991B1B"/>
                 </a:solidFill>
                 <a:latin typeface="Calibri"/>
               </a:rPr>
-              <a:t>Nhận xét, đánh giá; ý nghĩa của việc so sánh.</a:t>
+              <a:t>Nghịch ngữ làm nổi bật tính chất của đối tượng.</a:t>
             </a:r>
           </a:p>
         </p:txBody>
@@ -14830,7 +15282,7 @@
     <p:bg>
       <p:bgPr>
         <a:solidFill>
-          <a:srgbClr val="FFFFFF"/>
+          <a:srgbClr val="F8F9FA"/>
         </a:solidFill>
         <a:effectLst/>
       </p:bgPr>
@@ -14850,14 +15302,14 @@
         </p:nvSpPr>
         <p:spPr>
           <a:xfrm>
-            <a:off x="457200" y="384048"/>
-            <a:ext cx="109728" cy="658368"/>
+            <a:off x="548640" y="2926080"/>
+            <a:ext cx="164592" cy="1005840"/>
           </a:xfrm>
           <a:prstGeom prst="rect">
             <a:avLst/>
           </a:prstGeom>
           <a:solidFill>
-            <a:srgbClr val="1E40AF"/>
+            <a:srgbClr val="991B1B"/>
           </a:solidFill>
           <a:ln>
             <a:noFill/>
@@ -14888,67 +15340,14 @@
       </p:sp>
       <p:sp>
         <p:nvSpPr>
-          <p:cNvPr id="3" name="Rounded Rectangle 2"/>
-          <p:cNvSpPr/>
-          <p:nvPr/>
-        </p:nvSpPr>
-        <p:spPr>
-          <a:xfrm>
-            <a:off x="10253167" y="457200"/>
-            <a:ext cx="1389888" cy="457200"/>
-          </a:xfrm>
-          <a:prstGeom prst="roundRect">
-            <a:avLst/>
-          </a:prstGeom>
-          <a:solidFill>
-            <a:srgbClr val="1E40AF"/>
-          </a:solidFill>
-          <a:ln>
-            <a:noFill/>
-          </a:ln>
-          <a:effectLst/>
-        </p:spPr>
-        <p:style>
-          <a:lnRef idx="1">
-            <a:schemeClr val="accent1"/>
-          </a:lnRef>
-          <a:fillRef idx="3">
-            <a:schemeClr val="accent1"/>
-          </a:fillRef>
-          <a:effectRef idx="2">
-            <a:schemeClr val="accent1"/>
-          </a:effectRef>
-          <a:fontRef idx="minor">
-            <a:schemeClr val="lt1"/>
-          </a:fontRef>
-        </p:style>
-        <p:txBody>
-          <a:bodyPr rtlCol="0" anchor="ctr" wrap="none" tIns="0" bIns="0"/>
-          <a:lstStyle/>
-          <a:p>
-            <a:pPr algn="ctr"/>
-            <a:r>
-              <a:rPr sz="1400" b="1">
-                <a:solidFill>
-                  <a:srgbClr val="FFFFFF"/>
-                </a:solidFill>
-                <a:latin typeface="Arial"/>
-              </a:rPr>
-              <a:t>ĐỀ BÀI</a:t>
-            </a:r>
-          </a:p>
-        </p:txBody>
-      </p:sp>
-      <p:sp>
-        <p:nvSpPr>
-          <p:cNvPr id="4" name="TextBox 3"/>
+          <p:cNvPr id="3" name="TextBox 2"/>
           <p:cNvSpPr txBox="1"/>
           <p:nvPr/>
         </p:nvSpPr>
         <p:spPr>
           <a:xfrm>
-            <a:off x="731520" y="274320"/>
-            <a:ext cx="9582912" cy="868680"/>
+            <a:off x="914400" y="2743200"/>
+            <a:ext cx="10515600" cy="1371600"/>
           </a:xfrm>
           <a:prstGeom prst="rect">
             <a:avLst/>
@@ -14956,120 +15355,7 @@
           <a:noFill/>
         </p:spPr>
         <p:txBody>
-          <a:bodyPr wrap="square" anchor="ctr">
-            <a:spAutoFit/>
-          </a:bodyPr>
-          <a:lstStyle/>
-          <a:p>
-            <a:r>
-              <a:rPr sz="3600" b="1">
-                <a:solidFill>
-                  <a:srgbClr val="1E40AF"/>
-                </a:solidFill>
-                <a:latin typeface="Arial"/>
-              </a:rPr>
-              <a:t>ĐỀ THỰC HÀNH VIẾT</a:t>
-            </a:r>
-          </a:p>
-        </p:txBody>
-      </p:sp>
-      <p:sp>
-        <p:nvSpPr>
-          <p:cNvPr id="5" name="Rectangle 4"/>
-          <p:cNvSpPr/>
-          <p:nvPr/>
-        </p:nvSpPr>
-        <p:spPr>
-          <a:xfrm>
-            <a:off x="457200" y="1207008"/>
-            <a:ext cx="11274552" cy="22000"/>
-          </a:xfrm>
-          <a:prstGeom prst="rect">
-            <a:avLst/>
-          </a:prstGeom>
-          <a:solidFill>
-            <a:srgbClr val="E2E8F0"/>
-          </a:solidFill>
-          <a:ln>
-            <a:noFill/>
-          </a:ln>
-          <a:effectLst/>
-        </p:spPr>
-        <p:style>
-          <a:lnRef idx="1">
-            <a:schemeClr val="accent1"/>
-          </a:lnRef>
-          <a:fillRef idx="3">
-            <a:schemeClr val="accent1"/>
-          </a:fillRef>
-          <a:effectRef idx="2">
-            <a:schemeClr val="accent1"/>
-          </a:effectRef>
-          <a:fontRef idx="minor">
-            <a:schemeClr val="lt1"/>
-          </a:fontRef>
-        </p:style>
-        <p:txBody>
-          <a:bodyPr rtlCol="0" anchor="ctr"/>
-          <a:lstStyle/>
-          <a:p>
-            <a:pPr algn="ctr"/>
-          </a:p>
-        </p:txBody>
-      </p:sp>
-      <p:sp>
-        <p:nvSpPr>
-          <p:cNvPr id="6" name="TextBox 5"/>
-          <p:cNvSpPr txBox="1"/>
-          <p:nvPr/>
-        </p:nvSpPr>
-        <p:spPr>
-          <a:xfrm>
-            <a:off x="457200" y="6355080"/>
-            <a:ext cx="11274552" cy="365760"/>
-          </a:xfrm>
-          <a:prstGeom prst="rect">
-            <a:avLst/>
-          </a:prstGeom>
-          <a:noFill/>
-        </p:spPr>
-        <p:txBody>
-          <a:bodyPr wrap="none">
-            <a:spAutoFit/>
-          </a:bodyPr>
-          <a:lstStyle/>
-          <a:p>
-            <a:pPr algn="r"/>
-            <a:r>
-              <a:rPr sz="1200">
-                <a:solidFill>
-                  <a:srgbClr val="64748B"/>
-                </a:solidFill>
-                <a:latin typeface="Calibri"/>
-              </a:rPr>
-              <a:t>Ngữ văn 12 · Bài 1: Khả Năng Lớn Lao Của Tiểu Thuyết          35</a:t>
-            </a:r>
-          </a:p>
-        </p:txBody>
-      </p:sp>
-      <p:sp>
-        <p:nvSpPr>
-          <p:cNvPr id="7" name="TextBox 6"/>
-          <p:cNvSpPr txBox="1"/>
-          <p:nvPr/>
-        </p:nvSpPr>
-        <p:spPr>
-          <a:xfrm>
-            <a:off x="731520" y="1463040"/>
-            <a:ext cx="10789920" cy="3566160"/>
-          </a:xfrm>
-          <a:prstGeom prst="rect">
-            <a:avLst/>
-          </a:prstGeom>
-          <a:noFill/>
-        </p:spPr>
-        <p:txBody>
-          <a:bodyPr wrap="square" anchor="t" lIns="45720" rIns="45720">
+          <a:bodyPr wrap="square" anchor="ctr" lIns="45720" rIns="45720">
             <a:spAutoFit/>
           </a:bodyPr>
           <a:lstStyle/>
@@ -15080,100 +15366,13 @@
               </a:spcAft>
             </a:pPr>
             <a:r>
-              <a:rPr sz="2600" b="1">
-                <a:solidFill>
-                  <a:srgbClr val="1E293B"/>
+              <a:rPr sz="3600" b="1">
+                <a:solidFill>
+                  <a:srgbClr val="1E40AF"/>
                 </a:solidFill>
                 <a:latin typeface="Calibri"/>
               </a:rPr>
-              <a:t>So sánh, đánh giá hai truyện ngắn Vợ nhặt (Kim Lân) và Chí Phèo (Nam Cao) ở phương diện số phận người nông dân và cách kết thúc tác phẩm.</a:t>
-            </a:r>
-          </a:p>
-        </p:txBody>
-      </p:sp>
-      <p:sp>
-        <p:nvSpPr>
-          <p:cNvPr id="8" name="Rounded Rectangle 7"/>
-          <p:cNvSpPr/>
-          <p:nvPr/>
-        </p:nvSpPr>
-        <p:spPr>
-          <a:xfrm>
-            <a:off x="731520" y="5120640"/>
-            <a:ext cx="10789920" cy="693420"/>
-          </a:xfrm>
-          <a:prstGeom prst="roundRect">
-            <a:avLst>
-              <a:gd name="adj" fmla="val 8000"/>
-            </a:avLst>
-          </a:prstGeom>
-          <a:solidFill>
-            <a:srgbClr val="EFF4FF"/>
-          </a:solidFill>
-          <a:ln w="19050">
-            <a:solidFill>
-              <a:srgbClr val="1E40AF"/>
-            </a:solidFill>
-          </a:ln>
-          <a:effectLst/>
-        </p:spPr>
-        <p:style>
-          <a:lnRef idx="1">
-            <a:schemeClr val="accent1"/>
-          </a:lnRef>
-          <a:fillRef idx="3">
-            <a:schemeClr val="accent1"/>
-          </a:fillRef>
-          <a:effectRef idx="2">
-            <a:schemeClr val="accent1"/>
-          </a:effectRef>
-          <a:fontRef idx="minor">
-            <a:schemeClr val="lt1"/>
-          </a:fontRef>
-        </p:style>
-        <p:txBody>
-          <a:bodyPr rtlCol="0" anchor="ctr"/>
-          <a:lstStyle/>
-          <a:p>
-            <a:pPr algn="ctr"/>
-          </a:p>
-        </p:txBody>
-      </p:sp>
-      <p:sp>
-        <p:nvSpPr>
-          <p:cNvPr id="9" name="TextBox 8"/>
-          <p:cNvSpPr txBox="1"/>
-          <p:nvPr/>
-        </p:nvSpPr>
-        <p:spPr>
-          <a:xfrm>
-            <a:off x="914400" y="5120640"/>
-            <a:ext cx="10424160" cy="693420"/>
-          </a:xfrm>
-          <a:prstGeom prst="rect">
-            <a:avLst/>
-          </a:prstGeom>
-          <a:noFill/>
-        </p:spPr>
-        <p:txBody>
-          <a:bodyPr wrap="square" anchor="ctr" lIns="45720" rIns="45720">
-            <a:spAutoFit/>
-          </a:bodyPr>
-          <a:lstStyle/>
-          <a:p>
-            <a:pPr algn="l">
-              <a:spcAft>
-                <a:spcPts val="400"/>
-              </a:spcAft>
-            </a:pPr>
-            <a:r>
-              <a:rPr sz="2200" b="1">
-                <a:solidFill>
-                  <a:srgbClr val="1E40AF"/>
-                </a:solidFill>
-                <a:latin typeface="Calibri"/>
-              </a:rPr>
-              <a:t>💡 Lập bảng: phương diện – truyện A – truyện B – nhận xét.</a:t>
+              <a:t>TIẾT 8 – 11: VIẾT – NÓI VÀ NGHE</a:t>
             </a:r>
           </a:p>
         </p:txBody>
@@ -15256,14 +15455,14 @@
         </p:nvSpPr>
         <p:spPr>
           <a:xfrm>
-            <a:off x="9942271" y="457200"/>
-            <a:ext cx="1700784" cy="457200"/>
+            <a:off x="10097719" y="457200"/>
+            <a:ext cx="1545336" cy="457200"/>
           </a:xfrm>
           <a:prstGeom prst="roundRect">
             <a:avLst/>
           </a:prstGeom>
           <a:solidFill>
-            <a:srgbClr val="991B1B"/>
+            <a:srgbClr val="166534"/>
           </a:solidFill>
           <a:ln>
             <a:noFill/>
@@ -15296,7 +15495,7 @@
                 </a:solidFill>
                 <a:latin typeface="Arial"/>
               </a:rPr>
-              <a:t>LỜI GIẢI</a:t>
+              <a:t>GHI NHỚ</a:t>
             </a:r>
           </a:p>
         </p:txBody>
@@ -15310,7 +15509,7 @@
         <p:spPr>
           <a:xfrm>
             <a:off x="731520" y="274320"/>
-            <a:ext cx="9272016" cy="868680"/>
+            <a:ext cx="9427464" cy="868680"/>
           </a:xfrm>
           <a:prstGeom prst="rect">
             <a:avLst/>
@@ -15330,7 +15529,7 @@
                 </a:solidFill>
                 <a:latin typeface="Arial"/>
               </a:rPr>
-              <a:t>ĐỀ THỰC HÀNH VIẾT</a:t>
+              <a:t>YÊU CẦU BÀI VĂN SO SÁNH, ĐÁNH GIÁ</a:t>
             </a:r>
           </a:p>
         </p:txBody>
@@ -15423,7 +15622,7 @@
         <p:spPr>
           <a:xfrm>
             <a:off x="731520" y="1463040"/>
-            <a:ext cx="10789920" cy="3474720"/>
+            <a:ext cx="10789920" cy="4754880"/>
           </a:xfrm>
           <a:prstGeom prst="rect">
             <a:avLst/>
@@ -15447,13 +15646,13 @@
               <a:buChar char="•"/>
             </a:pPr>
             <a:r>
-              <a:rPr sz="2300">
+              <a:rPr sz="2400">
                 <a:solidFill>
                   <a:srgbClr val="1E293B"/>
                 </a:solidFill>
                 <a:latin typeface="Calibri"/>
               </a:rPr>
-              <a:t>Tương đồng: người nông dân ở đáy xã hội, khát vọng sống, khát vọng làm người.</a:t>
+              <a:t>Nêu mục đích và cơ sở so sánh.</a:t>
             </a:r>
           </a:p>
           <a:p>
@@ -15468,13 +15667,13 @@
               <a:buChar char="•"/>
             </a:pPr>
             <a:r>
-              <a:rPr sz="2300">
+              <a:rPr sz="2400">
                 <a:solidFill>
                   <a:srgbClr val="1E293B"/>
                 </a:solidFill>
                 <a:latin typeface="Calibri"/>
               </a:rPr>
-              <a:t>Khác biệt: kết bi kịch, vòng luẩn quẩn ↔ kết mở, lá cờ đỏ.</a:t>
+              <a:t>Thông tin khái quát về hai tác phẩm.</a:t>
             </a:r>
           </a:p>
           <a:p>
@@ -15489,13 +15688,13 @@
               <a:buChar char="•"/>
             </a:pPr>
             <a:r>
-              <a:rPr sz="2300">
+              <a:rPr sz="2400">
                 <a:solidFill>
                   <a:srgbClr val="1E293B"/>
                 </a:solidFill>
                 <a:latin typeface="Calibri"/>
               </a:rPr>
-              <a:t>Nguyên nhân: thời điểm sáng tác, quan điểm nghệ thuật.</a:t>
+              <a:t>Điểm tương đồng và khác biệt trên một số phương diện.</a:t>
             </a:r>
           </a:p>
           <a:p>
@@ -15510,100 +15709,13 @@
               <a:buChar char="•"/>
             </a:pPr>
             <a:r>
-              <a:rPr sz="2300">
+              <a:rPr sz="2400">
                 <a:solidFill>
                   <a:srgbClr val="1E293B"/>
                 </a:solidFill>
                 <a:latin typeface="Calibri"/>
               </a:rPr>
-              <a:t>Đánh giá giá trị riêng của mỗi tác phẩm.</a:t>
-            </a:r>
-          </a:p>
-        </p:txBody>
-      </p:sp>
-      <p:sp>
-        <p:nvSpPr>
-          <p:cNvPr id="8" name="Rounded Rectangle 7"/>
-          <p:cNvSpPr/>
-          <p:nvPr/>
-        </p:nvSpPr>
-        <p:spPr>
-          <a:xfrm>
-            <a:off x="731520" y="5074920"/>
-            <a:ext cx="10789920" cy="731520"/>
-          </a:xfrm>
-          <a:prstGeom prst="roundRect">
-            <a:avLst>
-              <a:gd name="adj" fmla="val 8000"/>
-            </a:avLst>
-          </a:prstGeom>
-          <a:solidFill>
-            <a:srgbClr val="FEF2F2"/>
-          </a:solidFill>
-          <a:ln w="19050">
-            <a:solidFill>
-              <a:srgbClr val="991B1B"/>
-            </a:solidFill>
-          </a:ln>
-          <a:effectLst/>
-        </p:spPr>
-        <p:style>
-          <a:lnRef idx="1">
-            <a:schemeClr val="accent1"/>
-          </a:lnRef>
-          <a:fillRef idx="3">
-            <a:schemeClr val="accent1"/>
-          </a:fillRef>
-          <a:effectRef idx="2">
-            <a:schemeClr val="accent1"/>
-          </a:effectRef>
-          <a:fontRef idx="minor">
-            <a:schemeClr val="lt1"/>
-          </a:fontRef>
-        </p:style>
-        <p:txBody>
-          <a:bodyPr rtlCol="0" anchor="ctr"/>
-          <a:lstStyle/>
-          <a:p>
-            <a:pPr algn="ctr"/>
-          </a:p>
-        </p:txBody>
-      </p:sp>
-      <p:sp>
-        <p:nvSpPr>
-          <p:cNvPr id="9" name="TextBox 8"/>
-          <p:cNvSpPr txBox="1"/>
-          <p:nvPr/>
-        </p:nvSpPr>
-        <p:spPr>
-          <a:xfrm>
-            <a:off x="914400" y="5074920"/>
-            <a:ext cx="10424160" cy="731520"/>
-          </a:xfrm>
-          <a:prstGeom prst="rect">
-            <a:avLst/>
-          </a:prstGeom>
-          <a:noFill/>
-        </p:spPr>
-        <p:txBody>
-          <a:bodyPr wrap="square" anchor="ctr" lIns="45720" rIns="45720">
-            <a:spAutoFit/>
-          </a:bodyPr>
-          <a:lstStyle/>
-          <a:p>
-            <a:pPr algn="l">
-              <a:spcAft>
-                <a:spcPts val="400"/>
-              </a:spcAft>
-            </a:pPr>
-            <a:r>
-              <a:rPr sz="2400" b="1">
-                <a:solidFill>
-                  <a:srgbClr val="991B1B"/>
-                </a:solidFill>
-                <a:latin typeface="Calibri"/>
-              </a:rPr>
-              <a:t>Tránh lắp ghép hai bài phân tích riêng rẽ.</a:t>
+              <a:t>Nhận xét, đánh giá; ý nghĩa của việc so sánh.</a:t>
             </a:r>
           </a:p>
         </p:txBody>
@@ -15686,14 +15798,14 @@
         </p:nvSpPr>
         <p:spPr>
           <a:xfrm>
-            <a:off x="10097719" y="457200"/>
-            <a:ext cx="1545336" cy="457200"/>
+            <a:off x="10253167" y="457200"/>
+            <a:ext cx="1389888" cy="457200"/>
           </a:xfrm>
           <a:prstGeom prst="roundRect">
             <a:avLst/>
           </a:prstGeom>
           <a:solidFill>
-            <a:srgbClr val="166534"/>
+            <a:srgbClr val="1E40AF"/>
           </a:solidFill>
           <a:ln>
             <a:noFill/>
@@ -15726,7 +15838,7 @@
                 </a:solidFill>
                 <a:latin typeface="Arial"/>
               </a:rPr>
-              <a:t>CỦNG CỐ</a:t>
+              <a:t>ĐỀ BÀI</a:t>
             </a:r>
           </a:p>
         </p:txBody>
@@ -15740,7 +15852,7 @@
         <p:spPr>
           <a:xfrm>
             <a:off x="731520" y="274320"/>
-            <a:ext cx="9427464" cy="868680"/>
+            <a:ext cx="9582912" cy="868680"/>
           </a:xfrm>
           <a:prstGeom prst="rect">
             <a:avLst/>
@@ -15760,7 +15872,7 @@
                 </a:solidFill>
                 <a:latin typeface="Arial"/>
               </a:rPr>
-              <a:t>SƠ ĐỒ TƯ DUY</a:t>
+              <a:t>ĐỀ THỰC HÀNH VIẾT</a:t>
             </a:r>
           </a:p>
         </p:txBody>
@@ -15844,30 +15956,132 @@
           </a:p>
         </p:txBody>
       </p:sp>
-      <p:pic>
-        <p:nvPicPr>
-          <p:cNvPr id="7" name="Picture 6" descr="SoDoTuDuy_NGUVAN12_Bai1_KhaNangLonLaoCuaTieuThuyet_T1-11.png"/>
-          <p:cNvPicPr>
-            <a:picLocks noChangeAspect="1"/>
-          </p:cNvPicPr>
-          <p:nvPr/>
-        </p:nvPicPr>
-        <p:blipFill>
-          <a:blip r:embed="rId2"/>
-          <a:stretch>
-            <a:fillRect/>
-          </a:stretch>
-        </p:blipFill>
-        <p:spPr>
-          <a:xfrm>
-            <a:off x="1788855" y="1371600"/>
-            <a:ext cx="8675250" cy="4846320"/>
-          </a:xfrm>
-          <a:prstGeom prst="rect">
-            <a:avLst/>
-          </a:prstGeom>
-        </p:spPr>
-      </p:pic>
+      <p:sp>
+        <p:nvSpPr>
+          <p:cNvPr id="7" name="TextBox 6"/>
+          <p:cNvSpPr txBox="1"/>
+          <p:nvPr/>
+        </p:nvSpPr>
+        <p:spPr>
+          <a:xfrm>
+            <a:off x="731520" y="1463040"/>
+            <a:ext cx="10789920" cy="3566160"/>
+          </a:xfrm>
+          <a:prstGeom prst="rect">
+            <a:avLst/>
+          </a:prstGeom>
+          <a:noFill/>
+        </p:spPr>
+        <p:txBody>
+          <a:bodyPr wrap="square" anchor="t" lIns="45720" rIns="45720">
+            <a:spAutoFit/>
+          </a:bodyPr>
+          <a:lstStyle/>
+          <a:p>
+            <a:pPr algn="l">
+              <a:spcAft>
+                <a:spcPts val="800"/>
+              </a:spcAft>
+            </a:pPr>
+            <a:r>
+              <a:rPr sz="2600" b="1">
+                <a:solidFill>
+                  <a:srgbClr val="1E293B"/>
+                </a:solidFill>
+                <a:latin typeface="Calibri"/>
+              </a:rPr>
+              <a:t>So sánh, đánh giá hai truyện ngắn Vợ nhặt (Kim Lân) và Chí Phèo (Nam Cao) ở phương diện số phận người nông dân và cách kết thúc tác phẩm.</a:t>
+            </a:r>
+          </a:p>
+        </p:txBody>
+      </p:sp>
+      <p:sp>
+        <p:nvSpPr>
+          <p:cNvPr id="8" name="Rounded Rectangle 7"/>
+          <p:cNvSpPr/>
+          <p:nvPr/>
+        </p:nvSpPr>
+        <p:spPr>
+          <a:xfrm>
+            <a:off x="731520" y="5120640"/>
+            <a:ext cx="10789920" cy="693420"/>
+          </a:xfrm>
+          <a:prstGeom prst="roundRect">
+            <a:avLst>
+              <a:gd name="adj" fmla="val 8000"/>
+            </a:avLst>
+          </a:prstGeom>
+          <a:solidFill>
+            <a:srgbClr val="EFF4FF"/>
+          </a:solidFill>
+          <a:ln w="19050">
+            <a:solidFill>
+              <a:srgbClr val="1E40AF"/>
+            </a:solidFill>
+          </a:ln>
+          <a:effectLst/>
+        </p:spPr>
+        <p:style>
+          <a:lnRef idx="1">
+            <a:schemeClr val="accent1"/>
+          </a:lnRef>
+          <a:fillRef idx="3">
+            <a:schemeClr val="accent1"/>
+          </a:fillRef>
+          <a:effectRef idx="2">
+            <a:schemeClr val="accent1"/>
+          </a:effectRef>
+          <a:fontRef idx="minor">
+            <a:schemeClr val="lt1"/>
+          </a:fontRef>
+        </p:style>
+        <p:txBody>
+          <a:bodyPr rtlCol="0" anchor="ctr"/>
+          <a:lstStyle/>
+          <a:p>
+            <a:pPr algn="ctr"/>
+          </a:p>
+        </p:txBody>
+      </p:sp>
+      <p:sp>
+        <p:nvSpPr>
+          <p:cNvPr id="9" name="TextBox 8"/>
+          <p:cNvSpPr txBox="1"/>
+          <p:nvPr/>
+        </p:nvSpPr>
+        <p:spPr>
+          <a:xfrm>
+            <a:off x="914400" y="5120640"/>
+            <a:ext cx="10424160" cy="693420"/>
+          </a:xfrm>
+          <a:prstGeom prst="rect">
+            <a:avLst/>
+          </a:prstGeom>
+          <a:noFill/>
+        </p:spPr>
+        <p:txBody>
+          <a:bodyPr wrap="square" anchor="ctr" lIns="45720" rIns="45720">
+            <a:spAutoFit/>
+          </a:bodyPr>
+          <a:lstStyle/>
+          <a:p>
+            <a:pPr algn="l">
+              <a:spcAft>
+                <a:spcPts val="400"/>
+              </a:spcAft>
+            </a:pPr>
+            <a:r>
+              <a:rPr sz="2200" b="1">
+                <a:solidFill>
+                  <a:srgbClr val="1E40AF"/>
+                </a:solidFill>
+                <a:latin typeface="Calibri"/>
+              </a:rPr>
+              <a:t>💡 Lập bảng: phương diện – truyện A – truyện B – nhận xét.</a:t>
+            </a:r>
+          </a:p>
+        </p:txBody>
+      </p:sp>
     </p:spTree>
   </p:cSld>
   <p:clrMapOvr>
@@ -15946,8 +16160,8 @@
         </p:nvSpPr>
         <p:spPr>
           <a:xfrm>
-            <a:off x="10097719" y="457200"/>
-            <a:ext cx="1545336" cy="457200"/>
+            <a:off x="9942271" y="457200"/>
+            <a:ext cx="1700784" cy="457200"/>
           </a:xfrm>
           <a:prstGeom prst="roundRect">
             <a:avLst/>
@@ -15986,7 +16200,7 @@
                 </a:solidFill>
                 <a:latin typeface="Arial"/>
               </a:rPr>
-              <a:t>CỦNG CỐ</a:t>
+              <a:t>LỜI GIẢI</a:t>
             </a:r>
           </a:p>
         </p:txBody>
@@ -16000,7 +16214,7 @@
         <p:spPr>
           <a:xfrm>
             <a:off x="731520" y="274320"/>
-            <a:ext cx="9427464" cy="868680"/>
+            <a:ext cx="9272016" cy="868680"/>
           </a:xfrm>
           <a:prstGeom prst="rect">
             <a:avLst/>
@@ -16020,7 +16234,7 @@
                 </a:solidFill>
                 <a:latin typeface="Arial"/>
               </a:rPr>
-              <a:t>BÀI TẬP CỦA BẠN</a:t>
+              <a:t>ĐỀ THỰC HÀNH VIẾT</a:t>
             </a:r>
           </a:p>
         </p:txBody>
@@ -16104,9 +16318,439 @@
           </a:p>
         </p:txBody>
       </p:sp>
+      <p:sp>
+        <p:nvSpPr>
+          <p:cNvPr id="7" name="TextBox 6"/>
+          <p:cNvSpPr txBox="1"/>
+          <p:nvPr/>
+        </p:nvSpPr>
+        <p:spPr>
+          <a:xfrm>
+            <a:off x="731520" y="1463040"/>
+            <a:ext cx="10789920" cy="3474720"/>
+          </a:xfrm>
+          <a:prstGeom prst="rect">
+            <a:avLst/>
+          </a:prstGeom>
+          <a:noFill/>
+        </p:spPr>
+        <p:txBody>
+          <a:bodyPr wrap="square" anchor="t" lIns="45720" rIns="45720">
+            <a:spAutoFit/>
+          </a:bodyPr>
+          <a:lstStyle/>
+          <a:p>
+            <a:pPr algn="l" marL="365760" indent="-365760">
+              <a:spcAft>
+                <a:spcPts val="800"/>
+              </a:spcAft>
+              <a:buClr>
+                <a:srgbClr val="1E40AF"/>
+              </a:buClr>
+              <a:buFont typeface="Arial"/>
+              <a:buChar char="•"/>
+            </a:pPr>
+            <a:r>
+              <a:rPr sz="2300">
+                <a:solidFill>
+                  <a:srgbClr val="1E293B"/>
+                </a:solidFill>
+                <a:latin typeface="Calibri"/>
+              </a:rPr>
+              <a:t>Tương đồng: người nông dân ở đáy xã hội, khát vọng sống, khát vọng làm người.</a:t>
+            </a:r>
+          </a:p>
+          <a:p>
+            <a:pPr algn="l" marL="365760" indent="-365760">
+              <a:spcAft>
+                <a:spcPts val="800"/>
+              </a:spcAft>
+              <a:buClr>
+                <a:srgbClr val="1E40AF"/>
+              </a:buClr>
+              <a:buFont typeface="Arial"/>
+              <a:buChar char="•"/>
+            </a:pPr>
+            <a:r>
+              <a:rPr sz="2300">
+                <a:solidFill>
+                  <a:srgbClr val="1E293B"/>
+                </a:solidFill>
+                <a:latin typeface="Calibri"/>
+              </a:rPr>
+              <a:t>Khác biệt: kết bi kịch, vòng luẩn quẩn ↔ kết mở, lá cờ đỏ.</a:t>
+            </a:r>
+          </a:p>
+          <a:p>
+            <a:pPr algn="l" marL="365760" indent="-365760">
+              <a:spcAft>
+                <a:spcPts val="800"/>
+              </a:spcAft>
+              <a:buClr>
+                <a:srgbClr val="1E40AF"/>
+              </a:buClr>
+              <a:buFont typeface="Arial"/>
+              <a:buChar char="•"/>
+            </a:pPr>
+            <a:r>
+              <a:rPr sz="2300">
+                <a:solidFill>
+                  <a:srgbClr val="1E293B"/>
+                </a:solidFill>
+                <a:latin typeface="Calibri"/>
+              </a:rPr>
+              <a:t>Nguyên nhân: thời điểm sáng tác, quan điểm nghệ thuật.</a:t>
+            </a:r>
+          </a:p>
+          <a:p>
+            <a:pPr algn="l" marL="365760" indent="-365760">
+              <a:spcAft>
+                <a:spcPts val="800"/>
+              </a:spcAft>
+              <a:buClr>
+                <a:srgbClr val="1E40AF"/>
+              </a:buClr>
+              <a:buFont typeface="Arial"/>
+              <a:buChar char="•"/>
+            </a:pPr>
+            <a:r>
+              <a:rPr sz="2300">
+                <a:solidFill>
+                  <a:srgbClr val="1E293B"/>
+                </a:solidFill>
+                <a:latin typeface="Calibri"/>
+              </a:rPr>
+              <a:t>Đánh giá giá trị riêng của mỗi tác phẩm.</a:t>
+            </a:r>
+          </a:p>
+        </p:txBody>
+      </p:sp>
+      <p:sp>
+        <p:nvSpPr>
+          <p:cNvPr id="8" name="Rounded Rectangle 7"/>
+          <p:cNvSpPr/>
+          <p:nvPr/>
+        </p:nvSpPr>
+        <p:spPr>
+          <a:xfrm>
+            <a:off x="731520" y="5074920"/>
+            <a:ext cx="10789920" cy="731520"/>
+          </a:xfrm>
+          <a:prstGeom prst="roundRect">
+            <a:avLst>
+              <a:gd name="adj" fmla="val 8000"/>
+            </a:avLst>
+          </a:prstGeom>
+          <a:solidFill>
+            <a:srgbClr val="FEF2F2"/>
+          </a:solidFill>
+          <a:ln w="19050">
+            <a:solidFill>
+              <a:srgbClr val="991B1B"/>
+            </a:solidFill>
+          </a:ln>
+          <a:effectLst/>
+        </p:spPr>
+        <p:style>
+          <a:lnRef idx="1">
+            <a:schemeClr val="accent1"/>
+          </a:lnRef>
+          <a:fillRef idx="3">
+            <a:schemeClr val="accent1"/>
+          </a:fillRef>
+          <a:effectRef idx="2">
+            <a:schemeClr val="accent1"/>
+          </a:effectRef>
+          <a:fontRef idx="minor">
+            <a:schemeClr val="lt1"/>
+          </a:fontRef>
+        </p:style>
+        <p:txBody>
+          <a:bodyPr rtlCol="0" anchor="ctr"/>
+          <a:lstStyle/>
+          <a:p>
+            <a:pPr algn="ctr"/>
+          </a:p>
+        </p:txBody>
+      </p:sp>
+      <p:sp>
+        <p:nvSpPr>
+          <p:cNvPr id="9" name="TextBox 8"/>
+          <p:cNvSpPr txBox="1"/>
+          <p:nvPr/>
+        </p:nvSpPr>
+        <p:spPr>
+          <a:xfrm>
+            <a:off x="914400" y="5074920"/>
+            <a:ext cx="10424160" cy="731520"/>
+          </a:xfrm>
+          <a:prstGeom prst="rect">
+            <a:avLst/>
+          </a:prstGeom>
+          <a:noFill/>
+        </p:spPr>
+        <p:txBody>
+          <a:bodyPr wrap="square" anchor="ctr" lIns="45720" rIns="45720">
+            <a:spAutoFit/>
+          </a:bodyPr>
+          <a:lstStyle/>
+          <a:p>
+            <a:pPr algn="l">
+              <a:spcAft>
+                <a:spcPts val="400"/>
+              </a:spcAft>
+            </a:pPr>
+            <a:r>
+              <a:rPr sz="2400" b="1">
+                <a:solidFill>
+                  <a:srgbClr val="991B1B"/>
+                </a:solidFill>
+                <a:latin typeface="Calibri"/>
+              </a:rPr>
+              <a:t>Tránh lắp ghép hai bài phân tích riêng rẽ.</a:t>
+            </a:r>
+          </a:p>
+        </p:txBody>
+      </p:sp>
+    </p:spTree>
+  </p:cSld>
+  <p:clrMapOvr>
+    <a:masterClrMapping/>
+  </p:clrMapOvr>
+</p:sld>
+</file>
+
+<file path=ppt/slides/slide39.xml><?xml version="1.0" encoding="utf-8"?>
+<p:sld xmlns:a="http://schemas.openxmlformats.org/drawingml/2006/main" xmlns:p="http://schemas.openxmlformats.org/presentationml/2006/main" xmlns:r="http://schemas.openxmlformats.org/officeDocument/2006/relationships">
+  <p:cSld>
+    <p:bg>
+      <p:bgPr>
+        <a:solidFill>
+          <a:srgbClr val="FFFFFF"/>
+        </a:solidFill>
+        <a:effectLst/>
+      </p:bgPr>
+    </p:bg>
+    <p:spTree>
+      <p:nvGrpSpPr>
+        <p:cNvPr id="1" name=""/>
+        <p:cNvGrpSpPr/>
+        <p:nvPr/>
+      </p:nvGrpSpPr>
+      <p:grpSpPr/>
+      <p:sp>
+        <p:nvSpPr>
+          <p:cNvPr id="2" name="Rectangle 1"/>
+          <p:cNvSpPr/>
+          <p:nvPr/>
+        </p:nvSpPr>
+        <p:spPr>
+          <a:xfrm>
+            <a:off x="457200" y="384048"/>
+            <a:ext cx="109728" cy="658368"/>
+          </a:xfrm>
+          <a:prstGeom prst="rect">
+            <a:avLst/>
+          </a:prstGeom>
+          <a:solidFill>
+            <a:srgbClr val="1E40AF"/>
+          </a:solidFill>
+          <a:ln>
+            <a:noFill/>
+          </a:ln>
+          <a:effectLst/>
+        </p:spPr>
+        <p:style>
+          <a:lnRef idx="1">
+            <a:schemeClr val="accent1"/>
+          </a:lnRef>
+          <a:fillRef idx="3">
+            <a:schemeClr val="accent1"/>
+          </a:fillRef>
+          <a:effectRef idx="2">
+            <a:schemeClr val="accent1"/>
+          </a:effectRef>
+          <a:fontRef idx="minor">
+            <a:schemeClr val="lt1"/>
+          </a:fontRef>
+        </p:style>
+        <p:txBody>
+          <a:bodyPr rtlCol="0" anchor="ctr"/>
+          <a:lstStyle/>
+          <a:p>
+            <a:pPr algn="ctr"/>
+          </a:p>
+        </p:txBody>
+      </p:sp>
+      <p:sp>
+        <p:nvSpPr>
+          <p:cNvPr id="3" name="Rounded Rectangle 2"/>
+          <p:cNvSpPr/>
+          <p:nvPr/>
+        </p:nvSpPr>
+        <p:spPr>
+          <a:xfrm>
+            <a:off x="10097719" y="457200"/>
+            <a:ext cx="1545336" cy="457200"/>
+          </a:xfrm>
+          <a:prstGeom prst="roundRect">
+            <a:avLst/>
+          </a:prstGeom>
+          <a:solidFill>
+            <a:srgbClr val="166534"/>
+          </a:solidFill>
+          <a:ln>
+            <a:noFill/>
+          </a:ln>
+          <a:effectLst/>
+        </p:spPr>
+        <p:style>
+          <a:lnRef idx="1">
+            <a:schemeClr val="accent1"/>
+          </a:lnRef>
+          <a:fillRef idx="3">
+            <a:schemeClr val="accent1"/>
+          </a:fillRef>
+          <a:effectRef idx="2">
+            <a:schemeClr val="accent1"/>
+          </a:effectRef>
+          <a:fontRef idx="minor">
+            <a:schemeClr val="lt1"/>
+          </a:fontRef>
+        </p:style>
+        <p:txBody>
+          <a:bodyPr rtlCol="0" anchor="ctr" wrap="none" tIns="0" bIns="0"/>
+          <a:lstStyle/>
+          <a:p>
+            <a:pPr algn="ctr"/>
+            <a:r>
+              <a:rPr sz="1400" b="1">
+                <a:solidFill>
+                  <a:srgbClr val="FFFFFF"/>
+                </a:solidFill>
+                <a:latin typeface="Arial"/>
+              </a:rPr>
+              <a:t>CỦNG CỐ</a:t>
+            </a:r>
+          </a:p>
+        </p:txBody>
+      </p:sp>
+      <p:sp>
+        <p:nvSpPr>
+          <p:cNvPr id="4" name="TextBox 3"/>
+          <p:cNvSpPr txBox="1"/>
+          <p:nvPr/>
+        </p:nvSpPr>
+        <p:spPr>
+          <a:xfrm>
+            <a:off x="731520" y="274320"/>
+            <a:ext cx="9427464" cy="868680"/>
+          </a:xfrm>
+          <a:prstGeom prst="rect">
+            <a:avLst/>
+          </a:prstGeom>
+          <a:noFill/>
+        </p:spPr>
+        <p:txBody>
+          <a:bodyPr wrap="square" anchor="ctr">
+            <a:spAutoFit/>
+          </a:bodyPr>
+          <a:lstStyle/>
+          <a:p>
+            <a:r>
+              <a:rPr sz="3600" b="1">
+                <a:solidFill>
+                  <a:srgbClr val="1E40AF"/>
+                </a:solidFill>
+                <a:latin typeface="Arial"/>
+              </a:rPr>
+              <a:t>SƠ ĐỒ TƯ DUY</a:t>
+            </a:r>
+          </a:p>
+        </p:txBody>
+      </p:sp>
+      <p:sp>
+        <p:nvSpPr>
+          <p:cNvPr id="5" name="Rectangle 4"/>
+          <p:cNvSpPr/>
+          <p:nvPr/>
+        </p:nvSpPr>
+        <p:spPr>
+          <a:xfrm>
+            <a:off x="457200" y="1207008"/>
+            <a:ext cx="11274552" cy="22000"/>
+          </a:xfrm>
+          <a:prstGeom prst="rect">
+            <a:avLst/>
+          </a:prstGeom>
+          <a:solidFill>
+            <a:srgbClr val="E2E8F0"/>
+          </a:solidFill>
+          <a:ln>
+            <a:noFill/>
+          </a:ln>
+          <a:effectLst/>
+        </p:spPr>
+        <p:style>
+          <a:lnRef idx="1">
+            <a:schemeClr val="accent1"/>
+          </a:lnRef>
+          <a:fillRef idx="3">
+            <a:schemeClr val="accent1"/>
+          </a:fillRef>
+          <a:effectRef idx="2">
+            <a:schemeClr val="accent1"/>
+          </a:effectRef>
+          <a:fontRef idx="minor">
+            <a:schemeClr val="lt1"/>
+          </a:fontRef>
+        </p:style>
+        <p:txBody>
+          <a:bodyPr rtlCol="0" anchor="ctr"/>
+          <a:lstStyle/>
+          <a:p>
+            <a:pPr algn="ctr"/>
+          </a:p>
+        </p:txBody>
+      </p:sp>
+      <p:sp>
+        <p:nvSpPr>
+          <p:cNvPr id="6" name="TextBox 5"/>
+          <p:cNvSpPr txBox="1"/>
+          <p:nvPr/>
+        </p:nvSpPr>
+        <p:spPr>
+          <a:xfrm>
+            <a:off x="457200" y="6355080"/>
+            <a:ext cx="11274552" cy="365760"/>
+          </a:xfrm>
+          <a:prstGeom prst="rect">
+            <a:avLst/>
+          </a:prstGeom>
+          <a:noFill/>
+        </p:spPr>
+        <p:txBody>
+          <a:bodyPr wrap="none">
+            <a:spAutoFit/>
+          </a:bodyPr>
+          <a:lstStyle/>
+          <a:p>
+            <a:pPr algn="r"/>
+            <a:r>
+              <a:rPr sz="1200">
+                <a:solidFill>
+                  <a:srgbClr val="64748B"/>
+                </a:solidFill>
+                <a:latin typeface="Calibri"/>
+              </a:rPr>
+              <a:t>Ngữ văn 12 · Bài 1: Khả Năng Lớn Lao Của Tiểu Thuyết          39</a:t>
+            </a:r>
+          </a:p>
+        </p:txBody>
+      </p:sp>
       <p:pic>
         <p:nvPicPr>
-          <p:cNvPr id="7" name="Picture 6" descr="QR_van_cc_bai1_k12.png"/>
+          <p:cNvPr id="7" name="Picture 6" descr="SoDoTuDuy_NGUVAN12_Bai1_KhaNangLonLaoCuaTieuThuyet_T1-11.png"/>
           <p:cNvPicPr>
             <a:picLocks noChangeAspect="1"/>
           </p:cNvPicPr>
@@ -16120,148 +16764,14 @@
         </p:blipFill>
         <p:spPr>
           <a:xfrm>
-            <a:off x="1920240" y="1463040"/>
-            <a:ext cx="3017520" cy="3017520"/>
+            <a:off x="1788855" y="1371600"/>
+            <a:ext cx="8675250" cy="4846320"/>
           </a:xfrm>
           <a:prstGeom prst="rect">
             <a:avLst/>
           </a:prstGeom>
         </p:spPr>
       </p:pic>
-      <p:sp>
-        <p:nvSpPr>
-          <p:cNvPr id="8" name="TextBox 7"/>
-          <p:cNvSpPr txBox="1"/>
-          <p:nvPr/>
-        </p:nvSpPr>
-        <p:spPr>
-          <a:xfrm>
-            <a:off x="731520" y="4572000"/>
-            <a:ext cx="5394960" cy="1463040"/>
-          </a:xfrm>
-          <a:prstGeom prst="rect">
-            <a:avLst/>
-          </a:prstGeom>
-          <a:noFill/>
-        </p:spPr>
-        <p:txBody>
-          <a:bodyPr wrap="square" anchor="t" lIns="45720" rIns="45720">
-            <a:spAutoFit/>
-          </a:bodyPr>
-          <a:lstStyle/>
-          <a:p>
-            <a:pPr algn="ctr">
-              <a:spcAft>
-                <a:spcPts val="800"/>
-              </a:spcAft>
-            </a:pPr>
-            <a:r>
-              <a:rPr sz="2000" b="1">
-                <a:solidFill>
-                  <a:srgbClr val="1E293B"/>
-                </a:solidFill>
-                <a:latin typeface="Calibri"/>
-              </a:rPr>
-              <a:t>Củng cố – Xuân Tóc Đỏ cứu quốc</a:t>
-            </a:r>
-          </a:p>
-          <a:p>
-            <a:pPr algn="ctr">
-              <a:spcAft>
-                <a:spcPts val="800"/>
-              </a:spcAft>
-            </a:pPr>
-            <a:r>
-              <a:rPr sz="1400">
-                <a:solidFill>
-                  <a:srgbClr val="64748B"/>
-                </a:solidFill>
-                <a:latin typeface="Calibri"/>
-              </a:rPr>
-              <a:t>trangtu66.github.io/Taode_thi_online/van_cc_bai1_k12.html</a:t>
-            </a:r>
-          </a:p>
-        </p:txBody>
-      </p:sp>
-      <p:pic>
-        <p:nvPicPr>
-          <p:cNvPr id="9" name="Picture 8" descr="QR_van_cc_mualarung_k12.png"/>
-          <p:cNvPicPr>
-            <a:picLocks noChangeAspect="1"/>
-          </p:cNvPicPr>
-          <p:nvPr/>
-        </p:nvPicPr>
-        <p:blipFill>
-          <a:blip r:embed="rId3"/>
-          <a:stretch>
-            <a:fillRect/>
-          </a:stretch>
-        </p:blipFill>
-        <p:spPr>
-          <a:xfrm>
-            <a:off x="7315200" y="1463040"/>
-            <a:ext cx="3017520" cy="3017520"/>
-          </a:xfrm>
-          <a:prstGeom prst="rect">
-            <a:avLst/>
-          </a:prstGeom>
-        </p:spPr>
-      </p:pic>
-      <p:sp>
-        <p:nvSpPr>
-          <p:cNvPr id="10" name="TextBox 9"/>
-          <p:cNvSpPr txBox="1"/>
-          <p:nvPr/>
-        </p:nvSpPr>
-        <p:spPr>
-          <a:xfrm>
-            <a:off x="6126480" y="4572000"/>
-            <a:ext cx="5394960" cy="1463040"/>
-          </a:xfrm>
-          <a:prstGeom prst="rect">
-            <a:avLst/>
-          </a:prstGeom>
-          <a:noFill/>
-        </p:spPr>
-        <p:txBody>
-          <a:bodyPr wrap="square" anchor="t" lIns="45720" rIns="45720">
-            <a:spAutoFit/>
-          </a:bodyPr>
-          <a:lstStyle/>
-          <a:p>
-            <a:pPr algn="ctr">
-              <a:spcAft>
-                <a:spcPts val="800"/>
-              </a:spcAft>
-            </a:pPr>
-            <a:r>
-              <a:rPr sz="2000" b="1">
-                <a:solidFill>
-                  <a:srgbClr val="1E293B"/>
-                </a:solidFill>
-                <a:latin typeface="Calibri"/>
-              </a:rPr>
-              <a:t>Củng cố – Mùa lá rụng trong vườn</a:t>
-            </a:r>
-          </a:p>
-          <a:p>
-            <a:pPr algn="ctr">
-              <a:spcAft>
-                <a:spcPts val="800"/>
-              </a:spcAft>
-            </a:pPr>
-            <a:r>
-              <a:rPr sz="1400">
-                <a:solidFill>
-                  <a:srgbClr val="64748B"/>
-                </a:solidFill>
-                <a:latin typeface="Calibri"/>
-              </a:rPr>
-              <a:t>trangtu66.github.io/Taode_thi_online/van_cc_mualarung_k12.html</a:t>
-            </a:r>
-          </a:p>
-        </p:txBody>
-      </p:sp>
     </p:spTree>
   </p:cSld>
   <p:clrMapOvr>
@@ -16561,6 +17071,400 @@
 </p:sld>
 </file>
 
+<file path=ppt/slides/slide40.xml><?xml version="1.0" encoding="utf-8"?>
+<p:sld xmlns:a="http://schemas.openxmlformats.org/drawingml/2006/main" xmlns:p="http://schemas.openxmlformats.org/presentationml/2006/main" xmlns:r="http://schemas.openxmlformats.org/officeDocument/2006/relationships">
+  <p:cSld>
+    <p:bg>
+      <p:bgPr>
+        <a:solidFill>
+          <a:srgbClr val="FFFFFF"/>
+        </a:solidFill>
+        <a:effectLst/>
+      </p:bgPr>
+    </p:bg>
+    <p:spTree>
+      <p:nvGrpSpPr>
+        <p:cNvPr id="1" name=""/>
+        <p:cNvGrpSpPr/>
+        <p:nvPr/>
+      </p:nvGrpSpPr>
+      <p:grpSpPr/>
+      <p:sp>
+        <p:nvSpPr>
+          <p:cNvPr id="2" name="Rectangle 1"/>
+          <p:cNvSpPr/>
+          <p:nvPr/>
+        </p:nvSpPr>
+        <p:spPr>
+          <a:xfrm>
+            <a:off x="457200" y="384048"/>
+            <a:ext cx="109728" cy="658368"/>
+          </a:xfrm>
+          <a:prstGeom prst="rect">
+            <a:avLst/>
+          </a:prstGeom>
+          <a:solidFill>
+            <a:srgbClr val="1E40AF"/>
+          </a:solidFill>
+          <a:ln>
+            <a:noFill/>
+          </a:ln>
+          <a:effectLst/>
+        </p:spPr>
+        <p:style>
+          <a:lnRef idx="1">
+            <a:schemeClr val="accent1"/>
+          </a:lnRef>
+          <a:fillRef idx="3">
+            <a:schemeClr val="accent1"/>
+          </a:fillRef>
+          <a:effectRef idx="2">
+            <a:schemeClr val="accent1"/>
+          </a:effectRef>
+          <a:fontRef idx="minor">
+            <a:schemeClr val="lt1"/>
+          </a:fontRef>
+        </p:style>
+        <p:txBody>
+          <a:bodyPr rtlCol="0" anchor="ctr"/>
+          <a:lstStyle/>
+          <a:p>
+            <a:pPr algn="ctr"/>
+          </a:p>
+        </p:txBody>
+      </p:sp>
+      <p:sp>
+        <p:nvSpPr>
+          <p:cNvPr id="3" name="Rounded Rectangle 2"/>
+          <p:cNvSpPr/>
+          <p:nvPr/>
+        </p:nvSpPr>
+        <p:spPr>
+          <a:xfrm>
+            <a:off x="10097719" y="457200"/>
+            <a:ext cx="1545336" cy="457200"/>
+          </a:xfrm>
+          <a:prstGeom prst="roundRect">
+            <a:avLst/>
+          </a:prstGeom>
+          <a:solidFill>
+            <a:srgbClr val="991B1B"/>
+          </a:solidFill>
+          <a:ln>
+            <a:noFill/>
+          </a:ln>
+          <a:effectLst/>
+        </p:spPr>
+        <p:style>
+          <a:lnRef idx="1">
+            <a:schemeClr val="accent1"/>
+          </a:lnRef>
+          <a:fillRef idx="3">
+            <a:schemeClr val="accent1"/>
+          </a:fillRef>
+          <a:effectRef idx="2">
+            <a:schemeClr val="accent1"/>
+          </a:effectRef>
+          <a:fontRef idx="minor">
+            <a:schemeClr val="lt1"/>
+          </a:fontRef>
+        </p:style>
+        <p:txBody>
+          <a:bodyPr rtlCol="0" anchor="ctr" wrap="none" tIns="0" bIns="0"/>
+          <a:lstStyle/>
+          <a:p>
+            <a:pPr algn="ctr"/>
+            <a:r>
+              <a:rPr sz="1400" b="1">
+                <a:solidFill>
+                  <a:srgbClr val="FFFFFF"/>
+                </a:solidFill>
+                <a:latin typeface="Arial"/>
+              </a:rPr>
+              <a:t>CỦNG CỐ</a:t>
+            </a:r>
+          </a:p>
+        </p:txBody>
+      </p:sp>
+      <p:sp>
+        <p:nvSpPr>
+          <p:cNvPr id="4" name="TextBox 3"/>
+          <p:cNvSpPr txBox="1"/>
+          <p:nvPr/>
+        </p:nvSpPr>
+        <p:spPr>
+          <a:xfrm>
+            <a:off x="731520" y="274320"/>
+            <a:ext cx="9427464" cy="868680"/>
+          </a:xfrm>
+          <a:prstGeom prst="rect">
+            <a:avLst/>
+          </a:prstGeom>
+          <a:noFill/>
+        </p:spPr>
+        <p:txBody>
+          <a:bodyPr wrap="square" anchor="ctr">
+            <a:spAutoFit/>
+          </a:bodyPr>
+          <a:lstStyle/>
+          <a:p>
+            <a:r>
+              <a:rPr sz="3600" b="1">
+                <a:solidFill>
+                  <a:srgbClr val="1E40AF"/>
+                </a:solidFill>
+                <a:latin typeface="Arial"/>
+              </a:rPr>
+              <a:t>BÀI TẬP CỦA BẠN</a:t>
+            </a:r>
+          </a:p>
+        </p:txBody>
+      </p:sp>
+      <p:sp>
+        <p:nvSpPr>
+          <p:cNvPr id="5" name="Rectangle 4"/>
+          <p:cNvSpPr/>
+          <p:nvPr/>
+        </p:nvSpPr>
+        <p:spPr>
+          <a:xfrm>
+            <a:off x="457200" y="1207008"/>
+            <a:ext cx="11274552" cy="22000"/>
+          </a:xfrm>
+          <a:prstGeom prst="rect">
+            <a:avLst/>
+          </a:prstGeom>
+          <a:solidFill>
+            <a:srgbClr val="E2E8F0"/>
+          </a:solidFill>
+          <a:ln>
+            <a:noFill/>
+          </a:ln>
+          <a:effectLst/>
+        </p:spPr>
+        <p:style>
+          <a:lnRef idx="1">
+            <a:schemeClr val="accent1"/>
+          </a:lnRef>
+          <a:fillRef idx="3">
+            <a:schemeClr val="accent1"/>
+          </a:fillRef>
+          <a:effectRef idx="2">
+            <a:schemeClr val="accent1"/>
+          </a:effectRef>
+          <a:fontRef idx="minor">
+            <a:schemeClr val="lt1"/>
+          </a:fontRef>
+        </p:style>
+        <p:txBody>
+          <a:bodyPr rtlCol="0" anchor="ctr"/>
+          <a:lstStyle/>
+          <a:p>
+            <a:pPr algn="ctr"/>
+          </a:p>
+        </p:txBody>
+      </p:sp>
+      <p:sp>
+        <p:nvSpPr>
+          <p:cNvPr id="6" name="TextBox 5"/>
+          <p:cNvSpPr txBox="1"/>
+          <p:nvPr/>
+        </p:nvSpPr>
+        <p:spPr>
+          <a:xfrm>
+            <a:off x="457200" y="6355080"/>
+            <a:ext cx="11274552" cy="365760"/>
+          </a:xfrm>
+          <a:prstGeom prst="rect">
+            <a:avLst/>
+          </a:prstGeom>
+          <a:noFill/>
+        </p:spPr>
+        <p:txBody>
+          <a:bodyPr wrap="none">
+            <a:spAutoFit/>
+          </a:bodyPr>
+          <a:lstStyle/>
+          <a:p>
+            <a:pPr algn="r"/>
+            <a:r>
+              <a:rPr sz="1200">
+                <a:solidFill>
+                  <a:srgbClr val="64748B"/>
+                </a:solidFill>
+                <a:latin typeface="Calibri"/>
+              </a:rPr>
+              <a:t>Ngữ văn 12 · Bài 1: Khả Năng Lớn Lao Của Tiểu Thuyết          40</a:t>
+            </a:r>
+          </a:p>
+        </p:txBody>
+      </p:sp>
+      <p:pic>
+        <p:nvPicPr>
+          <p:cNvPr id="7" name="Picture 6" descr="QR_van_cc_bai1_k12.png"/>
+          <p:cNvPicPr>
+            <a:picLocks noChangeAspect="1"/>
+          </p:cNvPicPr>
+          <p:nvPr/>
+        </p:nvPicPr>
+        <p:blipFill>
+          <a:blip r:embed="rId2"/>
+          <a:stretch>
+            <a:fillRect/>
+          </a:stretch>
+        </p:blipFill>
+        <p:spPr>
+          <a:xfrm>
+            <a:off x="1920240" y="1463040"/>
+            <a:ext cx="3017520" cy="3017520"/>
+          </a:xfrm>
+          <a:prstGeom prst="rect">
+            <a:avLst/>
+          </a:prstGeom>
+        </p:spPr>
+      </p:pic>
+      <p:sp>
+        <p:nvSpPr>
+          <p:cNvPr id="8" name="TextBox 7"/>
+          <p:cNvSpPr txBox="1"/>
+          <p:nvPr/>
+        </p:nvSpPr>
+        <p:spPr>
+          <a:xfrm>
+            <a:off x="731520" y="4572000"/>
+            <a:ext cx="5394960" cy="1463040"/>
+          </a:xfrm>
+          <a:prstGeom prst="rect">
+            <a:avLst/>
+          </a:prstGeom>
+          <a:noFill/>
+        </p:spPr>
+        <p:txBody>
+          <a:bodyPr wrap="square" anchor="t" lIns="45720" rIns="45720">
+            <a:spAutoFit/>
+          </a:bodyPr>
+          <a:lstStyle/>
+          <a:p>
+            <a:pPr algn="ctr">
+              <a:spcAft>
+                <a:spcPts val="800"/>
+              </a:spcAft>
+            </a:pPr>
+            <a:r>
+              <a:rPr sz="2000" b="1">
+                <a:solidFill>
+                  <a:srgbClr val="1E293B"/>
+                </a:solidFill>
+                <a:latin typeface="Calibri"/>
+              </a:rPr>
+              <a:t>Củng cố – Xuân Tóc Đỏ cứu quốc</a:t>
+            </a:r>
+          </a:p>
+          <a:p>
+            <a:pPr algn="ctr">
+              <a:spcAft>
+                <a:spcPts val="800"/>
+              </a:spcAft>
+            </a:pPr>
+            <a:r>
+              <a:rPr sz="1400">
+                <a:solidFill>
+                  <a:srgbClr val="64748B"/>
+                </a:solidFill>
+                <a:latin typeface="Calibri"/>
+              </a:rPr>
+              <a:t>trangtu66.github.io/Taode_thi_online/van_cc_bai1_k12.html</a:t>
+            </a:r>
+          </a:p>
+        </p:txBody>
+      </p:sp>
+      <p:pic>
+        <p:nvPicPr>
+          <p:cNvPr id="9" name="Picture 8" descr="QR_van_cc_mualarung_k12.png"/>
+          <p:cNvPicPr>
+            <a:picLocks noChangeAspect="1"/>
+          </p:cNvPicPr>
+          <p:nvPr/>
+        </p:nvPicPr>
+        <p:blipFill>
+          <a:blip r:embed="rId3"/>
+          <a:stretch>
+            <a:fillRect/>
+          </a:stretch>
+        </p:blipFill>
+        <p:spPr>
+          <a:xfrm>
+            <a:off x="7315200" y="1463040"/>
+            <a:ext cx="3017520" cy="3017520"/>
+          </a:xfrm>
+          <a:prstGeom prst="rect">
+            <a:avLst/>
+          </a:prstGeom>
+        </p:spPr>
+      </p:pic>
+      <p:sp>
+        <p:nvSpPr>
+          <p:cNvPr id="10" name="TextBox 9"/>
+          <p:cNvSpPr txBox="1"/>
+          <p:nvPr/>
+        </p:nvSpPr>
+        <p:spPr>
+          <a:xfrm>
+            <a:off x="6126480" y="4572000"/>
+            <a:ext cx="5394960" cy="1463040"/>
+          </a:xfrm>
+          <a:prstGeom prst="rect">
+            <a:avLst/>
+          </a:prstGeom>
+          <a:noFill/>
+        </p:spPr>
+        <p:txBody>
+          <a:bodyPr wrap="square" anchor="t" lIns="45720" rIns="45720">
+            <a:spAutoFit/>
+          </a:bodyPr>
+          <a:lstStyle/>
+          <a:p>
+            <a:pPr algn="ctr">
+              <a:spcAft>
+                <a:spcPts val="800"/>
+              </a:spcAft>
+            </a:pPr>
+            <a:r>
+              <a:rPr sz="2000" b="1">
+                <a:solidFill>
+                  <a:srgbClr val="1E293B"/>
+                </a:solidFill>
+                <a:latin typeface="Calibri"/>
+              </a:rPr>
+              <a:t>Củng cố – Mùa lá rụng trong vườn</a:t>
+            </a:r>
+          </a:p>
+          <a:p>
+            <a:pPr algn="ctr">
+              <a:spcAft>
+                <a:spcPts val="800"/>
+              </a:spcAft>
+            </a:pPr>
+            <a:r>
+              <a:rPr sz="1400">
+                <a:solidFill>
+                  <a:srgbClr val="64748B"/>
+                </a:solidFill>
+                <a:latin typeface="Calibri"/>
+              </a:rPr>
+              <a:t>trangtu66.github.io/Taode_thi_online/van_cc_mualarung_k12.html</a:t>
+            </a:r>
+          </a:p>
+        </p:txBody>
+      </p:sp>
+    </p:spTree>
+  </p:cSld>
+  <p:clrMapOvr>
+    <a:masterClrMapping/>
+  </p:clrMapOvr>
+</p:sld>
+</file>
+
 <file path=ppt/slides/slide5.xml><?xml version="1.0" encoding="utf-8"?>
 <p:sld xmlns:a="http://schemas.openxmlformats.org/drawingml/2006/main" xmlns:p="http://schemas.openxmlformats.org/presentationml/2006/main" xmlns:r="http://schemas.openxmlformats.org/officeDocument/2006/relationships">
   <p:cSld>
@@ -16631,14 +17535,14 @@
         </p:nvSpPr>
         <p:spPr>
           <a:xfrm>
-            <a:off x="10097719" y="457200"/>
-            <a:ext cx="1545336" cy="457200"/>
+            <a:off x="10408615" y="457200"/>
+            <a:ext cx="1234440" cy="457200"/>
           </a:xfrm>
           <a:prstGeom prst="roundRect">
             <a:avLst/>
           </a:prstGeom>
           <a:solidFill>
-            <a:srgbClr val="166534"/>
+            <a:srgbClr val="991B1B"/>
           </a:solidFill>
           <a:ln>
             <a:noFill/>
@@ -16671,7 +17575,7 @@
                 </a:solidFill>
                 <a:latin typeface="Arial"/>
               </a:rPr>
-              <a:t>GHI NHỚ</a:t>
+              <a:t>VIDEO</a:t>
             </a:r>
           </a:p>
         </p:txBody>
@@ -16685,7 +17589,7 @@
         <p:spPr>
           <a:xfrm>
             <a:off x="731520" y="274320"/>
-            <a:ext cx="9427464" cy="868680"/>
+            <a:ext cx="9738360" cy="868680"/>
           </a:xfrm>
           <a:prstGeom prst="rect">
             <a:avLst/>
@@ -16705,7 +17609,7 @@
                 </a:solidFill>
                 <a:latin typeface="Arial"/>
               </a:rPr>
-              <a:t>TRI THỨC NGỮ VĂN</a:t>
+              <a:t>VIDEO THAM KHẢO</a:t>
             </a:r>
           </a:p>
         </p:txBody>
@@ -16789,16 +17693,40 @@
           </a:p>
         </p:txBody>
       </p:sp>
-      <p:sp>
-        <p:nvSpPr>
-          <p:cNvPr id="7" name="TextBox 6"/>
+      <p:pic>
+        <p:nvPicPr>
+          <p:cNvPr id="7" name="Picture 6" descr="QR_video_ZQa94Rjp2_o.png"/>
+          <p:cNvPicPr>
+            <a:picLocks noChangeAspect="1"/>
+          </p:cNvPicPr>
+          <p:nvPr/>
+        </p:nvPicPr>
+        <p:blipFill>
+          <a:blip r:embed="rId2"/>
+          <a:stretch>
+            <a:fillRect/>
+          </a:stretch>
+        </p:blipFill>
+        <p:spPr>
+          <a:xfrm>
+            <a:off x="8412480" y="1554480"/>
+            <a:ext cx="3108960" cy="3108960"/>
+          </a:xfrm>
+          <a:prstGeom prst="rect">
+            <a:avLst/>
+          </a:prstGeom>
+        </p:spPr>
+      </p:pic>
+      <p:sp>
+        <p:nvSpPr>
+          <p:cNvPr id="8" name="TextBox 7"/>
           <p:cNvSpPr txBox="1"/>
           <p:nvPr/>
         </p:nvSpPr>
         <p:spPr>
           <a:xfrm>
-            <a:off x="731520" y="1463040"/>
-            <a:ext cx="10789920" cy="4754880"/>
+            <a:off x="731520" y="1554480"/>
+            <a:ext cx="7498079" cy="4206240"/>
           </a:xfrm>
           <a:prstGeom prst="rect">
             <a:avLst/>
@@ -16810,6 +17738,38 @@
             <a:spAutoFit/>
           </a:bodyPr>
           <a:lstStyle/>
+          <a:p>
+            <a:pPr algn="l">
+              <a:spcAft>
+                <a:spcPts val="800"/>
+              </a:spcAft>
+            </a:pPr>
+            <a:r>
+              <a:rPr sz="2600" b="1">
+                <a:solidFill>
+                  <a:srgbClr val="1E293B"/>
+                </a:solidFill>
+                <a:latin typeface="Calibri"/>
+              </a:rPr>
+              <a:t>🎬 Đọc Xuân Tóc Đỏ cứu quốc (Số đỏ – Vũ Trọng Phụng) – Ngữ văn 12 KNTT</a:t>
+            </a:r>
+          </a:p>
+          <a:p>
+            <a:pPr algn="l">
+              <a:spcAft>
+                <a:spcPts val="800"/>
+              </a:spcAft>
+            </a:pPr>
+            <a:r>
+              <a:rPr sz="2000">
+                <a:solidFill>
+                  <a:srgbClr val="64748B"/>
+                </a:solidFill>
+                <a:latin typeface="Calibri"/>
+              </a:rPr>
+              <a:t>Kênh: Học văn online Cô Hợp</a:t>
+            </a:r>
+          </a:p>
           <a:p>
             <a:pPr algn="l" marL="365760" indent="-365760">
               <a:spcAft>
@@ -16822,112 +17782,30 @@
               <a:buChar char="•"/>
             </a:pPr>
             <a:r>
-              <a:rPr sz="2400" b="1">
+              <a:rPr sz="2000">
                 <a:solidFill>
                   <a:srgbClr val="1E293B"/>
                 </a:solidFill>
                 <a:latin typeface="Calibri"/>
               </a:rPr>
-              <a:t>Tiểu thuyết hiện đại</a:t>
-            </a:r>
-            <a:r>
-              <a:rPr sz="2400">
-                <a:solidFill>
-                  <a:srgbClr val="1E293B"/>
-                </a:solidFill>
-                <a:latin typeface="Calibri"/>
-              </a:rPr>
-              <a:t>: góc độ đời tư, “con người nếm trải”, kết cấu nhiều tầng, nhiều “bè” ngôn ngữ.</a:t>
-            </a:r>
-          </a:p>
-          <a:p>
-            <a:pPr algn="l" marL="365760" indent="-365760">
+              <a:t>Đọc văn bản (nghe đọc diễn cảm)</a:t>
+            </a:r>
+          </a:p>
+          <a:p>
+            <a:pPr algn="l">
               <a:spcAft>
                 <a:spcPts val="800"/>
               </a:spcAft>
-              <a:buClr>
-                <a:srgbClr val="1E40AF"/>
-              </a:buClr>
-              <a:buFont typeface="Arial"/>
-              <a:buChar char="•"/>
             </a:pPr>
             <a:r>
-              <a:rPr sz="2400" b="1">
-                <a:solidFill>
-                  <a:srgbClr val="1E293B"/>
+              <a:rPr sz="1600">
+                <a:solidFill>
+                  <a:srgbClr val="64748B"/>
                 </a:solidFill>
                 <a:latin typeface="Calibri"/>
-              </a:rPr>
-              <a:t>Phong cách hiện thực</a:t>
-            </a:r>
-            <a:r>
-              <a:rPr sz="2400">
-                <a:solidFill>
-                  <a:srgbClr val="1E293B"/>
-                </a:solidFill>
-                <a:latin typeface="Calibri"/>
-              </a:rPr>
-              <a:t>: quan hệ hoàn cảnh – tính cách, miêu tả “như thật”.</a:t>
-            </a:r>
-          </a:p>
-          <a:p>
-            <a:pPr algn="l" marL="365760" indent="-365760">
-              <a:spcAft>
-                <a:spcPts val="800"/>
-              </a:spcAft>
-              <a:buClr>
-                <a:srgbClr val="1E40AF"/>
-              </a:buClr>
-              <a:buFont typeface="Arial"/>
-              <a:buChar char="•"/>
-            </a:pPr>
-            <a:r>
-              <a:rPr sz="2400" b="1">
-                <a:solidFill>
-                  <a:srgbClr val="1E293B"/>
-                </a:solidFill>
-                <a:latin typeface="Calibri"/>
-              </a:rPr>
-              <a:t>Nói mỉa</a:t>
-            </a:r>
-            <a:r>
-              <a:rPr sz="2400">
-                <a:solidFill>
-                  <a:srgbClr val="1E293B"/>
-                </a:solidFill>
-                <a:latin typeface="Calibri"/>
-              </a:rPr>
-              <a:t>: mâu thuẫn cố ý giữa hiển ngôn và hàm ngôn.</a:t>
-            </a:r>
-          </a:p>
-          <a:p>
-            <a:pPr algn="l" marL="365760" indent="-365760">
-              <a:spcAft>
-                <a:spcPts val="800"/>
-              </a:spcAft>
-              <a:buClr>
-                <a:srgbClr val="1E40AF"/>
-              </a:buClr>
-              <a:buFont typeface="Arial"/>
-              <a:buChar char="•"/>
-            </a:pPr>
-            <a:r>
-              <a:rPr sz="2400" b="1">
-                <a:solidFill>
-                  <a:srgbClr val="1E293B"/>
-                </a:solidFill>
-                <a:latin typeface="Calibri"/>
-              </a:rPr>
-              <a:t>Nghịch ngữ</a:t>
-            </a:r>
-            <a:r>
-              <a:rPr sz="2400">
-                <a:solidFill>
-                  <a:srgbClr val="1E293B"/>
-                </a:solidFill>
-                <a:latin typeface="Calibri"/>
-              </a:rPr>
-              <a:t>: cụm từ có nghĩa đối lập, phát lộ sự thật.</a:t>
+                <a:hlinkClick r:id="rId3"/>
+              </a:rPr>
+              <a:t>https://www.youtube.com/watch?v=ZQa94Rjp2_o</a:t>
             </a:r>
           </a:p>
         </p:txBody>
@@ -17010,14 +17888,14 @@
         </p:nvSpPr>
         <p:spPr>
           <a:xfrm>
-            <a:off x="10253167" y="457200"/>
-            <a:ext cx="1389888" cy="457200"/>
+            <a:off x="10097719" y="457200"/>
+            <a:ext cx="1545336" cy="457200"/>
           </a:xfrm>
           <a:prstGeom prst="roundRect">
             <a:avLst/>
           </a:prstGeom>
           <a:solidFill>
-            <a:srgbClr val="1E40AF"/>
+            <a:srgbClr val="166534"/>
           </a:solidFill>
           <a:ln>
             <a:noFill/>
@@ -17050,7 +17928,7 @@
                 </a:solidFill>
                 <a:latin typeface="Arial"/>
               </a:rPr>
-              <a:t>ĐỀ BÀI</a:t>
+              <a:t>GHI NHỚ</a:t>
             </a:r>
           </a:p>
         </p:txBody>
@@ -17064,7 +17942,7 @@
         <p:spPr>
           <a:xfrm>
             <a:off x="731520" y="274320"/>
-            <a:ext cx="9582912" cy="868680"/>
+            <a:ext cx="9427464" cy="868680"/>
           </a:xfrm>
           <a:prstGeom prst="rect">
             <a:avLst/>
@@ -17084,7 +17962,7 @@
                 </a:solidFill>
                 <a:latin typeface="Arial"/>
               </a:rPr>
-              <a:t>SỰ VIỆC CHÍNH</a:t>
+              <a:t>TRI THỨC NGỮ VĂN</a:t>
             </a:r>
           </a:p>
         </p:txBody>
@@ -17177,7 +18055,7 @@
         <p:spPr>
           <a:xfrm>
             <a:off x="731520" y="1463040"/>
-            <a:ext cx="10789920" cy="3566160"/>
+            <a:ext cx="10789920" cy="4754880"/>
           </a:xfrm>
           <a:prstGeom prst="rect">
             <a:avLst/>
@@ -17190,106 +18068,123 @@
           </a:bodyPr>
           <a:lstStyle/>
           <a:p>
-            <a:pPr algn="l">
+            <a:pPr algn="l" marL="365760" indent="-365760">
               <a:spcAft>
                 <a:spcPts val="800"/>
               </a:spcAft>
+              <a:buClr>
+                <a:srgbClr val="1E40AF"/>
+              </a:buClr>
+              <a:buFont typeface="Arial"/>
+              <a:buChar char="•"/>
             </a:pPr>
             <a:r>
-              <a:rPr sz="2600" b="1">
+              <a:rPr sz="2400" b="1">
                 <a:solidFill>
                   <a:srgbClr val="1E293B"/>
                 </a:solidFill>
                 <a:latin typeface="Calibri"/>
               </a:rPr>
-              <a:t>Tóm tắt các sự việc chính được kể trong đoạn trích Xuân Tóc Đỏ cứu quốc bằng một sơ đồ phù hợp.</a:t>
-            </a:r>
-          </a:p>
-        </p:txBody>
-      </p:sp>
-      <p:sp>
-        <p:nvSpPr>
-          <p:cNvPr id="8" name="Rounded Rectangle 7"/>
-          <p:cNvSpPr/>
-          <p:nvPr/>
-        </p:nvSpPr>
-        <p:spPr>
-          <a:xfrm>
-            <a:off x="731520" y="5120640"/>
-            <a:ext cx="10789920" cy="693420"/>
-          </a:xfrm>
-          <a:prstGeom prst="roundRect">
-            <a:avLst>
-              <a:gd name="adj" fmla="val 8000"/>
-            </a:avLst>
-          </a:prstGeom>
-          <a:solidFill>
-            <a:srgbClr val="EFF4FF"/>
-          </a:solidFill>
-          <a:ln w="19050">
-            <a:solidFill>
-              <a:srgbClr val="1E40AF"/>
-            </a:solidFill>
-          </a:ln>
-          <a:effectLst/>
-        </p:spPr>
-        <p:style>
-          <a:lnRef idx="1">
-            <a:schemeClr val="accent1"/>
-          </a:lnRef>
-          <a:fillRef idx="3">
-            <a:schemeClr val="accent1"/>
-          </a:fillRef>
-          <a:effectRef idx="2">
-            <a:schemeClr val="accent1"/>
-          </a:effectRef>
-          <a:fontRef idx="minor">
-            <a:schemeClr val="lt1"/>
-          </a:fontRef>
-        </p:style>
-        <p:txBody>
-          <a:bodyPr rtlCol="0" anchor="ctr"/>
-          <a:lstStyle/>
-          <a:p>
-            <a:pPr algn="ctr"/>
-          </a:p>
-        </p:txBody>
-      </p:sp>
-      <p:sp>
-        <p:nvSpPr>
-          <p:cNvPr id="9" name="TextBox 8"/>
-          <p:cNvSpPr txBox="1"/>
-          <p:nvPr/>
-        </p:nvSpPr>
-        <p:spPr>
-          <a:xfrm>
-            <a:off x="914400" y="5120640"/>
-            <a:ext cx="10424160" cy="693420"/>
-          </a:xfrm>
-          <a:prstGeom prst="rect">
-            <a:avLst/>
-          </a:prstGeom>
-          <a:noFill/>
-        </p:spPr>
-        <p:txBody>
-          <a:bodyPr wrap="square" anchor="ctr" lIns="45720" rIns="45720">
-            <a:spAutoFit/>
-          </a:bodyPr>
-          <a:lstStyle/>
-          <a:p>
-            <a:pPr algn="l">
+              <a:t>Tiểu thuyết hiện đại</a:t>
+            </a:r>
+            <a:r>
+              <a:rPr sz="2400">
+                <a:solidFill>
+                  <a:srgbClr val="1E293B"/>
+                </a:solidFill>
+                <a:latin typeface="Calibri"/>
+              </a:rPr>
+              <a:t>: góc độ đời tư, “con người nếm trải”, kết cấu nhiều tầng, nhiều “bè” ngôn ngữ.</a:t>
+            </a:r>
+          </a:p>
+          <a:p>
+            <a:pPr algn="l" marL="365760" indent="-365760">
               <a:spcAft>
-                <a:spcPts val="400"/>
+                <a:spcPts val="800"/>
               </a:spcAft>
+              <a:buClr>
+                <a:srgbClr val="1E40AF"/>
+              </a:buClr>
+              <a:buFont typeface="Arial"/>
+              <a:buChar char="•"/>
             </a:pPr>
             <a:r>
-              <a:rPr sz="2200" b="1">
-                <a:solidFill>
-                  <a:srgbClr val="1E40AF"/>
+              <a:rPr sz="2400" b="1">
+                <a:solidFill>
+                  <a:srgbClr val="1E293B"/>
                 </a:solidFill>
                 <a:latin typeface="Calibri"/>
               </a:rPr>
-              <a:t>💡 Trận đấu – mệnh lệnh – kết quả – diễn thuyết.</a:t>
+              <a:t>Phong cách hiện thực</a:t>
+            </a:r>
+            <a:r>
+              <a:rPr sz="2400">
+                <a:solidFill>
+                  <a:srgbClr val="1E293B"/>
+                </a:solidFill>
+                <a:latin typeface="Calibri"/>
+              </a:rPr>
+              <a:t>: quan hệ hoàn cảnh – tính cách, miêu tả “như thật”.</a:t>
+            </a:r>
+          </a:p>
+          <a:p>
+            <a:pPr algn="l" marL="365760" indent="-365760">
+              <a:spcAft>
+                <a:spcPts val="800"/>
+              </a:spcAft>
+              <a:buClr>
+                <a:srgbClr val="1E40AF"/>
+              </a:buClr>
+              <a:buFont typeface="Arial"/>
+              <a:buChar char="•"/>
+            </a:pPr>
+            <a:r>
+              <a:rPr sz="2400" b="1">
+                <a:solidFill>
+                  <a:srgbClr val="1E293B"/>
+                </a:solidFill>
+                <a:latin typeface="Calibri"/>
+              </a:rPr>
+              <a:t>Nói mỉa</a:t>
+            </a:r>
+            <a:r>
+              <a:rPr sz="2400">
+                <a:solidFill>
+                  <a:srgbClr val="1E293B"/>
+                </a:solidFill>
+                <a:latin typeface="Calibri"/>
+              </a:rPr>
+              <a:t>: mâu thuẫn cố ý giữa hiển ngôn và hàm ngôn.</a:t>
+            </a:r>
+          </a:p>
+          <a:p>
+            <a:pPr algn="l" marL="365760" indent="-365760">
+              <a:spcAft>
+                <a:spcPts val="800"/>
+              </a:spcAft>
+              <a:buClr>
+                <a:srgbClr val="1E40AF"/>
+              </a:buClr>
+              <a:buFont typeface="Arial"/>
+              <a:buChar char="•"/>
+            </a:pPr>
+            <a:r>
+              <a:rPr sz="2400" b="1">
+                <a:solidFill>
+                  <a:srgbClr val="1E293B"/>
+                </a:solidFill>
+                <a:latin typeface="Calibri"/>
+              </a:rPr>
+              <a:t>Nghịch ngữ</a:t>
+            </a:r>
+            <a:r>
+              <a:rPr sz="2400">
+                <a:solidFill>
+                  <a:srgbClr val="1E293B"/>
+                </a:solidFill>
+                <a:latin typeface="Calibri"/>
+              </a:rPr>
+              <a:t>: cụm từ có nghĩa đối lập, phát lộ sự thật.</a:t>
             </a:r>
           </a:p>
         </p:txBody>
@@ -17372,14 +18267,14 @@
         </p:nvSpPr>
         <p:spPr>
           <a:xfrm>
-            <a:off x="9942271" y="457200"/>
-            <a:ext cx="1700784" cy="457200"/>
+            <a:off x="10253167" y="457200"/>
+            <a:ext cx="1389888" cy="457200"/>
           </a:xfrm>
           <a:prstGeom prst="roundRect">
             <a:avLst/>
           </a:prstGeom>
           <a:solidFill>
-            <a:srgbClr val="991B1B"/>
+            <a:srgbClr val="1E40AF"/>
           </a:solidFill>
           <a:ln>
             <a:noFill/>
@@ -17412,7 +18307,7 @@
                 </a:solidFill>
                 <a:latin typeface="Arial"/>
               </a:rPr>
-              <a:t>LỜI GIẢI</a:t>
+              <a:t>ĐỀ BÀI</a:t>
             </a:r>
           </a:p>
         </p:txBody>
@@ -17426,7 +18321,7 @@
         <p:spPr>
           <a:xfrm>
             <a:off x="731520" y="274320"/>
-            <a:ext cx="9272016" cy="868680"/>
+            <a:ext cx="9582912" cy="868680"/>
           </a:xfrm>
           <a:prstGeom prst="rect">
             <a:avLst/>
@@ -17539,7 +18434,7 @@
         <p:spPr>
           <a:xfrm>
             <a:off x="731520" y="1463040"/>
-            <a:ext cx="10789920" cy="3474720"/>
+            <a:ext cx="10789920" cy="3566160"/>
           </a:xfrm>
           <a:prstGeom prst="rect">
             <a:avLst/>
@@ -17552,87 +18447,19 @@
           </a:bodyPr>
           <a:lstStyle/>
           <a:p>
-            <a:pPr algn="l" marL="365760" indent="-365760">
+            <a:pPr algn="l">
               <a:spcAft>
                 <a:spcPts val="800"/>
               </a:spcAft>
-              <a:buClr>
-                <a:srgbClr val="1E40AF"/>
-              </a:buClr>
-              <a:buFont typeface="Arial"/>
-              <a:buChar char="•"/>
             </a:pPr>
             <a:r>
-              <a:rPr sz="2300">
+              <a:rPr sz="2600" b="1">
                 <a:solidFill>
                   <a:srgbClr val="1E293B"/>
                 </a:solidFill>
                 <a:latin typeface="Calibri"/>
               </a:rPr>
-              <a:t>Trận quần vợt Xuân Tóc Đỏ – quán quân Xiêm La.</a:t>
-            </a:r>
-          </a:p>
-          <a:p>
-            <a:pPr algn="l" marL="365760" indent="-365760">
-              <a:spcAft>
-                <a:spcPts val="800"/>
-              </a:spcAft>
-              <a:buClr>
-                <a:srgbClr val="1E40AF"/>
-              </a:buClr>
-              <a:buFont typeface="Arial"/>
-              <a:buChar char="•"/>
-            </a:pPr>
-            <a:r>
-              <a:rPr sz="2300">
-                <a:solidFill>
-                  <a:srgbClr val="1E293B"/>
-                </a:solidFill>
-                <a:latin typeface="Calibri"/>
-              </a:rPr>
-              <a:t>Quan chức ép Xuân phải thua vì sợ “nạn chiến tranh”.</a:t>
-            </a:r>
-          </a:p>
-          <a:p>
-            <a:pPr algn="l" marL="365760" indent="-365760">
-              <a:spcAft>
-                <a:spcPts val="800"/>
-              </a:spcAft>
-              <a:buClr>
-                <a:srgbClr val="1E40AF"/>
-              </a:buClr>
-              <a:buFont typeface="Arial"/>
-              <a:buChar char="•"/>
-            </a:pPr>
-            <a:r>
-              <a:rPr sz="2300">
-                <a:solidFill>
-                  <a:srgbClr val="1E293B"/>
-                </a:solidFill>
-                <a:latin typeface="Calibri"/>
-              </a:rPr>
-              <a:t>Xuân thua, công chúng phẫn nộ.</a:t>
-            </a:r>
-          </a:p>
-          <a:p>
-            <a:pPr algn="l" marL="365760" indent="-365760">
-              <a:spcAft>
-                <a:spcPts val="800"/>
-              </a:spcAft>
-              <a:buClr>
-                <a:srgbClr val="1E40AF"/>
-              </a:buClr>
-              <a:buFont typeface="Arial"/>
-              <a:buChar char="•"/>
-            </a:pPr>
-            <a:r>
-              <a:rPr sz="2300">
-                <a:solidFill>
-                  <a:srgbClr val="1E293B"/>
-                </a:solidFill>
-                <a:latin typeface="Calibri"/>
-              </a:rPr>
-              <a:t>Xuân diễn thuyết, được tung hô “anh hùng cứu quốc”.</a:t>
+              <a:t>Tóm tắt các sự việc chính được kể trong đoạn trích Xuân Tóc Đỏ cứu quốc bằng một sơ đồ phù hợp.</a:t>
             </a:r>
           </a:p>
         </p:txBody>
@@ -17645,8 +18472,8 @@
         </p:nvSpPr>
         <p:spPr>
           <a:xfrm>
-            <a:off x="731520" y="5074920"/>
-            <a:ext cx="10789920" cy="731520"/>
+            <a:off x="731520" y="5120640"/>
+            <a:ext cx="10789920" cy="693420"/>
           </a:xfrm>
           <a:prstGeom prst="roundRect">
             <a:avLst>
@@ -17654,11 +18481,11 @@
             </a:avLst>
           </a:prstGeom>
           <a:solidFill>
-            <a:srgbClr val="FEF2F2"/>
+            <a:srgbClr val="EFF4FF"/>
           </a:solidFill>
           <a:ln w="19050">
             <a:solidFill>
-              <a:srgbClr val="991B1B"/>
+              <a:srgbClr val="1E40AF"/>
             </a:solidFill>
           </a:ln>
           <a:effectLst/>
@@ -17693,8 +18520,8 @@
         </p:nvSpPr>
         <p:spPr>
           <a:xfrm>
-            <a:off x="914400" y="5074920"/>
-            <a:ext cx="10424160" cy="731520"/>
+            <a:off x="914400" y="5120640"/>
+            <a:ext cx="10424160" cy="693420"/>
           </a:xfrm>
           <a:prstGeom prst="rect">
             <a:avLst/>
@@ -17713,13 +18540,13 @@
               </a:spcAft>
             </a:pPr>
             <a:r>
-              <a:rPr sz="2400" b="1">
-                <a:solidFill>
-                  <a:srgbClr val="991B1B"/>
+              <a:rPr sz="2200" b="1">
+                <a:solidFill>
+                  <a:srgbClr val="1E40AF"/>
                 </a:solidFill>
                 <a:latin typeface="Calibri"/>
               </a:rPr>
-              <a:t>Thất bại hoá thành “vinh quang” – đỉnh điểm trào phúng.</a:t>
+              <a:t>💡 Trận đấu – mệnh lệnh – kết quả – diễn thuyết.</a:t>
             </a:r>
           </a:p>
         </p:txBody>
@@ -17802,14 +18629,14 @@
         </p:nvSpPr>
         <p:spPr>
           <a:xfrm>
-            <a:off x="10253167" y="457200"/>
-            <a:ext cx="1389888" cy="457200"/>
+            <a:off x="9942271" y="457200"/>
+            <a:ext cx="1700784" cy="457200"/>
           </a:xfrm>
           <a:prstGeom prst="roundRect">
             <a:avLst/>
           </a:prstGeom>
           <a:solidFill>
-            <a:srgbClr val="1E40AF"/>
+            <a:srgbClr val="991B1B"/>
           </a:solidFill>
           <a:ln>
             <a:noFill/>
@@ -17842,7 +18669,7 @@
                 </a:solidFill>
                 <a:latin typeface="Arial"/>
               </a:rPr>
-              <a:t>ĐỀ BÀI</a:t>
+              <a:t>LỜI GIẢI</a:t>
             </a:r>
           </a:p>
         </p:txBody>
@@ -17856,7 +18683,7 @@
         <p:spPr>
           <a:xfrm>
             <a:off x="731520" y="274320"/>
-            <a:ext cx="9582912" cy="868680"/>
+            <a:ext cx="9272016" cy="868680"/>
           </a:xfrm>
           <a:prstGeom prst="rect">
             <a:avLst/>
@@ -17876,7 +18703,7 @@
                 </a:solidFill>
                 <a:latin typeface="Arial"/>
               </a:rPr>
-              <a:t>NGÔI KỂ VÀ ĐIỂM NHÌN</a:t>
+              <a:t>SỰ VIỆC CHÍNH</a:t>
             </a:r>
           </a:p>
         </p:txBody>
@@ -17969,7 +18796,7 @@
         <p:spPr>
           <a:xfrm>
             <a:off x="731520" y="1463040"/>
-            <a:ext cx="10789920" cy="3566160"/>
+            <a:ext cx="10789920" cy="3474720"/>
           </a:xfrm>
           <a:prstGeom prst="rect">
             <a:avLst/>
@@ -17982,19 +18809,87 @@
           </a:bodyPr>
           <a:lstStyle/>
           <a:p>
-            <a:pPr algn="l">
+            <a:pPr algn="l" marL="365760" indent="-365760">
               <a:spcAft>
                 <a:spcPts val="800"/>
               </a:spcAft>
+              <a:buClr>
+                <a:srgbClr val="1E40AF"/>
+              </a:buClr>
+              <a:buFont typeface="Arial"/>
+              <a:buChar char="•"/>
             </a:pPr>
             <a:r>
-              <a:rPr sz="2600" b="1">
+              <a:rPr sz="2300">
                 <a:solidFill>
                   <a:srgbClr val="1E293B"/>
                 </a:solidFill>
                 <a:latin typeface="Calibri"/>
               </a:rPr>
-              <a:t>Xác định ngôi kể, điểm nhìn nhà văn lựa chọn và ý nghĩa của chúng trong việc làm sáng tỏ bản chất hiện thực.</a:t>
+              <a:t>Trận quần vợt Xuân Tóc Đỏ – quán quân Xiêm La.</a:t>
+            </a:r>
+          </a:p>
+          <a:p>
+            <a:pPr algn="l" marL="365760" indent="-365760">
+              <a:spcAft>
+                <a:spcPts val="800"/>
+              </a:spcAft>
+              <a:buClr>
+                <a:srgbClr val="1E40AF"/>
+              </a:buClr>
+              <a:buFont typeface="Arial"/>
+              <a:buChar char="•"/>
+            </a:pPr>
+            <a:r>
+              <a:rPr sz="2300">
+                <a:solidFill>
+                  <a:srgbClr val="1E293B"/>
+                </a:solidFill>
+                <a:latin typeface="Calibri"/>
+              </a:rPr>
+              <a:t>Quan chức ép Xuân phải thua vì sợ “nạn chiến tranh”.</a:t>
+            </a:r>
+          </a:p>
+          <a:p>
+            <a:pPr algn="l" marL="365760" indent="-365760">
+              <a:spcAft>
+                <a:spcPts val="800"/>
+              </a:spcAft>
+              <a:buClr>
+                <a:srgbClr val="1E40AF"/>
+              </a:buClr>
+              <a:buFont typeface="Arial"/>
+              <a:buChar char="•"/>
+            </a:pPr>
+            <a:r>
+              <a:rPr sz="2300">
+                <a:solidFill>
+                  <a:srgbClr val="1E293B"/>
+                </a:solidFill>
+                <a:latin typeface="Calibri"/>
+              </a:rPr>
+              <a:t>Xuân thua, công chúng phẫn nộ.</a:t>
+            </a:r>
+          </a:p>
+          <a:p>
+            <a:pPr algn="l" marL="365760" indent="-365760">
+              <a:spcAft>
+                <a:spcPts val="800"/>
+              </a:spcAft>
+              <a:buClr>
+                <a:srgbClr val="1E40AF"/>
+              </a:buClr>
+              <a:buFont typeface="Arial"/>
+              <a:buChar char="•"/>
+            </a:pPr>
+            <a:r>
+              <a:rPr sz="2300">
+                <a:solidFill>
+                  <a:srgbClr val="1E293B"/>
+                </a:solidFill>
+                <a:latin typeface="Calibri"/>
+              </a:rPr>
+              <a:t>Xuân diễn thuyết, được tung hô “anh hùng cứu quốc”.</a:t>
             </a:r>
           </a:p>
         </p:txBody>
@@ -18007,8 +18902,8 @@
         </p:nvSpPr>
         <p:spPr>
           <a:xfrm>
-            <a:off x="731520" y="5120640"/>
-            <a:ext cx="10789920" cy="693420"/>
+            <a:off x="731520" y="5074920"/>
+            <a:ext cx="10789920" cy="731520"/>
           </a:xfrm>
           <a:prstGeom prst="roundRect">
             <a:avLst>
@@ -18016,11 +18911,11 @@
             </a:avLst>
           </a:prstGeom>
           <a:solidFill>
-            <a:srgbClr val="EFF4FF"/>
+            <a:srgbClr val="FEF2F2"/>
           </a:solidFill>
           <a:ln w="19050">
             <a:solidFill>
-              <a:srgbClr val="1E40AF"/>
+              <a:srgbClr val="991B1B"/>
             </a:solidFill>
           </a:ln>
           <a:effectLst/>
@@ -18055,8 +18950,8 @@
         </p:nvSpPr>
         <p:spPr>
           <a:xfrm>
-            <a:off x="914400" y="5120640"/>
-            <a:ext cx="10424160" cy="693420"/>
+            <a:off x="914400" y="5074920"/>
+            <a:ext cx="10424160" cy="731520"/>
           </a:xfrm>
           <a:prstGeom prst="rect">
             <a:avLst/>
@@ -18075,13 +18970,13 @@
               </a:spcAft>
             </a:pPr>
             <a:r>
-              <a:rPr sz="2200" b="1">
-                <a:solidFill>
-                  <a:srgbClr val="1E40AF"/>
+              <a:rPr sz="2400" b="1">
+                <a:solidFill>
+                  <a:srgbClr val="991B1B"/>
                 </a:solidFill>
                 <a:latin typeface="Calibri"/>
               </a:rPr>
-              <a:t>💡 Người kể có tham gia câu chuyện không?</a:t>
+              <a:t>Thất bại hoá thành “vinh quang” – đỉnh điểm trào phúng.</a:t>
             </a:r>
           </a:p>
         </p:txBody>
@@ -18164,14 +19059,14 @@
         </p:nvSpPr>
         <p:spPr>
           <a:xfrm>
-            <a:off x="9942271" y="457200"/>
-            <a:ext cx="1700784" cy="457200"/>
+            <a:off x="10253167" y="457200"/>
+            <a:ext cx="1389888" cy="457200"/>
           </a:xfrm>
           <a:prstGeom prst="roundRect">
             <a:avLst/>
           </a:prstGeom>
           <a:solidFill>
-            <a:srgbClr val="991B1B"/>
+            <a:srgbClr val="1E40AF"/>
           </a:solidFill>
           <a:ln>
             <a:noFill/>
@@ -18204,7 +19099,7 @@
                 </a:solidFill>
                 <a:latin typeface="Arial"/>
               </a:rPr>
-              <a:t>LỜI GIẢI</a:t>
+              <a:t>ĐỀ BÀI</a:t>
             </a:r>
           </a:p>
         </p:txBody>
@@ -18218,7 +19113,7 @@
         <p:spPr>
           <a:xfrm>
             <a:off x="731520" y="274320"/>
-            <a:ext cx="9272016" cy="868680"/>
+            <a:ext cx="9582912" cy="868680"/>
           </a:xfrm>
           <a:prstGeom prst="rect">
             <a:avLst/>
@@ -18331,7 +19226,7 @@
         <p:spPr>
           <a:xfrm>
             <a:off x="731520" y="1463040"/>
-            <a:ext cx="10789920" cy="3474720"/>
+            <a:ext cx="10789920" cy="3566160"/>
           </a:xfrm>
           <a:prstGeom prst="rect">
             <a:avLst/>
@@ -18344,66 +19239,19 @@
           </a:bodyPr>
           <a:lstStyle/>
           <a:p>
-            <a:pPr algn="l" marL="365760" indent="-365760">
+            <a:pPr algn="l">
               <a:spcAft>
                 <a:spcPts val="800"/>
               </a:spcAft>
-              <a:buClr>
-                <a:srgbClr val="1E40AF"/>
-              </a:buClr>
-              <a:buFont typeface="Arial"/>
-              <a:buChar char="•"/>
             </a:pPr>
             <a:r>
-              <a:rPr sz="2300">
+              <a:rPr sz="2600" b="1">
                 <a:solidFill>
                   <a:srgbClr val="1E293B"/>
                 </a:solidFill>
                 <a:latin typeface="Calibri"/>
               </a:rPr>
-              <a:t>Ngôi thứ ba, điểm nhìn toàn tri.</a:t>
-            </a:r>
-          </a:p>
-          <a:p>
-            <a:pPr algn="l" marL="365760" indent="-365760">
-              <a:spcAft>
-                <a:spcPts val="800"/>
-              </a:spcAft>
-              <a:buClr>
-                <a:srgbClr val="1E40AF"/>
-              </a:buClr>
-              <a:buFont typeface="Arial"/>
-              <a:buChar char="•"/>
-            </a:pPr>
-            <a:r>
-              <a:rPr sz="2300">
-                <a:solidFill>
-                  <a:srgbClr val="1E293B"/>
-                </a:solidFill>
-                <a:latin typeface="Calibri"/>
-              </a:rPr>
-              <a:t>Giọng giễu nhại: lời lẽ trang trọng cho sự việc lố bịch.</a:t>
-            </a:r>
-          </a:p>
-          <a:p>
-            <a:pPr algn="l" marL="365760" indent="-365760">
-              <a:spcAft>
-                <a:spcPts val="800"/>
-              </a:spcAft>
-              <a:buClr>
-                <a:srgbClr val="1E40AF"/>
-              </a:buClr>
-              <a:buFont typeface="Arial"/>
-              <a:buChar char="•"/>
-            </a:pPr>
-            <a:r>
-              <a:rPr sz="2300">
-                <a:solidFill>
-                  <a:srgbClr val="1E293B"/>
-                </a:solidFill>
-                <a:latin typeface="Calibri"/>
-              </a:rPr>
-              <a:t>Soi thấu cả quan chức, vua Xiêm, đám đông.</a:t>
+              <a:t>Xác định ngôi kể, điểm nhìn nhà văn lựa chọn và ý nghĩa của chúng trong việc làm sáng tỏ bản chất hiện thực.</a:t>
             </a:r>
           </a:p>
         </p:txBody>
@@ -18416,8 +19264,8 @@
         </p:nvSpPr>
         <p:spPr>
           <a:xfrm>
-            <a:off x="731520" y="5074920"/>
-            <a:ext cx="10789920" cy="731520"/>
+            <a:off x="731520" y="5120640"/>
+            <a:ext cx="10789920" cy="693420"/>
           </a:xfrm>
           <a:prstGeom prst="roundRect">
             <a:avLst>
@@ -18425,11 +19273,11 @@
             </a:avLst>
           </a:prstGeom>
           <a:solidFill>
-            <a:srgbClr val="FEF2F2"/>
+            <a:srgbClr val="EFF4FF"/>
           </a:solidFill>
           <a:ln w="19050">
             <a:solidFill>
-              <a:srgbClr val="991B1B"/>
+              <a:srgbClr val="1E40AF"/>
             </a:solidFill>
           </a:ln>
           <a:effectLst/>
@@ -18464,8 +19312,8 @@
         </p:nvSpPr>
         <p:spPr>
           <a:xfrm>
-            <a:off x="914400" y="5074920"/>
-            <a:ext cx="10424160" cy="731520"/>
+            <a:off x="914400" y="5120640"/>
+            <a:ext cx="10424160" cy="693420"/>
           </a:xfrm>
           <a:prstGeom prst="rect">
             <a:avLst/>
@@ -18484,13 +19332,13 @@
               </a:spcAft>
             </a:pPr>
             <a:r>
-              <a:rPr sz="2400" b="1">
-                <a:solidFill>
-                  <a:srgbClr val="991B1B"/>
+              <a:rPr sz="2200" b="1">
+                <a:solidFill>
+                  <a:srgbClr val="1E40AF"/>
                 </a:solidFill>
                 <a:latin typeface="Calibri"/>
               </a:rPr>
-              <a:t>Phơi bày bản chất nhố nhăng của xã hội thượng lưu.</a:t>
+              <a:t>💡 Người kể có tham gia câu chuyện không?</a:t>
             </a:r>
           </a:p>
         </p:txBody>

--- a/mon/ngu_van/slide/lop12/Slide_NGUVAN12_Bai1_KhaNangLonLaoCuaTieuThuyet_T1-11.pptx
+++ b/mon/ngu_van/slide/lop12/Slide_NGUVAN12_Bai1_KhaNangLonLaoCuaTieuThuyet_T1-11.pptx
@@ -17695,7 +17695,7 @@
       </p:sp>
       <p:pic>
         <p:nvPicPr>
-          <p:cNvPr id="7" name="Picture 6" descr="QR_video_ZQa94Rjp2_o.png"/>
+          <p:cNvPr id="7" name="Picture 6" descr="QR_video_Rzx8PfOKMaY.png"/>
           <p:cNvPicPr>
             <a:picLocks noChangeAspect="1"/>
           </p:cNvPicPr>
@@ -17751,7 +17751,7 @@
                 </a:solidFill>
                 <a:latin typeface="Calibri"/>
               </a:rPr>
-              <a:t>🎬 Đọc Xuân Tóc Đỏ cứu quốc (Số đỏ – Vũ Trọng Phụng) – Ngữ văn 12 KNTT</a:t>
+              <a:t>🎬 Vũ Trọng Phụng – Nhà văn xuất sắc thế kỷ 20 (Danh nhân Thăng Long – Hà Nội)</a:t>
             </a:r>
           </a:p>
           <a:p>
@@ -17767,7 +17767,7 @@
                 </a:solidFill>
                 <a:latin typeface="Calibri"/>
               </a:rPr>
-              <a:t>Kênh: Học văn online Cô Hợp</a:t>
+              <a:t>Kênh: HTV – Đài Hà Nội</a:t>
             </a:r>
           </a:p>
           <a:p>
@@ -17788,7 +17788,7 @@
                 </a:solidFill>
                 <a:latin typeface="Calibri"/>
               </a:rPr>
-              <a:t>Đọc văn bản (nghe đọc diễn cảm)</a:t>
+              <a:t>Tìm hiểu tác giả Vũ Trọng Phụng</a:t>
             </a:r>
           </a:p>
           <a:p>
@@ -17805,7 +17805,7 @@
                 <a:latin typeface="Calibri"/>
                 <a:hlinkClick r:id="rId3"/>
               </a:rPr>
-              <a:t>https://www.youtube.com/watch?v=ZQa94Rjp2_o</a:t>
+              <a:t>https://www.youtube.com/watch?v=Rzx8PfOKMaY</a:t>
             </a:r>
           </a:p>
         </p:txBody>

--- a/mon/ngu_van/slide/lop12/Slide_NGUVAN12_Bai1_KhaNangLonLaoCuaTieuThuyet_T1-11.pptx
+++ b/mon/ngu_van/slide/lop12/Slide_NGUVAN12_Bai1_KhaNangLonLaoCuaTieuThuyet_T1-11.pptx
@@ -5788,7 +5788,7 @@
                 </a:solidFill>
                 <a:latin typeface="Calibri"/>
               </a:rPr>
-              <a:t>Trường THPT Vĩnh Thạnh – Tổ Ngữ văn – Tiếng Anh</a:t>
+              <a:t>Trường THPT – Tổ Ngữ văn – Tiếng Anh</a:t>
             </a:r>
           </a:p>
         </p:txBody>
@@ -16540,103 +16540,6 @@
       <p:grpSpPr/>
       <p:sp>
         <p:nvSpPr>
-          <p:cNvPr id="2" name="Rectangle 1"/>
-          <p:cNvSpPr/>
-          <p:nvPr/>
-        </p:nvSpPr>
-        <p:spPr>
-          <a:xfrm>
-            <a:off x="457200" y="384048"/>
-            <a:ext cx="109728" cy="658368"/>
-          </a:xfrm>
-          <a:prstGeom prst="rect">
-            <a:avLst/>
-          </a:prstGeom>
-          <a:solidFill>
-            <a:srgbClr val="1E40AF"/>
-          </a:solidFill>
-          <a:ln>
-            <a:noFill/>
-          </a:ln>
-          <a:effectLst/>
-        </p:spPr>
-        <p:style>
-          <a:lnRef idx="1">
-            <a:schemeClr val="accent1"/>
-          </a:lnRef>
-          <a:fillRef idx="3">
-            <a:schemeClr val="accent1"/>
-          </a:fillRef>
-          <a:effectRef idx="2">
-            <a:schemeClr val="accent1"/>
-          </a:effectRef>
-          <a:fontRef idx="minor">
-            <a:schemeClr val="lt1"/>
-          </a:fontRef>
-        </p:style>
-        <p:txBody>
-          <a:bodyPr rtlCol="0" anchor="ctr"/>
-          <a:lstStyle/>
-          <a:p>
-            <a:pPr algn="ctr"/>
-          </a:p>
-        </p:txBody>
-      </p:sp>
-      <p:sp>
-        <p:nvSpPr>
-          <p:cNvPr id="3" name="Rounded Rectangle 2"/>
-          <p:cNvSpPr/>
-          <p:nvPr/>
-        </p:nvSpPr>
-        <p:spPr>
-          <a:xfrm>
-            <a:off x="10097719" y="457200"/>
-            <a:ext cx="1545336" cy="457200"/>
-          </a:xfrm>
-          <a:prstGeom prst="roundRect">
-            <a:avLst/>
-          </a:prstGeom>
-          <a:solidFill>
-            <a:srgbClr val="166534"/>
-          </a:solidFill>
-          <a:ln>
-            <a:noFill/>
-          </a:ln>
-          <a:effectLst/>
-        </p:spPr>
-        <p:style>
-          <a:lnRef idx="1">
-            <a:schemeClr val="accent1"/>
-          </a:lnRef>
-          <a:fillRef idx="3">
-            <a:schemeClr val="accent1"/>
-          </a:fillRef>
-          <a:effectRef idx="2">
-            <a:schemeClr val="accent1"/>
-          </a:effectRef>
-          <a:fontRef idx="minor">
-            <a:schemeClr val="lt1"/>
-          </a:fontRef>
-        </p:style>
-        <p:txBody>
-          <a:bodyPr rtlCol="0" anchor="ctr" wrap="none" tIns="0" bIns="0"/>
-          <a:lstStyle/>
-          <a:p>
-            <a:pPr algn="ctr"/>
-            <a:r>
-              <a:rPr sz="1400" b="1">
-                <a:solidFill>
-                  <a:srgbClr val="FFFFFF"/>
-                </a:solidFill>
-                <a:latin typeface="Arial"/>
-              </a:rPr>
-              <a:t>CỦNG CỐ</a:t>
-            </a:r>
-          </a:p>
-        </p:txBody>
-      </p:sp>
-      <p:sp>
-        <p:nvSpPr>
           <p:cNvPr id="4" name="TextBox 3"/>
           <p:cNvSpPr txBox="1"/>
           <p:nvPr/>
@@ -16748,30 +16651,2097 @@
           </a:p>
         </p:txBody>
       </p:sp>
-      <p:pic>
-        <p:nvPicPr>
-          <p:cNvPr id="7" name="Picture 6" descr="SoDoTuDuy_NGUVAN12_Bai1_KhaNangLonLaoCuaTieuThuyet_T1-11.png"/>
-          <p:cNvPicPr>
-            <a:picLocks noChangeAspect="1"/>
-          </p:cNvPicPr>
-          <p:nvPr/>
-        </p:nvPicPr>
-        <p:blipFill>
-          <a:blip r:embed="rId2"/>
-          <a:stretch>
-            <a:fillRect/>
-          </a:stretch>
-        </p:blipFill>
-        <p:spPr>
-          <a:xfrm>
-            <a:off x="1788855" y="1371600"/>
-            <a:ext cx="8675250" cy="4846320"/>
-          </a:xfrm>
-          <a:prstGeom prst="rect">
-            <a:avLst/>
-          </a:prstGeom>
-        </p:spPr>
-      </p:pic>
+      <p:cxnSp>
+        <p:nvCxnSpPr>
+          <p:cNvPr id="7" name="Connector 6"/>
+          <p:cNvCxnSpPr/>
+          <p:nvPr/>
+        </p:nvCxnSpPr>
+        <p:spPr>
+          <a:xfrm flipH="1" flipV="1">
+            <a:off x="4338888" y="2670962"/>
+            <a:ext cx="1688379" cy="1283818"/>
+          </a:xfrm>
+          <a:prstGeom prst="line">
+            <a:avLst/>
+          </a:prstGeom>
+          <a:ln w="44450">
+            <a:solidFill>
+              <a:srgbClr val="548235"/>
+            </a:solidFill>
+          </a:ln>
+        </p:spPr>
+        <p:style>
+          <a:lnRef idx="2">
+            <a:schemeClr val="accent1"/>
+          </a:lnRef>
+          <a:fillRef idx="0">
+            <a:schemeClr val="accent1"/>
+          </a:fillRef>
+          <a:effectRef idx="1">
+            <a:schemeClr val="accent1"/>
+          </a:effectRef>
+          <a:fontRef idx="minor">
+            <a:schemeClr val="tx1"/>
+          </a:fontRef>
+        </p:style>
+      </p:cxnSp>
+      <p:cxnSp>
+        <p:nvCxnSpPr>
+          <p:cNvPr id="8" name="Connector 7"/>
+          <p:cNvCxnSpPr/>
+          <p:nvPr/>
+        </p:nvCxnSpPr>
+        <p:spPr>
+          <a:xfrm flipH="1" flipV="1">
+            <a:off x="2873743" y="1830405"/>
+            <a:ext cx="1465145" cy="840557"/>
+          </a:xfrm>
+          <a:prstGeom prst="line">
+            <a:avLst/>
+          </a:prstGeom>
+          <a:ln w="15875">
+            <a:solidFill>
+              <a:srgbClr val="548235"/>
+            </a:solidFill>
+          </a:ln>
+        </p:spPr>
+        <p:style>
+          <a:lnRef idx="2">
+            <a:schemeClr val="accent1"/>
+          </a:lnRef>
+          <a:fillRef idx="0">
+            <a:schemeClr val="accent1"/>
+          </a:fillRef>
+          <a:effectRef idx="1">
+            <a:schemeClr val="accent1"/>
+          </a:effectRef>
+          <a:fontRef idx="minor">
+            <a:schemeClr val="tx1"/>
+          </a:fontRef>
+        </p:style>
+      </p:cxnSp>
+      <p:sp>
+        <p:nvSpPr>
+          <p:cNvPr id="9" name="Rounded Rectangle 8"/>
+          <p:cNvSpPr/>
+          <p:nvPr/>
+        </p:nvSpPr>
+        <p:spPr>
+          <a:xfrm>
+            <a:off x="738898" y="1654804"/>
+            <a:ext cx="2134845" cy="351200"/>
+          </a:xfrm>
+          <a:prstGeom prst="roundRect">
+            <a:avLst>
+              <a:gd name="adj" fmla="val 50000"/>
+            </a:avLst>
+          </a:prstGeom>
+          <a:solidFill>
+            <a:srgbClr val="EDF5E8"/>
+          </a:solidFill>
+          <a:ln w="15875">
+            <a:solidFill>
+              <a:srgbClr val="548235"/>
+            </a:solidFill>
+          </a:ln>
+          <a:effectLst/>
+        </p:spPr>
+        <p:style>
+          <a:lnRef idx="1">
+            <a:schemeClr val="accent1"/>
+          </a:lnRef>
+          <a:fillRef idx="3">
+            <a:schemeClr val="accent1"/>
+          </a:fillRef>
+          <a:effectRef idx="2">
+            <a:schemeClr val="accent1"/>
+          </a:effectRef>
+          <a:fontRef idx="minor">
+            <a:schemeClr val="lt1"/>
+          </a:fontRef>
+        </p:style>
+        <p:txBody>
+          <a:bodyPr rtlCol="0" anchor="ctr" wrap="none" lIns="64000" rIns="64000" tIns="25400" bIns="25400"/>
+          <a:lstStyle/>
+          <a:p>
+            <a:pPr algn="ctr"/>
+            <a:r>
+              <a:rPr sz="1300" b="1">
+                <a:solidFill>
+                  <a:srgbClr val="8B0000"/>
+                </a:solidFill>
+                <a:latin typeface="Calibri"/>
+              </a:rPr>
+              <a:t>Tiểu thuyết hiện đại</a:t>
+            </a:r>
+          </a:p>
+        </p:txBody>
+      </p:sp>
+      <p:cxnSp>
+        <p:nvCxnSpPr>
+          <p:cNvPr id="10" name="Connector 9"/>
+          <p:cNvCxnSpPr/>
+          <p:nvPr/>
+        </p:nvCxnSpPr>
+        <p:spPr>
+          <a:xfrm flipH="1" flipV="1">
+            <a:off x="2807703" y="2256495"/>
+            <a:ext cx="1531185" cy="414467"/>
+          </a:xfrm>
+          <a:prstGeom prst="line">
+            <a:avLst/>
+          </a:prstGeom>
+          <a:ln w="15875">
+            <a:solidFill>
+              <a:srgbClr val="548235"/>
+            </a:solidFill>
+          </a:ln>
+        </p:spPr>
+        <p:style>
+          <a:lnRef idx="2">
+            <a:schemeClr val="accent1"/>
+          </a:lnRef>
+          <a:fillRef idx="0">
+            <a:schemeClr val="accent1"/>
+          </a:fillRef>
+          <a:effectRef idx="1">
+            <a:schemeClr val="accent1"/>
+          </a:effectRef>
+          <a:fontRef idx="minor">
+            <a:schemeClr val="tx1"/>
+          </a:fontRef>
+        </p:style>
+      </p:cxnSp>
+      <p:sp>
+        <p:nvSpPr>
+          <p:cNvPr id="11" name="Rounded Rectangle 10"/>
+          <p:cNvSpPr/>
+          <p:nvPr/>
+        </p:nvSpPr>
+        <p:spPr>
+          <a:xfrm>
+            <a:off x="804938" y="2080894"/>
+            <a:ext cx="2002765" cy="351200"/>
+          </a:xfrm>
+          <a:prstGeom prst="roundRect">
+            <a:avLst>
+              <a:gd name="adj" fmla="val 50000"/>
+            </a:avLst>
+          </a:prstGeom>
+          <a:solidFill>
+            <a:srgbClr val="EDF5E8"/>
+          </a:solidFill>
+          <a:ln w="15875">
+            <a:solidFill>
+              <a:srgbClr val="548235"/>
+            </a:solidFill>
+          </a:ln>
+          <a:effectLst/>
+        </p:spPr>
+        <p:style>
+          <a:lnRef idx="1">
+            <a:schemeClr val="accent1"/>
+          </a:lnRef>
+          <a:fillRef idx="3">
+            <a:schemeClr val="accent1"/>
+          </a:fillRef>
+          <a:effectRef idx="2">
+            <a:schemeClr val="accent1"/>
+          </a:effectRef>
+          <a:fontRef idx="minor">
+            <a:schemeClr val="lt1"/>
+          </a:fontRef>
+        </p:style>
+        <p:txBody>
+          <a:bodyPr rtlCol="0" anchor="ctr" wrap="none" lIns="64000" rIns="64000" tIns="25400" bIns="25400"/>
+          <a:lstStyle/>
+          <a:p>
+            <a:pPr algn="ctr"/>
+            <a:r>
+              <a:rPr sz="1300" b="0">
+                <a:solidFill>
+                  <a:srgbClr val="000000"/>
+                </a:solidFill>
+                <a:latin typeface="Calibri"/>
+              </a:rPr>
+              <a:t>Phong cách hiện thực</a:t>
+            </a:r>
+          </a:p>
+        </p:txBody>
+      </p:sp>
+      <p:cxnSp>
+        <p:nvCxnSpPr>
+          <p:cNvPr id="12" name="Connector 11"/>
+          <p:cNvCxnSpPr/>
+          <p:nvPr/>
+        </p:nvCxnSpPr>
+        <p:spPr>
+          <a:xfrm flipH="1">
+            <a:off x="2721851" y="2670962"/>
+            <a:ext cx="1617037" cy="112334"/>
+          </a:xfrm>
+          <a:prstGeom prst="line">
+            <a:avLst/>
+          </a:prstGeom>
+          <a:ln w="15875">
+            <a:solidFill>
+              <a:srgbClr val="548235"/>
+            </a:solidFill>
+          </a:ln>
+        </p:spPr>
+        <p:style>
+          <a:lnRef idx="2">
+            <a:schemeClr val="accent1"/>
+          </a:lnRef>
+          <a:fillRef idx="0">
+            <a:schemeClr val="accent1"/>
+          </a:fillRef>
+          <a:effectRef idx="1">
+            <a:schemeClr val="accent1"/>
+          </a:effectRef>
+          <a:fontRef idx="minor">
+            <a:schemeClr val="tx1"/>
+          </a:fontRef>
+        </p:style>
+      </p:cxnSp>
+      <p:sp>
+        <p:nvSpPr>
+          <p:cNvPr id="13" name="Rounded Rectangle 12"/>
+          <p:cNvSpPr/>
+          <p:nvPr/>
+        </p:nvSpPr>
+        <p:spPr>
+          <a:xfrm>
+            <a:off x="890790" y="2506985"/>
+            <a:ext cx="1831061" cy="552622"/>
+          </a:xfrm>
+          <a:prstGeom prst="roundRect">
+            <a:avLst>
+              <a:gd name="adj" fmla="val 50000"/>
+            </a:avLst>
+          </a:prstGeom>
+          <a:solidFill>
+            <a:srgbClr val="EDF5E8"/>
+          </a:solidFill>
+          <a:ln w="15875">
+            <a:solidFill>
+              <a:srgbClr val="548235"/>
+            </a:solidFill>
+          </a:ln>
+          <a:effectLst/>
+        </p:spPr>
+        <p:style>
+          <a:lnRef idx="1">
+            <a:schemeClr val="accent1"/>
+          </a:lnRef>
+          <a:fillRef idx="3">
+            <a:schemeClr val="accent1"/>
+          </a:fillRef>
+          <a:effectRef idx="2">
+            <a:schemeClr val="accent1"/>
+          </a:effectRef>
+          <a:fontRef idx="minor">
+            <a:schemeClr val="lt1"/>
+          </a:fontRef>
+        </p:style>
+        <p:txBody>
+          <a:bodyPr rtlCol="0" anchor="ctr" wrap="none" lIns="64000" rIns="64000" tIns="25400" bIns="25400"/>
+          <a:lstStyle/>
+          <a:p>
+            <a:pPr algn="ctr"/>
+            <a:r>
+              <a:rPr sz="1300" b="0">
+                <a:solidFill>
+                  <a:srgbClr val="000000"/>
+                </a:solidFill>
+                <a:latin typeface="Calibri"/>
+              </a:rPr>
+              <a:t>Nói mỉa: hiển ngôn</a:t>
+            </a:r>
+          </a:p>
+          <a:p>
+            <a:pPr algn="ctr"/>
+            <a:r>
+              <a:rPr sz="1300" b="0">
+                <a:solidFill>
+                  <a:srgbClr val="000000"/>
+                </a:solidFill>
+                <a:latin typeface="Calibri"/>
+              </a:rPr>
+              <a:t>≠ hàm ngôn</a:t>
+            </a:r>
+          </a:p>
+        </p:txBody>
+      </p:sp>
+      <p:cxnSp>
+        <p:nvCxnSpPr>
+          <p:cNvPr id="14" name="Connector 13"/>
+          <p:cNvCxnSpPr/>
+          <p:nvPr/>
+        </p:nvCxnSpPr>
+        <p:spPr>
+          <a:xfrm flipH="1">
+            <a:off x="2850629" y="2670962"/>
+            <a:ext cx="1488259" cy="739846"/>
+          </a:xfrm>
+          <a:prstGeom prst="line">
+            <a:avLst/>
+          </a:prstGeom>
+          <a:ln w="15875">
+            <a:solidFill>
+              <a:srgbClr val="548235"/>
+            </a:solidFill>
+          </a:ln>
+        </p:spPr>
+        <p:style>
+          <a:lnRef idx="2">
+            <a:schemeClr val="accent1"/>
+          </a:lnRef>
+          <a:fillRef idx="0">
+            <a:schemeClr val="accent1"/>
+          </a:fillRef>
+          <a:effectRef idx="1">
+            <a:schemeClr val="accent1"/>
+          </a:effectRef>
+          <a:fontRef idx="minor">
+            <a:schemeClr val="tx1"/>
+          </a:fontRef>
+        </p:style>
+      </p:cxnSp>
+      <p:sp>
+        <p:nvSpPr>
+          <p:cNvPr id="15" name="Rounded Rectangle 14"/>
+          <p:cNvSpPr/>
+          <p:nvPr/>
+        </p:nvSpPr>
+        <p:spPr>
+          <a:xfrm>
+            <a:off x="762012" y="3134497"/>
+            <a:ext cx="2088617" cy="552622"/>
+          </a:xfrm>
+          <a:prstGeom prst="roundRect">
+            <a:avLst>
+              <a:gd name="adj" fmla="val 50000"/>
+            </a:avLst>
+          </a:prstGeom>
+          <a:solidFill>
+            <a:srgbClr val="EDF5E8"/>
+          </a:solidFill>
+          <a:ln w="15875">
+            <a:solidFill>
+              <a:srgbClr val="548235"/>
+            </a:solidFill>
+          </a:ln>
+          <a:effectLst/>
+        </p:spPr>
+        <p:style>
+          <a:lnRef idx="1">
+            <a:schemeClr val="accent1"/>
+          </a:lnRef>
+          <a:fillRef idx="3">
+            <a:schemeClr val="accent1"/>
+          </a:fillRef>
+          <a:effectRef idx="2">
+            <a:schemeClr val="accent1"/>
+          </a:effectRef>
+          <a:fontRef idx="minor">
+            <a:schemeClr val="lt1"/>
+          </a:fontRef>
+        </p:style>
+        <p:txBody>
+          <a:bodyPr rtlCol="0" anchor="ctr" wrap="none" lIns="64000" rIns="64000" tIns="25400" bIns="25400"/>
+          <a:lstStyle/>
+          <a:p>
+            <a:pPr algn="ctr"/>
+            <a:r>
+              <a:rPr sz="1300" b="0">
+                <a:solidFill>
+                  <a:srgbClr val="000000"/>
+                </a:solidFill>
+                <a:latin typeface="Calibri"/>
+              </a:rPr>
+              <a:t>Nghịch ngữ: nghĩa đối</a:t>
+            </a:r>
+          </a:p>
+          <a:p>
+            <a:pPr algn="ctr"/>
+            <a:r>
+              <a:rPr sz="1300" b="0">
+                <a:solidFill>
+                  <a:srgbClr val="000000"/>
+                </a:solidFill>
+                <a:latin typeface="Calibri"/>
+              </a:rPr>
+              <a:t>lập</a:t>
+            </a:r>
+          </a:p>
+        </p:txBody>
+      </p:sp>
+      <p:sp>
+        <p:nvSpPr>
+          <p:cNvPr id="16" name="Oval 15"/>
+          <p:cNvSpPr/>
+          <p:nvPr/>
+        </p:nvSpPr>
+        <p:spPr>
+          <a:xfrm>
+            <a:off x="3502606" y="2259078"/>
+            <a:ext cx="1672565" cy="823767"/>
+          </a:xfrm>
+          <a:prstGeom prst="ellipse">
+            <a:avLst/>
+          </a:prstGeom>
+          <a:solidFill>
+            <a:srgbClr val="E2EFDA"/>
+          </a:solidFill>
+          <a:ln w="31750">
+            <a:solidFill>
+              <a:srgbClr val="375623"/>
+            </a:solidFill>
+          </a:ln>
+          <a:effectLst/>
+        </p:spPr>
+        <p:style>
+          <a:lnRef idx="1">
+            <a:schemeClr val="accent1"/>
+          </a:lnRef>
+          <a:fillRef idx="3">
+            <a:schemeClr val="accent1"/>
+          </a:fillRef>
+          <a:effectRef idx="2">
+            <a:schemeClr val="accent1"/>
+          </a:effectRef>
+          <a:fontRef idx="minor">
+            <a:schemeClr val="lt1"/>
+          </a:fontRef>
+        </p:style>
+        <p:txBody>
+          <a:bodyPr rtlCol="0" anchor="ctr" wrap="none" lIns="64000" rIns="64000" tIns="25400" bIns="25400"/>
+          <a:lstStyle/>
+          <a:p>
+            <a:pPr algn="ctr"/>
+            <a:r>
+              <a:rPr sz="1500" b="1">
+                <a:solidFill>
+                  <a:srgbClr val="000000"/>
+                </a:solidFill>
+                <a:latin typeface="Calibri"/>
+              </a:rPr>
+              <a:t>① Tri thức</a:t>
+            </a:r>
+          </a:p>
+          <a:p>
+            <a:pPr algn="ctr"/>
+            <a:r>
+              <a:rPr sz="1500" b="1">
+                <a:solidFill>
+                  <a:srgbClr val="000000"/>
+                </a:solidFill>
+                <a:latin typeface="Calibri"/>
+              </a:rPr>
+              <a:t>ngữ văn</a:t>
+            </a:r>
+          </a:p>
+        </p:txBody>
+      </p:sp>
+      <p:cxnSp>
+        <p:nvCxnSpPr>
+          <p:cNvPr id="17" name="Connector 16"/>
+          <p:cNvCxnSpPr/>
+          <p:nvPr/>
+        </p:nvCxnSpPr>
+        <p:spPr>
+          <a:xfrm flipV="1">
+            <a:off x="6027267" y="2670962"/>
+            <a:ext cx="1688379" cy="1283818"/>
+          </a:xfrm>
+          <a:prstGeom prst="line">
+            <a:avLst/>
+          </a:prstGeom>
+          <a:ln w="44450">
+            <a:solidFill>
+              <a:srgbClr val="BF8F00"/>
+            </a:solidFill>
+          </a:ln>
+        </p:spPr>
+        <p:style>
+          <a:lnRef idx="2">
+            <a:schemeClr val="accent1"/>
+          </a:lnRef>
+          <a:fillRef idx="0">
+            <a:schemeClr val="accent1"/>
+          </a:fillRef>
+          <a:effectRef idx="1">
+            <a:schemeClr val="accent1"/>
+          </a:effectRef>
+          <a:fontRef idx="minor">
+            <a:schemeClr val="tx1"/>
+          </a:fontRef>
+        </p:style>
+      </p:cxnSp>
+      <p:cxnSp>
+        <p:nvCxnSpPr>
+          <p:cNvPr id="18" name="Connector 17"/>
+          <p:cNvCxnSpPr/>
+          <p:nvPr/>
+        </p:nvCxnSpPr>
+        <p:spPr>
+          <a:xfrm flipV="1">
+            <a:off x="7715646" y="1830405"/>
+            <a:ext cx="1418917" cy="840557"/>
+          </a:xfrm>
+          <a:prstGeom prst="line">
+            <a:avLst/>
+          </a:prstGeom>
+          <a:ln w="15875">
+            <a:solidFill>
+              <a:srgbClr val="BF8F00"/>
+            </a:solidFill>
+          </a:ln>
+        </p:spPr>
+        <p:style>
+          <a:lnRef idx="2">
+            <a:schemeClr val="accent1"/>
+          </a:lnRef>
+          <a:fillRef idx="0">
+            <a:schemeClr val="accent1"/>
+          </a:fillRef>
+          <a:effectRef idx="1">
+            <a:schemeClr val="accent1"/>
+          </a:effectRef>
+          <a:fontRef idx="minor">
+            <a:schemeClr val="tx1"/>
+          </a:fontRef>
+        </p:style>
+      </p:cxnSp>
+      <p:sp>
+        <p:nvSpPr>
+          <p:cNvPr id="19" name="Rounded Rectangle 18"/>
+          <p:cNvSpPr/>
+          <p:nvPr/>
+        </p:nvSpPr>
+        <p:spPr>
+          <a:xfrm>
+            <a:off x="9134563" y="1654804"/>
+            <a:ext cx="2227301" cy="351200"/>
+          </a:xfrm>
+          <a:prstGeom prst="roundRect">
+            <a:avLst>
+              <a:gd name="adj" fmla="val 50000"/>
+            </a:avLst>
+          </a:prstGeom>
+          <a:solidFill>
+            <a:srgbClr val="FFF8E1"/>
+          </a:solidFill>
+          <a:ln w="15875">
+            <a:solidFill>
+              <a:srgbClr val="BF8F00"/>
+            </a:solidFill>
+          </a:ln>
+          <a:effectLst/>
+        </p:spPr>
+        <p:style>
+          <a:lnRef idx="1">
+            <a:schemeClr val="accent1"/>
+          </a:lnRef>
+          <a:fillRef idx="3">
+            <a:schemeClr val="accent1"/>
+          </a:fillRef>
+          <a:effectRef idx="2">
+            <a:schemeClr val="accent1"/>
+          </a:effectRef>
+          <a:fontRef idx="minor">
+            <a:schemeClr val="lt1"/>
+          </a:fontRef>
+        </p:style>
+        <p:txBody>
+          <a:bodyPr rtlCol="0" anchor="ctr" wrap="none" lIns="64000" rIns="64000" tIns="25400" bIns="25400"/>
+          <a:lstStyle/>
+          <a:p>
+            <a:pPr algn="ctr"/>
+            <a:r>
+              <a:rPr sz="1300" b="1">
+                <a:solidFill>
+                  <a:srgbClr val="8B0000"/>
+                </a:solidFill>
+                <a:latin typeface="Calibri"/>
+              </a:rPr>
+              <a:t>Tình huống: phải thua</a:t>
+            </a:r>
+          </a:p>
+        </p:txBody>
+      </p:sp>
+      <p:cxnSp>
+        <p:nvCxnSpPr>
+          <p:cNvPr id="20" name="Connector 19"/>
+          <p:cNvCxnSpPr/>
+          <p:nvPr/>
+        </p:nvCxnSpPr>
+        <p:spPr>
+          <a:xfrm flipV="1">
+            <a:off x="7715646" y="2357206"/>
+            <a:ext cx="1702889" cy="313756"/>
+          </a:xfrm>
+          <a:prstGeom prst="line">
+            <a:avLst/>
+          </a:prstGeom>
+          <a:ln w="15875">
+            <a:solidFill>
+              <a:srgbClr val="BF8F00"/>
+            </a:solidFill>
+          </a:ln>
+        </p:spPr>
+        <p:style>
+          <a:lnRef idx="2">
+            <a:schemeClr val="accent1"/>
+          </a:lnRef>
+          <a:fillRef idx="0">
+            <a:schemeClr val="accent1"/>
+          </a:fillRef>
+          <a:effectRef idx="1">
+            <a:schemeClr val="accent1"/>
+          </a:effectRef>
+          <a:fontRef idx="minor">
+            <a:schemeClr val="tx1"/>
+          </a:fontRef>
+        </p:style>
+      </p:cxnSp>
+      <p:sp>
+        <p:nvSpPr>
+          <p:cNvPr id="21" name="Rounded Rectangle 20"/>
+          <p:cNvSpPr/>
+          <p:nvPr/>
+        </p:nvSpPr>
+        <p:spPr>
+          <a:xfrm>
+            <a:off x="9418535" y="2080894"/>
+            <a:ext cx="1659357" cy="552622"/>
+          </a:xfrm>
+          <a:prstGeom prst="roundRect">
+            <a:avLst>
+              <a:gd name="adj" fmla="val 50000"/>
+            </a:avLst>
+          </a:prstGeom>
+          <a:solidFill>
+            <a:srgbClr val="FFF8E1"/>
+          </a:solidFill>
+          <a:ln w="15875">
+            <a:solidFill>
+              <a:srgbClr val="BF8F00"/>
+            </a:solidFill>
+          </a:ln>
+          <a:effectLst/>
+        </p:spPr>
+        <p:style>
+          <a:lnRef idx="1">
+            <a:schemeClr val="accent1"/>
+          </a:lnRef>
+          <a:fillRef idx="3">
+            <a:schemeClr val="accent1"/>
+          </a:fillRef>
+          <a:effectRef idx="2">
+            <a:schemeClr val="accent1"/>
+          </a:effectRef>
+          <a:fontRef idx="minor">
+            <a:schemeClr val="lt1"/>
+          </a:fontRef>
+        </p:style>
+        <p:txBody>
+          <a:bodyPr rtlCol="0" anchor="ctr" wrap="none" lIns="64000" rIns="64000" tIns="25400" bIns="25400"/>
+          <a:lstStyle/>
+          <a:p>
+            <a:pPr algn="ctr"/>
+            <a:r>
+              <a:rPr sz="1300" b="0">
+                <a:solidFill>
+                  <a:srgbClr val="000000"/>
+                </a:solidFill>
+                <a:latin typeface="Calibri"/>
+              </a:rPr>
+              <a:t>Thua → “anh hùng</a:t>
+            </a:r>
+          </a:p>
+          <a:p>
+            <a:pPr algn="ctr"/>
+            <a:r>
+              <a:rPr sz="1300" b="0">
+                <a:solidFill>
+                  <a:srgbClr val="000000"/>
+                </a:solidFill>
+                <a:latin typeface="Calibri"/>
+              </a:rPr>
+              <a:t>cứu quốc”</a:t>
+            </a:r>
+          </a:p>
+        </p:txBody>
+      </p:sp>
+      <p:cxnSp>
+        <p:nvCxnSpPr>
+          <p:cNvPr id="22" name="Connector 21"/>
+          <p:cNvCxnSpPr/>
+          <p:nvPr/>
+        </p:nvCxnSpPr>
+        <p:spPr>
+          <a:xfrm>
+            <a:off x="7715646" y="2670962"/>
+            <a:ext cx="1488259" cy="313756"/>
+          </a:xfrm>
+          <a:prstGeom prst="line">
+            <a:avLst/>
+          </a:prstGeom>
+          <a:ln w="15875">
+            <a:solidFill>
+              <a:srgbClr val="BF8F00"/>
+            </a:solidFill>
+          </a:ln>
+        </p:spPr>
+        <p:style>
+          <a:lnRef idx="2">
+            <a:schemeClr val="accent1"/>
+          </a:lnRef>
+          <a:fillRef idx="0">
+            <a:schemeClr val="accent1"/>
+          </a:fillRef>
+          <a:effectRef idx="1">
+            <a:schemeClr val="accent1"/>
+          </a:effectRef>
+          <a:fontRef idx="minor">
+            <a:schemeClr val="tx1"/>
+          </a:fontRef>
+        </p:style>
+      </p:cxnSp>
+      <p:sp>
+        <p:nvSpPr>
+          <p:cNvPr id="23" name="Rounded Rectangle 22"/>
+          <p:cNvSpPr/>
+          <p:nvPr/>
+        </p:nvSpPr>
+        <p:spPr>
+          <a:xfrm>
+            <a:off x="9203905" y="2708407"/>
+            <a:ext cx="2088617" cy="552622"/>
+          </a:xfrm>
+          <a:prstGeom prst="roundRect">
+            <a:avLst>
+              <a:gd name="adj" fmla="val 50000"/>
+            </a:avLst>
+          </a:prstGeom>
+          <a:solidFill>
+            <a:srgbClr val="FFF8E1"/>
+          </a:solidFill>
+          <a:ln w="15875">
+            <a:solidFill>
+              <a:srgbClr val="BF8F00"/>
+            </a:solidFill>
+          </a:ln>
+          <a:effectLst/>
+        </p:spPr>
+        <p:style>
+          <a:lnRef idx="1">
+            <a:schemeClr val="accent1"/>
+          </a:lnRef>
+          <a:fillRef idx="3">
+            <a:schemeClr val="accent1"/>
+          </a:fillRef>
+          <a:effectRef idx="2">
+            <a:schemeClr val="accent1"/>
+          </a:effectRef>
+          <a:fontRef idx="minor">
+            <a:schemeClr val="lt1"/>
+          </a:fontRef>
+        </p:style>
+        <p:txBody>
+          <a:bodyPr rtlCol="0" anchor="ctr" wrap="none" lIns="64000" rIns="64000" tIns="25400" bIns="25400"/>
+          <a:lstStyle/>
+          <a:p>
+            <a:pPr algn="ctr"/>
+            <a:r>
+              <a:rPr sz="1300" b="0">
+                <a:solidFill>
+                  <a:srgbClr val="000000"/>
+                </a:solidFill>
+                <a:latin typeface="Calibri"/>
+              </a:rPr>
+              <a:t>Giọng giễu nhại, trào</a:t>
+            </a:r>
+          </a:p>
+          <a:p>
+            <a:pPr algn="ctr"/>
+            <a:r>
+              <a:rPr sz="1300" b="0">
+                <a:solidFill>
+                  <a:srgbClr val="000000"/>
+                </a:solidFill>
+                <a:latin typeface="Calibri"/>
+              </a:rPr>
+              <a:t>phúng</a:t>
+            </a:r>
+          </a:p>
+        </p:txBody>
+      </p:sp>
+      <p:cxnSp>
+        <p:nvCxnSpPr>
+          <p:cNvPr id="24" name="Connector 23"/>
+          <p:cNvCxnSpPr/>
+          <p:nvPr/>
+        </p:nvCxnSpPr>
+        <p:spPr>
+          <a:xfrm>
+            <a:off x="7715646" y="2670962"/>
+            <a:ext cx="1659963" cy="840557"/>
+          </a:xfrm>
+          <a:prstGeom prst="line">
+            <a:avLst/>
+          </a:prstGeom>
+          <a:ln w="15875">
+            <a:solidFill>
+              <a:srgbClr val="BF8F00"/>
+            </a:solidFill>
+          </a:ln>
+        </p:spPr>
+        <p:style>
+          <a:lnRef idx="2">
+            <a:schemeClr val="accent1"/>
+          </a:lnRef>
+          <a:fillRef idx="0">
+            <a:schemeClr val="accent1"/>
+          </a:fillRef>
+          <a:effectRef idx="1">
+            <a:schemeClr val="accent1"/>
+          </a:effectRef>
+          <a:fontRef idx="minor">
+            <a:schemeClr val="tx1"/>
+          </a:fontRef>
+        </p:style>
+      </p:cxnSp>
+      <p:sp>
+        <p:nvSpPr>
+          <p:cNvPr id="25" name="Rounded Rectangle 24"/>
+          <p:cNvSpPr/>
+          <p:nvPr/>
+        </p:nvSpPr>
+        <p:spPr>
+          <a:xfrm>
+            <a:off x="9375609" y="3335919"/>
+            <a:ext cx="1745209" cy="351200"/>
+          </a:xfrm>
+          <a:prstGeom prst="roundRect">
+            <a:avLst>
+              <a:gd name="adj" fmla="val 50000"/>
+            </a:avLst>
+          </a:prstGeom>
+          <a:solidFill>
+            <a:srgbClr val="FFF8E1"/>
+          </a:solidFill>
+          <a:ln w="15875">
+            <a:solidFill>
+              <a:srgbClr val="BF8F00"/>
+            </a:solidFill>
+          </a:ln>
+          <a:effectLst/>
+        </p:spPr>
+        <p:style>
+          <a:lnRef idx="1">
+            <a:schemeClr val="accent1"/>
+          </a:lnRef>
+          <a:fillRef idx="3">
+            <a:schemeClr val="accent1"/>
+          </a:fillRef>
+          <a:effectRef idx="2">
+            <a:schemeClr val="accent1"/>
+          </a:effectRef>
+          <a:fontRef idx="minor">
+            <a:schemeClr val="lt1"/>
+          </a:fontRef>
+        </p:style>
+        <p:txBody>
+          <a:bodyPr rtlCol="0" anchor="ctr" wrap="none" lIns="64000" rIns="64000" tIns="25400" bIns="25400"/>
+          <a:lstStyle/>
+          <a:p>
+            <a:pPr algn="ctr"/>
+            <a:r>
+              <a:rPr sz="1300" b="0">
+                <a:solidFill>
+                  <a:srgbClr val="000000"/>
+                </a:solidFill>
+                <a:latin typeface="Calibri"/>
+              </a:rPr>
+              <a:t>Xã hội “lên đồng”</a:t>
+            </a:r>
+          </a:p>
+        </p:txBody>
+      </p:sp>
+      <p:sp>
+        <p:nvSpPr>
+          <p:cNvPr id="26" name="Oval 25"/>
+          <p:cNvSpPr/>
+          <p:nvPr/>
+        </p:nvSpPr>
+        <p:spPr>
+          <a:xfrm>
+            <a:off x="6810021" y="2259078"/>
+            <a:ext cx="1811249" cy="823767"/>
+          </a:xfrm>
+          <a:prstGeom prst="ellipse">
+            <a:avLst/>
+          </a:prstGeom>
+          <a:solidFill>
+            <a:srgbClr val="FFF2CC"/>
+          </a:solidFill>
+          <a:ln w="31750">
+            <a:solidFill>
+              <a:srgbClr val="BF8F00"/>
+            </a:solidFill>
+          </a:ln>
+          <a:effectLst/>
+        </p:spPr>
+        <p:style>
+          <a:lnRef idx="1">
+            <a:schemeClr val="accent1"/>
+          </a:lnRef>
+          <a:fillRef idx="3">
+            <a:schemeClr val="accent1"/>
+          </a:fillRef>
+          <a:effectRef idx="2">
+            <a:schemeClr val="accent1"/>
+          </a:effectRef>
+          <a:fontRef idx="minor">
+            <a:schemeClr val="lt1"/>
+          </a:fontRef>
+        </p:style>
+        <p:txBody>
+          <a:bodyPr rtlCol="0" anchor="ctr" wrap="none" lIns="64000" rIns="64000" tIns="25400" bIns="25400"/>
+          <a:lstStyle/>
+          <a:p>
+            <a:pPr algn="ctr"/>
+            <a:r>
+              <a:rPr sz="1500" b="1">
+                <a:solidFill>
+                  <a:srgbClr val="000000"/>
+                </a:solidFill>
+                <a:latin typeface="Calibri"/>
+              </a:rPr>
+              <a:t>② Xuân Tóc</a:t>
+            </a:r>
+          </a:p>
+          <a:p>
+            <a:pPr algn="ctr"/>
+            <a:r>
+              <a:rPr sz="1500" b="1">
+                <a:solidFill>
+                  <a:srgbClr val="000000"/>
+                </a:solidFill>
+                <a:latin typeface="Calibri"/>
+              </a:rPr>
+              <a:t>Đỏ cứu quốc</a:t>
+            </a:r>
+          </a:p>
+        </p:txBody>
+      </p:sp>
+      <p:cxnSp>
+        <p:nvCxnSpPr>
+          <p:cNvPr id="27" name="Connector 26"/>
+          <p:cNvCxnSpPr/>
+          <p:nvPr/>
+        </p:nvCxnSpPr>
+        <p:spPr>
+          <a:xfrm flipH="1">
+            <a:off x="4338888" y="3954780"/>
+            <a:ext cx="1688379" cy="1283817"/>
+          </a:xfrm>
+          <a:prstGeom prst="line">
+            <a:avLst/>
+          </a:prstGeom>
+          <a:ln w="44450">
+            <a:solidFill>
+              <a:srgbClr val="2F5597"/>
+            </a:solidFill>
+          </a:ln>
+        </p:spPr>
+        <p:style>
+          <a:lnRef idx="2">
+            <a:schemeClr val="accent1"/>
+          </a:lnRef>
+          <a:fillRef idx="0">
+            <a:schemeClr val="accent1"/>
+          </a:fillRef>
+          <a:effectRef idx="1">
+            <a:schemeClr val="accent1"/>
+          </a:effectRef>
+          <a:fontRef idx="minor">
+            <a:schemeClr val="tx1"/>
+          </a:fontRef>
+        </p:style>
+      </p:cxnSp>
+      <p:cxnSp>
+        <p:nvCxnSpPr>
+          <p:cNvPr id="28" name="Connector 27"/>
+          <p:cNvCxnSpPr/>
+          <p:nvPr/>
+        </p:nvCxnSpPr>
+        <p:spPr>
+          <a:xfrm flipH="1" flipV="1">
+            <a:off x="2688831" y="4398040"/>
+            <a:ext cx="1650057" cy="840557"/>
+          </a:xfrm>
+          <a:prstGeom prst="line">
+            <a:avLst/>
+          </a:prstGeom>
+          <a:ln w="15875">
+            <a:solidFill>
+              <a:srgbClr val="2F5597"/>
+            </a:solidFill>
+          </a:ln>
+        </p:spPr>
+        <p:style>
+          <a:lnRef idx="2">
+            <a:schemeClr val="accent1"/>
+          </a:lnRef>
+          <a:fillRef idx="0">
+            <a:schemeClr val="accent1"/>
+          </a:fillRef>
+          <a:effectRef idx="1">
+            <a:schemeClr val="accent1"/>
+          </a:effectRef>
+          <a:fontRef idx="minor">
+            <a:schemeClr val="tx1"/>
+          </a:fontRef>
+        </p:style>
+      </p:cxnSp>
+      <p:sp>
+        <p:nvSpPr>
+          <p:cNvPr id="29" name="Rounded Rectangle 28"/>
+          <p:cNvSpPr/>
+          <p:nvPr/>
+        </p:nvSpPr>
+        <p:spPr>
+          <a:xfrm>
+            <a:off x="923810" y="4121729"/>
+            <a:ext cx="1765021" cy="552622"/>
+          </a:xfrm>
+          <a:prstGeom prst="roundRect">
+            <a:avLst>
+              <a:gd name="adj" fmla="val 50000"/>
+            </a:avLst>
+          </a:prstGeom>
+          <a:solidFill>
+            <a:srgbClr val="E3EEF9"/>
+          </a:solidFill>
+          <a:ln w="15875">
+            <a:solidFill>
+              <a:srgbClr val="2F5597"/>
+            </a:solidFill>
+          </a:ln>
+          <a:effectLst/>
+        </p:spPr>
+        <p:style>
+          <a:lnRef idx="1">
+            <a:schemeClr val="accent1"/>
+          </a:lnRef>
+          <a:fillRef idx="3">
+            <a:schemeClr val="accent1"/>
+          </a:fillRef>
+          <a:effectRef idx="2">
+            <a:schemeClr val="accent1"/>
+          </a:effectRef>
+          <a:fontRef idx="minor">
+            <a:schemeClr val="lt1"/>
+          </a:fontRef>
+        </p:style>
+        <p:txBody>
+          <a:bodyPr rtlCol="0" anchor="ctr" wrap="none" lIns="64000" rIns="64000" tIns="25400" bIns="25400"/>
+          <a:lstStyle/>
+          <a:p>
+            <a:pPr algn="ctr"/>
+            <a:r>
+              <a:rPr sz="1300" b="1">
+                <a:solidFill>
+                  <a:srgbClr val="8B0000"/>
+                </a:solidFill>
+                <a:latin typeface="Calibri"/>
+              </a:rPr>
+              <a:t>Chị Hoài – người</a:t>
+            </a:r>
+          </a:p>
+          <a:p>
+            <a:pPr algn="ctr"/>
+            <a:r>
+              <a:rPr sz="1300" b="1">
+                <a:solidFill>
+                  <a:srgbClr val="8B0000"/>
+                </a:solidFill>
+                <a:latin typeface="Calibri"/>
+              </a:rPr>
+              <a:t>dâu cũ</a:t>
+            </a:r>
+          </a:p>
+        </p:txBody>
+      </p:sp>
+      <p:cxnSp>
+        <p:nvCxnSpPr>
+          <p:cNvPr id="30" name="Connector 29"/>
+          <p:cNvCxnSpPr/>
+          <p:nvPr/>
+        </p:nvCxnSpPr>
+        <p:spPr>
+          <a:xfrm flipH="1" flipV="1">
+            <a:off x="2635999" y="5025552"/>
+            <a:ext cx="1702889" cy="213045"/>
+          </a:xfrm>
+          <a:prstGeom prst="line">
+            <a:avLst/>
+          </a:prstGeom>
+          <a:ln w="15875">
+            <a:solidFill>
+              <a:srgbClr val="2F5597"/>
+            </a:solidFill>
+          </a:ln>
+        </p:spPr>
+        <p:style>
+          <a:lnRef idx="2">
+            <a:schemeClr val="accent1"/>
+          </a:lnRef>
+          <a:fillRef idx="0">
+            <a:schemeClr val="accent1"/>
+          </a:fillRef>
+          <a:effectRef idx="1">
+            <a:schemeClr val="accent1"/>
+          </a:effectRef>
+          <a:fontRef idx="minor">
+            <a:schemeClr val="tx1"/>
+          </a:fontRef>
+        </p:style>
+      </p:cxnSp>
+      <p:sp>
+        <p:nvSpPr>
+          <p:cNvPr id="31" name="Rounded Rectangle 30"/>
+          <p:cNvSpPr/>
+          <p:nvPr/>
+        </p:nvSpPr>
+        <p:spPr>
+          <a:xfrm>
+            <a:off x="976642" y="4749241"/>
+            <a:ext cx="1659357" cy="552622"/>
+          </a:xfrm>
+          <a:prstGeom prst="roundRect">
+            <a:avLst>
+              <a:gd name="adj" fmla="val 50000"/>
+            </a:avLst>
+          </a:prstGeom>
+          <a:solidFill>
+            <a:srgbClr val="E3EEF9"/>
+          </a:solidFill>
+          <a:ln w="15875">
+            <a:solidFill>
+              <a:srgbClr val="2F5597"/>
+            </a:solidFill>
+          </a:ln>
+          <a:effectLst/>
+        </p:spPr>
+        <p:style>
+          <a:lnRef idx="1">
+            <a:schemeClr val="accent1"/>
+          </a:lnRef>
+          <a:fillRef idx="3">
+            <a:schemeClr val="accent1"/>
+          </a:fillRef>
+          <a:effectRef idx="2">
+            <a:schemeClr val="accent1"/>
+          </a:effectRef>
+          <a:fontRef idx="minor">
+            <a:schemeClr val="lt1"/>
+          </a:fontRef>
+        </p:style>
+        <p:txBody>
+          <a:bodyPr rtlCol="0" anchor="ctr" wrap="none" lIns="64000" rIns="64000" tIns="25400" bIns="25400"/>
+          <a:lstStyle/>
+          <a:p>
+            <a:pPr algn="ctr"/>
+            <a:r>
+              <a:rPr sz="1300" b="0">
+                <a:solidFill>
+                  <a:srgbClr val="000000"/>
+                </a:solidFill>
+                <a:latin typeface="Calibri"/>
+              </a:rPr>
+              <a:t>Ông Bằng, mâm cỗ</a:t>
+            </a:r>
+          </a:p>
+          <a:p>
+            <a:pPr algn="ctr"/>
+            <a:r>
+              <a:rPr sz="1300" b="0">
+                <a:solidFill>
+                  <a:srgbClr val="000000"/>
+                </a:solidFill>
+                <a:latin typeface="Calibri"/>
+              </a:rPr>
+              <a:t>Tết</a:t>
+            </a:r>
+          </a:p>
+        </p:txBody>
+      </p:sp>
+      <p:cxnSp>
+        <p:nvCxnSpPr>
+          <p:cNvPr id="32" name="Connector 31"/>
+          <p:cNvCxnSpPr/>
+          <p:nvPr/>
+        </p:nvCxnSpPr>
+        <p:spPr>
+          <a:xfrm flipH="1">
+            <a:off x="2593073" y="5238597"/>
+            <a:ext cx="1745815" cy="414467"/>
+          </a:xfrm>
+          <a:prstGeom prst="line">
+            <a:avLst/>
+          </a:prstGeom>
+          <a:ln w="15875">
+            <a:solidFill>
+              <a:srgbClr val="2F5597"/>
+            </a:solidFill>
+          </a:ln>
+        </p:spPr>
+        <p:style>
+          <a:lnRef idx="2">
+            <a:schemeClr val="accent1"/>
+          </a:lnRef>
+          <a:fillRef idx="0">
+            <a:schemeClr val="accent1"/>
+          </a:fillRef>
+          <a:effectRef idx="1">
+            <a:schemeClr val="accent1"/>
+          </a:effectRef>
+          <a:fontRef idx="minor">
+            <a:schemeClr val="tx1"/>
+          </a:fontRef>
+        </p:style>
+      </p:cxnSp>
+      <p:sp>
+        <p:nvSpPr>
+          <p:cNvPr id="33" name="Rounded Rectangle 32"/>
+          <p:cNvSpPr/>
+          <p:nvPr/>
+        </p:nvSpPr>
+        <p:spPr>
+          <a:xfrm>
+            <a:off x="1019568" y="5376753"/>
+            <a:ext cx="1573505" cy="552622"/>
+          </a:xfrm>
+          <a:prstGeom prst="roundRect">
+            <a:avLst>
+              <a:gd name="adj" fmla="val 50000"/>
+            </a:avLst>
+          </a:prstGeom>
+          <a:solidFill>
+            <a:srgbClr val="E3EEF9"/>
+          </a:solidFill>
+          <a:ln w="15875">
+            <a:solidFill>
+              <a:srgbClr val="2F5597"/>
+            </a:solidFill>
+          </a:ln>
+          <a:effectLst/>
+        </p:spPr>
+        <p:style>
+          <a:lnRef idx="1">
+            <a:schemeClr val="accent1"/>
+          </a:lnRef>
+          <a:fillRef idx="3">
+            <a:schemeClr val="accent1"/>
+          </a:fillRef>
+          <a:effectRef idx="2">
+            <a:schemeClr val="accent1"/>
+          </a:effectRef>
+          <a:fontRef idx="minor">
+            <a:schemeClr val="lt1"/>
+          </a:fontRef>
+        </p:style>
+        <p:txBody>
+          <a:bodyPr rtlCol="0" anchor="ctr" wrap="none" lIns="64000" rIns="64000" tIns="25400" bIns="25400"/>
+          <a:lstStyle/>
+          <a:p>
+            <a:pPr algn="ctr"/>
+            <a:r>
+              <a:rPr sz="1300" b="0">
+                <a:solidFill>
+                  <a:srgbClr val="000000"/>
+                </a:solidFill>
+                <a:latin typeface="Calibri"/>
+              </a:rPr>
+              <a:t>Giá trị văn hoá</a:t>
+            </a:r>
+          </a:p>
+          <a:p>
+            <a:pPr algn="ctr"/>
+            <a:r>
+              <a:rPr sz="1300" b="0">
+                <a:solidFill>
+                  <a:srgbClr val="000000"/>
+                </a:solidFill>
+                <a:latin typeface="Calibri"/>
+              </a:rPr>
+              <a:t>gia đình</a:t>
+            </a:r>
+          </a:p>
+        </p:txBody>
+      </p:sp>
+      <p:cxnSp>
+        <p:nvCxnSpPr>
+          <p:cNvPr id="34" name="Connector 33"/>
+          <p:cNvCxnSpPr/>
+          <p:nvPr/>
+        </p:nvCxnSpPr>
+        <p:spPr>
+          <a:xfrm flipH="1">
+            <a:off x="2721851" y="5238597"/>
+            <a:ext cx="1617037" cy="941268"/>
+          </a:xfrm>
+          <a:prstGeom prst="line">
+            <a:avLst/>
+          </a:prstGeom>
+          <a:ln w="15875">
+            <a:solidFill>
+              <a:srgbClr val="2F5597"/>
+            </a:solidFill>
+          </a:ln>
+        </p:spPr>
+        <p:style>
+          <a:lnRef idx="2">
+            <a:schemeClr val="accent1"/>
+          </a:lnRef>
+          <a:fillRef idx="0">
+            <a:schemeClr val="accent1"/>
+          </a:fillRef>
+          <a:effectRef idx="1">
+            <a:schemeClr val="accent1"/>
+          </a:effectRef>
+          <a:fontRef idx="minor">
+            <a:schemeClr val="tx1"/>
+          </a:fontRef>
+        </p:style>
+      </p:cxnSp>
+      <p:sp>
+        <p:nvSpPr>
+          <p:cNvPr id="35" name="Rounded Rectangle 34"/>
+          <p:cNvSpPr/>
+          <p:nvPr/>
+        </p:nvSpPr>
+        <p:spPr>
+          <a:xfrm>
+            <a:off x="890790" y="6004265"/>
+            <a:ext cx="1831061" cy="351200"/>
+          </a:xfrm>
+          <a:prstGeom prst="roundRect">
+            <a:avLst>
+              <a:gd name="adj" fmla="val 50000"/>
+            </a:avLst>
+          </a:prstGeom>
+          <a:solidFill>
+            <a:srgbClr val="E3EEF9"/>
+          </a:solidFill>
+          <a:ln w="15875">
+            <a:solidFill>
+              <a:srgbClr val="2F5597"/>
+            </a:solidFill>
+          </a:ln>
+          <a:effectLst/>
+        </p:spPr>
+        <p:style>
+          <a:lnRef idx="1">
+            <a:schemeClr val="accent1"/>
+          </a:lnRef>
+          <a:fillRef idx="3">
+            <a:schemeClr val="accent1"/>
+          </a:fillRef>
+          <a:effectRef idx="2">
+            <a:schemeClr val="accent1"/>
+          </a:effectRef>
+          <a:fontRef idx="minor">
+            <a:schemeClr val="lt1"/>
+          </a:fontRef>
+        </p:style>
+        <p:txBody>
+          <a:bodyPr rtlCol="0" anchor="ctr" wrap="none" lIns="64000" rIns="64000" tIns="25400" bIns="25400"/>
+          <a:lstStyle/>
+          <a:p>
+            <a:pPr algn="ctr"/>
+            <a:r>
+              <a:rPr sz="1300" b="0">
+                <a:solidFill>
+                  <a:srgbClr val="000000"/>
+                </a:solidFill>
+                <a:latin typeface="Calibri"/>
+              </a:rPr>
+              <a:t>Chi tiết “cài cắm”</a:t>
+            </a:r>
+          </a:p>
+        </p:txBody>
+      </p:sp>
+      <p:sp>
+        <p:nvSpPr>
+          <p:cNvPr id="36" name="Oval 35"/>
+          <p:cNvSpPr/>
+          <p:nvPr/>
+        </p:nvSpPr>
+        <p:spPr>
+          <a:xfrm>
+            <a:off x="3155896" y="4826713"/>
+            <a:ext cx="2365985" cy="823767"/>
+          </a:xfrm>
+          <a:prstGeom prst="ellipse">
+            <a:avLst/>
+          </a:prstGeom>
+          <a:solidFill>
+            <a:srgbClr val="E2EFDA"/>
+          </a:solidFill>
+          <a:ln w="31750">
+            <a:solidFill>
+              <a:srgbClr val="375623"/>
+            </a:solidFill>
+          </a:ln>
+          <a:effectLst/>
+        </p:spPr>
+        <p:style>
+          <a:lnRef idx="1">
+            <a:schemeClr val="accent1"/>
+          </a:lnRef>
+          <a:fillRef idx="3">
+            <a:schemeClr val="accent1"/>
+          </a:fillRef>
+          <a:effectRef idx="2">
+            <a:schemeClr val="accent1"/>
+          </a:effectRef>
+          <a:fontRef idx="minor">
+            <a:schemeClr val="lt1"/>
+          </a:fontRef>
+        </p:style>
+        <p:txBody>
+          <a:bodyPr rtlCol="0" anchor="ctr" wrap="none" lIns="64000" rIns="64000" tIns="25400" bIns="25400"/>
+          <a:lstStyle/>
+          <a:p>
+            <a:pPr algn="ctr"/>
+            <a:r>
+              <a:rPr sz="1500" b="1">
+                <a:solidFill>
+                  <a:srgbClr val="000000"/>
+                </a:solidFill>
+                <a:latin typeface="Calibri"/>
+              </a:rPr>
+              <a:t>③ Mùa lá</a:t>
+            </a:r>
+          </a:p>
+          <a:p>
+            <a:pPr algn="ctr"/>
+            <a:r>
+              <a:rPr sz="1500" b="1">
+                <a:solidFill>
+                  <a:srgbClr val="000000"/>
+                </a:solidFill>
+                <a:latin typeface="Calibri"/>
+              </a:rPr>
+              <a:t>rụng trong vườn</a:t>
+            </a:r>
+          </a:p>
+        </p:txBody>
+      </p:sp>
+      <p:cxnSp>
+        <p:nvCxnSpPr>
+          <p:cNvPr id="37" name="Connector 36"/>
+          <p:cNvCxnSpPr/>
+          <p:nvPr/>
+        </p:nvCxnSpPr>
+        <p:spPr>
+          <a:xfrm>
+            <a:off x="6027267" y="3954780"/>
+            <a:ext cx="1688379" cy="1283817"/>
+          </a:xfrm>
+          <a:prstGeom prst="line">
+            <a:avLst/>
+          </a:prstGeom>
+          <a:ln w="44450">
+            <a:solidFill>
+              <a:srgbClr val="7030A0"/>
+            </a:solidFill>
+          </a:ln>
+        </p:spPr>
+        <p:style>
+          <a:lnRef idx="2">
+            <a:schemeClr val="accent1"/>
+          </a:lnRef>
+          <a:fillRef idx="0">
+            <a:schemeClr val="accent1"/>
+          </a:fillRef>
+          <a:effectRef idx="1">
+            <a:schemeClr val="accent1"/>
+          </a:effectRef>
+          <a:fontRef idx="minor">
+            <a:schemeClr val="tx1"/>
+          </a:fontRef>
+        </p:style>
+      </p:cxnSp>
+      <p:cxnSp>
+        <p:nvCxnSpPr>
+          <p:cNvPr id="38" name="Connector 37"/>
+          <p:cNvCxnSpPr/>
+          <p:nvPr/>
+        </p:nvCxnSpPr>
+        <p:spPr>
+          <a:xfrm flipV="1">
+            <a:off x="7715646" y="4297329"/>
+            <a:ext cx="1603829" cy="941268"/>
+          </a:xfrm>
+          <a:prstGeom prst="line">
+            <a:avLst/>
+          </a:prstGeom>
+          <a:ln w="15875">
+            <a:solidFill>
+              <a:srgbClr val="7030A0"/>
+            </a:solidFill>
+          </a:ln>
+        </p:spPr>
+        <p:style>
+          <a:lnRef idx="2">
+            <a:schemeClr val="accent1"/>
+          </a:lnRef>
+          <a:fillRef idx="0">
+            <a:schemeClr val="accent1"/>
+          </a:fillRef>
+          <a:effectRef idx="1">
+            <a:schemeClr val="accent1"/>
+          </a:effectRef>
+          <a:fontRef idx="minor">
+            <a:schemeClr val="tx1"/>
+          </a:fontRef>
+        </p:style>
+      </p:cxnSp>
+      <p:sp>
+        <p:nvSpPr>
+          <p:cNvPr id="39" name="Rounded Rectangle 38"/>
+          <p:cNvSpPr/>
+          <p:nvPr/>
+        </p:nvSpPr>
+        <p:spPr>
+          <a:xfrm>
+            <a:off x="9319475" y="4021018"/>
+            <a:ext cx="1857477" cy="552622"/>
+          </a:xfrm>
+          <a:prstGeom prst="roundRect">
+            <a:avLst>
+              <a:gd name="adj" fmla="val 50000"/>
+            </a:avLst>
+          </a:prstGeom>
+          <a:solidFill>
+            <a:srgbClr val="F3E8F7"/>
+          </a:solidFill>
+          <a:ln w="15875">
+            <a:solidFill>
+              <a:srgbClr val="7030A0"/>
+            </a:solidFill>
+          </a:ln>
+          <a:effectLst/>
+        </p:spPr>
+        <p:style>
+          <a:lnRef idx="1">
+            <a:schemeClr val="accent1"/>
+          </a:lnRef>
+          <a:fillRef idx="3">
+            <a:schemeClr val="accent1"/>
+          </a:fillRef>
+          <a:effectRef idx="2">
+            <a:schemeClr val="accent1"/>
+          </a:effectRef>
+          <a:fontRef idx="minor">
+            <a:schemeClr val="lt1"/>
+          </a:fontRef>
+        </p:style>
+        <p:txBody>
+          <a:bodyPr rtlCol="0" anchor="ctr" wrap="none" lIns="64000" rIns="64000" tIns="25400" bIns="25400"/>
+          <a:lstStyle/>
+          <a:p>
+            <a:pPr algn="ctr"/>
+            <a:r>
+              <a:rPr sz="1300" b="1">
+                <a:solidFill>
+                  <a:srgbClr val="8B0000"/>
+                </a:solidFill>
+                <a:latin typeface="Calibri"/>
+              </a:rPr>
+              <a:t>So sánh, đánh giá</a:t>
+            </a:r>
+          </a:p>
+          <a:p>
+            <a:pPr algn="ctr"/>
+            <a:r>
+              <a:rPr sz="1300" b="1">
+                <a:solidFill>
+                  <a:srgbClr val="8B0000"/>
+                </a:solidFill>
+                <a:latin typeface="Calibri"/>
+              </a:rPr>
+              <a:t>2 truyện</a:t>
+            </a:r>
+          </a:p>
+        </p:txBody>
+      </p:sp>
+      <p:cxnSp>
+        <p:nvCxnSpPr>
+          <p:cNvPr id="40" name="Connector 39"/>
+          <p:cNvCxnSpPr/>
+          <p:nvPr/>
+        </p:nvCxnSpPr>
+        <p:spPr>
+          <a:xfrm flipV="1">
+            <a:off x="7715646" y="4924841"/>
+            <a:ext cx="1874593" cy="313756"/>
+          </a:xfrm>
+          <a:prstGeom prst="line">
+            <a:avLst/>
+          </a:prstGeom>
+          <a:ln w="15875">
+            <a:solidFill>
+              <a:srgbClr val="7030A0"/>
+            </a:solidFill>
+          </a:ln>
+        </p:spPr>
+        <p:style>
+          <a:lnRef idx="2">
+            <a:schemeClr val="accent1"/>
+          </a:lnRef>
+          <a:fillRef idx="0">
+            <a:schemeClr val="accent1"/>
+          </a:fillRef>
+          <a:effectRef idx="1">
+            <a:schemeClr val="accent1"/>
+          </a:effectRef>
+          <a:fontRef idx="minor">
+            <a:schemeClr val="tx1"/>
+          </a:fontRef>
+        </p:style>
+      </p:cxnSp>
+      <p:sp>
+        <p:nvSpPr>
+          <p:cNvPr id="41" name="Rounded Rectangle 40"/>
+          <p:cNvSpPr/>
+          <p:nvPr/>
+        </p:nvSpPr>
+        <p:spPr>
+          <a:xfrm>
+            <a:off x="9590239" y="4648530"/>
+            <a:ext cx="1315949" cy="552622"/>
+          </a:xfrm>
+          <a:prstGeom prst="roundRect">
+            <a:avLst>
+              <a:gd name="adj" fmla="val 50000"/>
+            </a:avLst>
+          </a:prstGeom>
+          <a:solidFill>
+            <a:srgbClr val="F3E8F7"/>
+          </a:solidFill>
+          <a:ln w="15875">
+            <a:solidFill>
+              <a:srgbClr val="7030A0"/>
+            </a:solidFill>
+          </a:ln>
+          <a:effectLst/>
+        </p:spPr>
+        <p:style>
+          <a:lnRef idx="1">
+            <a:schemeClr val="accent1"/>
+          </a:lnRef>
+          <a:fillRef idx="3">
+            <a:schemeClr val="accent1"/>
+          </a:fillRef>
+          <a:effectRef idx="2">
+            <a:schemeClr val="accent1"/>
+          </a:effectRef>
+          <a:fontRef idx="minor">
+            <a:schemeClr val="lt1"/>
+          </a:fontRef>
+        </p:style>
+        <p:txBody>
+          <a:bodyPr rtlCol="0" anchor="ctr" wrap="none" lIns="64000" rIns="64000" tIns="25400" bIns="25400"/>
+          <a:lstStyle/>
+          <a:p>
+            <a:pPr algn="ctr"/>
+            <a:r>
+              <a:rPr sz="1300" b="0">
+                <a:solidFill>
+                  <a:srgbClr val="000000"/>
+                </a:solidFill>
+                <a:latin typeface="Calibri"/>
+              </a:rPr>
+              <a:t>Cơ sở – mục</a:t>
+            </a:r>
+          </a:p>
+          <a:p>
+            <a:pPr algn="ctr"/>
+            <a:r>
+              <a:rPr sz="1300" b="0">
+                <a:solidFill>
+                  <a:srgbClr val="000000"/>
+                </a:solidFill>
+                <a:latin typeface="Calibri"/>
+              </a:rPr>
+              <a:t>đích so sánh</a:t>
+            </a:r>
+          </a:p>
+        </p:txBody>
+      </p:sp>
+      <p:cxnSp>
+        <p:nvCxnSpPr>
+          <p:cNvPr id="42" name="Connector 41"/>
+          <p:cNvCxnSpPr/>
+          <p:nvPr/>
+        </p:nvCxnSpPr>
+        <p:spPr>
+          <a:xfrm>
+            <a:off x="7715646" y="5238597"/>
+            <a:ext cx="1659963" cy="313756"/>
+          </a:xfrm>
+          <a:prstGeom prst="line">
+            <a:avLst/>
+          </a:prstGeom>
+          <a:ln w="15875">
+            <a:solidFill>
+              <a:srgbClr val="7030A0"/>
+            </a:solidFill>
+          </a:ln>
+        </p:spPr>
+        <p:style>
+          <a:lnRef idx="2">
+            <a:schemeClr val="accent1"/>
+          </a:lnRef>
+          <a:fillRef idx="0">
+            <a:schemeClr val="accent1"/>
+          </a:fillRef>
+          <a:effectRef idx="1">
+            <a:schemeClr val="accent1"/>
+          </a:effectRef>
+          <a:fontRef idx="minor">
+            <a:schemeClr val="tx1"/>
+          </a:fontRef>
+        </p:style>
+      </p:cxnSp>
+      <p:sp>
+        <p:nvSpPr>
+          <p:cNvPr id="43" name="Rounded Rectangle 42"/>
+          <p:cNvSpPr/>
+          <p:nvPr/>
+        </p:nvSpPr>
+        <p:spPr>
+          <a:xfrm>
+            <a:off x="9375609" y="5276042"/>
+            <a:ext cx="1745209" cy="552622"/>
+          </a:xfrm>
+          <a:prstGeom prst="roundRect">
+            <a:avLst>
+              <a:gd name="adj" fmla="val 50000"/>
+            </a:avLst>
+          </a:prstGeom>
+          <a:solidFill>
+            <a:srgbClr val="F3E8F7"/>
+          </a:solidFill>
+          <a:ln w="15875">
+            <a:solidFill>
+              <a:srgbClr val="7030A0"/>
+            </a:solidFill>
+          </a:ln>
+          <a:effectLst/>
+        </p:spPr>
+        <p:style>
+          <a:lnRef idx="1">
+            <a:schemeClr val="accent1"/>
+          </a:lnRef>
+          <a:fillRef idx="3">
+            <a:schemeClr val="accent1"/>
+          </a:fillRef>
+          <a:effectRef idx="2">
+            <a:schemeClr val="accent1"/>
+          </a:effectRef>
+          <a:fontRef idx="minor">
+            <a:schemeClr val="lt1"/>
+          </a:fontRef>
+        </p:style>
+        <p:txBody>
+          <a:bodyPr rtlCol="0" anchor="ctr" wrap="none" lIns="64000" rIns="64000" tIns="25400" bIns="25400"/>
+          <a:lstStyle/>
+          <a:p>
+            <a:pPr algn="ctr"/>
+            <a:r>
+              <a:rPr sz="1300" b="0">
+                <a:solidFill>
+                  <a:srgbClr val="000000"/>
+                </a:solidFill>
+                <a:latin typeface="Calibri"/>
+              </a:rPr>
+              <a:t>Tương đồng ↔ khác</a:t>
+            </a:r>
+          </a:p>
+          <a:p>
+            <a:pPr algn="ctr"/>
+            <a:r>
+              <a:rPr sz="1300" b="0">
+                <a:solidFill>
+                  <a:srgbClr val="000000"/>
+                </a:solidFill>
+                <a:latin typeface="Calibri"/>
+              </a:rPr>
+              <a:t>biệt</a:t>
+            </a:r>
+          </a:p>
+        </p:txBody>
+      </p:sp>
+      <p:cxnSp>
+        <p:nvCxnSpPr>
+          <p:cNvPr id="44" name="Connector 43"/>
+          <p:cNvCxnSpPr/>
+          <p:nvPr/>
+        </p:nvCxnSpPr>
+        <p:spPr>
+          <a:xfrm>
+            <a:off x="7715646" y="5238597"/>
+            <a:ext cx="1617037" cy="941268"/>
+          </a:xfrm>
+          <a:prstGeom prst="line">
+            <a:avLst/>
+          </a:prstGeom>
+          <a:ln w="15875">
+            <a:solidFill>
+              <a:srgbClr val="7030A0"/>
+            </a:solidFill>
+          </a:ln>
+        </p:spPr>
+        <p:style>
+          <a:lnRef idx="2">
+            <a:schemeClr val="accent1"/>
+          </a:lnRef>
+          <a:fillRef idx="0">
+            <a:schemeClr val="accent1"/>
+          </a:fillRef>
+          <a:effectRef idx="1">
+            <a:schemeClr val="accent1"/>
+          </a:effectRef>
+          <a:fontRef idx="minor">
+            <a:schemeClr val="tx1"/>
+          </a:fontRef>
+        </p:style>
+      </p:cxnSp>
+      <p:sp>
+        <p:nvSpPr>
+          <p:cNvPr id="45" name="Rounded Rectangle 44"/>
+          <p:cNvSpPr/>
+          <p:nvPr/>
+        </p:nvSpPr>
+        <p:spPr>
+          <a:xfrm>
+            <a:off x="9332683" y="5903554"/>
+            <a:ext cx="1831061" cy="552622"/>
+          </a:xfrm>
+          <a:prstGeom prst="roundRect">
+            <a:avLst>
+              <a:gd name="adj" fmla="val 50000"/>
+            </a:avLst>
+          </a:prstGeom>
+          <a:solidFill>
+            <a:srgbClr val="F3E8F7"/>
+          </a:solidFill>
+          <a:ln w="15875">
+            <a:solidFill>
+              <a:srgbClr val="7030A0"/>
+            </a:solidFill>
+          </a:ln>
+          <a:effectLst/>
+        </p:spPr>
+        <p:style>
+          <a:lnRef idx="1">
+            <a:schemeClr val="accent1"/>
+          </a:lnRef>
+          <a:fillRef idx="3">
+            <a:schemeClr val="accent1"/>
+          </a:fillRef>
+          <a:effectRef idx="2">
+            <a:schemeClr val="accent1"/>
+          </a:effectRef>
+          <a:fontRef idx="minor">
+            <a:schemeClr val="lt1"/>
+          </a:fontRef>
+        </p:style>
+        <p:txBody>
+          <a:bodyPr rtlCol="0" anchor="ctr" wrap="none" lIns="64000" rIns="64000" tIns="25400" bIns="25400"/>
+          <a:lstStyle/>
+          <a:p>
+            <a:pPr algn="ctr"/>
+            <a:r>
+              <a:rPr sz="1300" b="0">
+                <a:solidFill>
+                  <a:srgbClr val="000000"/>
+                </a:solidFill>
+                <a:latin typeface="Calibri"/>
+              </a:rPr>
+              <a:t>Củng cố trực tuyến</a:t>
+            </a:r>
+          </a:p>
+          <a:p>
+            <a:pPr algn="ctr"/>
+            <a:r>
+              <a:rPr sz="1300" b="0">
+                <a:solidFill>
+                  <a:srgbClr val="000000"/>
+                </a:solidFill>
+                <a:latin typeface="Calibri"/>
+              </a:rPr>
+              <a:t>(QR)</a:t>
+            </a:r>
+          </a:p>
+        </p:txBody>
+      </p:sp>
+      <p:sp>
+        <p:nvSpPr>
+          <p:cNvPr id="46" name="Oval 45"/>
+          <p:cNvSpPr/>
+          <p:nvPr/>
+        </p:nvSpPr>
+        <p:spPr>
+          <a:xfrm>
+            <a:off x="6810021" y="4826713"/>
+            <a:ext cx="1811249" cy="823767"/>
+          </a:xfrm>
+          <a:prstGeom prst="ellipse">
+            <a:avLst/>
+          </a:prstGeom>
+          <a:solidFill>
+            <a:srgbClr val="FFF2CC"/>
+          </a:solidFill>
+          <a:ln w="31750">
+            <a:solidFill>
+              <a:srgbClr val="BF8F00"/>
+            </a:solidFill>
+          </a:ln>
+          <a:effectLst/>
+        </p:spPr>
+        <p:style>
+          <a:lnRef idx="1">
+            <a:schemeClr val="accent1"/>
+          </a:lnRef>
+          <a:fillRef idx="3">
+            <a:schemeClr val="accent1"/>
+          </a:fillRef>
+          <a:effectRef idx="2">
+            <a:schemeClr val="accent1"/>
+          </a:effectRef>
+          <a:fontRef idx="minor">
+            <a:schemeClr val="lt1"/>
+          </a:fontRef>
+        </p:style>
+        <p:txBody>
+          <a:bodyPr rtlCol="0" anchor="ctr" wrap="none" lIns="64000" rIns="64000" tIns="25400" bIns="25400"/>
+          <a:lstStyle/>
+          <a:p>
+            <a:pPr algn="ctr"/>
+            <a:r>
+              <a:rPr sz="1500" b="1">
+                <a:solidFill>
+                  <a:srgbClr val="000000"/>
+                </a:solidFill>
+                <a:latin typeface="Calibri"/>
+              </a:rPr>
+              <a:t>④ Viết –</a:t>
+            </a:r>
+          </a:p>
+          <a:p>
+            <a:pPr algn="ctr"/>
+            <a:r>
+              <a:rPr sz="1500" b="1">
+                <a:solidFill>
+                  <a:srgbClr val="000000"/>
+                </a:solidFill>
+                <a:latin typeface="Calibri"/>
+              </a:rPr>
+              <a:t>Nói và nghe</a:t>
+            </a:r>
+          </a:p>
+        </p:txBody>
+      </p:sp>
+      <p:sp>
+        <p:nvSpPr>
+          <p:cNvPr id="47" name="Oval 46"/>
+          <p:cNvSpPr/>
+          <p:nvPr/>
+        </p:nvSpPr>
+        <p:spPr>
+          <a:xfrm>
+            <a:off x="4941353" y="3287245"/>
+            <a:ext cx="2171828" cy="1335069"/>
+          </a:xfrm>
+          <a:prstGeom prst="ellipse">
+            <a:avLst/>
+          </a:prstGeom>
+          <a:solidFill>
+            <a:srgbClr val="002060"/>
+          </a:solidFill>
+          <a:ln w="25400">
+            <a:solidFill>
+              <a:srgbClr val="000B1E"/>
+            </a:solidFill>
+          </a:ln>
+          <a:effectLst/>
+        </p:spPr>
+        <p:style>
+          <a:lnRef idx="1">
+            <a:schemeClr val="accent1"/>
+          </a:lnRef>
+          <a:fillRef idx="3">
+            <a:schemeClr val="accent1"/>
+          </a:fillRef>
+          <a:effectRef idx="2">
+            <a:schemeClr val="accent1"/>
+          </a:effectRef>
+          <a:fontRef idx="minor">
+            <a:schemeClr val="lt1"/>
+          </a:fontRef>
+        </p:style>
+        <p:txBody>
+          <a:bodyPr rtlCol="0" anchor="ctr" wrap="none" lIns="64000" rIns="64000" tIns="25400" bIns="25400"/>
+          <a:lstStyle/>
+          <a:p>
+            <a:pPr algn="ctr"/>
+            <a:r>
+              <a:rPr sz="1700" b="1">
+                <a:solidFill>
+                  <a:srgbClr val="FFFFFF"/>
+                </a:solidFill>
+                <a:latin typeface="Calibri"/>
+              </a:rPr>
+              <a:t>KHẢ NĂNG LỚN</a:t>
+            </a:r>
+          </a:p>
+          <a:p>
+            <a:pPr algn="ctr"/>
+            <a:r>
+              <a:rPr sz="1700" b="1">
+                <a:solidFill>
+                  <a:srgbClr val="FFFFFF"/>
+                </a:solidFill>
+                <a:latin typeface="Calibri"/>
+              </a:rPr>
+              <a:t>LAO CỦA TIỂU</a:t>
+            </a:r>
+          </a:p>
+          <a:p>
+            <a:pPr algn="ctr"/>
+            <a:r>
+              <a:rPr sz="1700" b="1">
+                <a:solidFill>
+                  <a:srgbClr val="FFFFFF"/>
+                </a:solidFill>
+                <a:latin typeface="Calibri"/>
+              </a:rPr>
+              <a:t>THUYẾT</a:t>
+            </a:r>
+          </a:p>
+        </p:txBody>
+      </p:sp>
     </p:spTree>
   </p:cSld>
   <p:clrMapOvr>
